--- a/yuva_yodha/submission/PumpRupee_ANS_4X_Yuva_Yodha.pptx
+++ b/yuva_yodha/submission/PumpRupee_ANS_4X_Yuva_Yodha.pptx
@@ -137,7 +137,7 @@
               <c:strCache>
                 <c:ptCount val="1"/>
                 <c:pt idx="0">
-                  <c:v>Pump curve, full speed</c:v>
+                  <c:v>Pump, full speed (fit to maker data)</c:v>
                 </c:pt>
               </c:strCache>
             </c:strRef>
@@ -199,33 +199,48 @@
           </c:marker>
           <c:cat>
             <c:multiLvlStrRef>
-              <c:f>Sheet1!$A$2:$A$9</c:f>
+              <c:f>Sheet1!$A$2:$A$14</c:f>
               <c:multiLvlStrCache>
-                <c:ptCount val="8"/>
+                <c:ptCount val="13"/>
                 <c:lvl>
                   <c:pt idx="0">
-                    <c:v>0</c:v>
+                    <c:v>10</c:v>
                   </c:pt>
                   <c:pt idx="1">
-                    <c:v>1</c:v>
+                    <c:v>20</c:v>
                   </c:pt>
                   <c:pt idx="2">
-                    <c:v>2</c:v>
+                    <c:v>30</c:v>
                   </c:pt>
                   <c:pt idx="3">
-                    <c:v>3</c:v>
+                    <c:v>40</c:v>
                   </c:pt>
                   <c:pt idx="4">
-                    <c:v>4</c:v>
+                    <c:v>50</c:v>
                   </c:pt>
                   <c:pt idx="5">
-                    <c:v>5</c:v>
+                    <c:v>60</c:v>
                   </c:pt>
                   <c:pt idx="6">
-                    <c:v>6</c:v>
+                    <c:v>70</c:v>
                   </c:pt>
                   <c:pt idx="7">
-                    <c:v>7</c:v>
+                    <c:v>80</c:v>
+                  </c:pt>
+                  <c:pt idx="8">
+                    <c:v>90</c:v>
+                  </c:pt>
+                  <c:pt idx="9">
+                    <c:v>100</c:v>
+                  </c:pt>
+                  <c:pt idx="10">
+                    <c:v>110</c:v>
+                  </c:pt>
+                  <c:pt idx="11">
+                    <c:v>120</c:v>
+                  </c:pt>
+                  <c:pt idx="12">
+                    <c:v>130</c:v>
                   </c:pt>
                 </c:lvl>
               </c:multiLvlStrCache>
@@ -233,32 +248,47 @@
           </c:cat>
           <c:val>
             <c:numRef>
-              <c:f>Sheet1!$B$2:$B$9</c:f>
+              <c:f>Sheet1!$B$2:$B$14</c:f>
               <c:numCache>
                 <c:formatCode>General</c:formatCode>
-                <c:ptCount val="8"/>
+                <c:ptCount val="13"/>
                 <c:pt idx="0">
-                  <c:v>40</c:v>
+                  <c:v>33.1</c:v>
                 </c:pt>
                 <c:pt idx="1">
-                  <c:v>39.7</c:v>
+                  <c:v>33</c:v>
                 </c:pt>
                 <c:pt idx="2">
-                  <c:v>38.6</c:v>
+                  <c:v>32.8</c:v>
                 </c:pt>
                 <c:pt idx="3">
-                  <c:v>36.9</c:v>
+                  <c:v>32.6</c:v>
                 </c:pt>
                 <c:pt idx="4">
-                  <c:v>34.4</c:v>
+                  <c:v>32.3</c:v>
                 </c:pt>
                 <c:pt idx="5">
-                  <c:v>31.3</c:v>
+                  <c:v>31.8</c:v>
                 </c:pt>
                 <c:pt idx="6">
-                  <c:v>27.4</c:v>
+                  <c:v>31.2</c:v>
                 </c:pt>
                 <c:pt idx="7">
+                  <c:v>30.4</c:v>
+                </c:pt>
+                <c:pt idx="8">
+                  <c:v>29.4</c:v>
+                </c:pt>
+                <c:pt idx="9">
+                  <c:v>28.2</c:v>
+                </c:pt>
+                <c:pt idx="10">
+                  <c:v>26.7</c:v>
+                </c:pt>
+                <c:pt idx="11">
+                  <c:v>25</c:v>
+                </c:pt>
+                <c:pt idx="12">
                   <c:v>22.9</c:v>
                 </c:pt>
               </c:numCache>
@@ -275,7 +305,7 @@
               <c:strCache>
                 <c:ptCount val="1"/>
                 <c:pt idx="0">
-                  <c:v>System, valve open</c:v>
+                  <c:v>System, valve open (assumed 10 m lift)</c:v>
                 </c:pt>
               </c:strCache>
             </c:strRef>
@@ -337,33 +367,48 @@
           </c:marker>
           <c:cat>
             <c:multiLvlStrRef>
-              <c:f>Sheet1!$A$2:$A$9</c:f>
+              <c:f>Sheet1!$A$2:$A$14</c:f>
               <c:multiLvlStrCache>
-                <c:ptCount val="8"/>
+                <c:ptCount val="13"/>
                 <c:lvl>
                   <c:pt idx="0">
-                    <c:v>0</c:v>
+                    <c:v>10</c:v>
                   </c:pt>
                   <c:pt idx="1">
-                    <c:v>1</c:v>
+                    <c:v>20</c:v>
                   </c:pt>
                   <c:pt idx="2">
-                    <c:v>2</c:v>
+                    <c:v>30</c:v>
                   </c:pt>
                   <c:pt idx="3">
-                    <c:v>3</c:v>
+                    <c:v>40</c:v>
                   </c:pt>
                   <c:pt idx="4">
-                    <c:v>4</c:v>
+                    <c:v>50</c:v>
                   </c:pt>
                   <c:pt idx="5">
-                    <c:v>5</c:v>
+                    <c:v>60</c:v>
                   </c:pt>
                   <c:pt idx="6">
-                    <c:v>6</c:v>
+                    <c:v>70</c:v>
                   </c:pt>
                   <c:pt idx="7">
-                    <c:v>7</c:v>
+                    <c:v>80</c:v>
+                  </c:pt>
+                  <c:pt idx="8">
+                    <c:v>90</c:v>
+                  </c:pt>
+                  <c:pt idx="9">
+                    <c:v>100</c:v>
+                  </c:pt>
+                  <c:pt idx="10">
+                    <c:v>110</c:v>
+                  </c:pt>
+                  <c:pt idx="11">
+                    <c:v>120</c:v>
+                  </c:pt>
+                  <c:pt idx="12">
+                    <c:v>130</c:v>
                   </c:pt>
                 </c:lvl>
               </c:multiLvlStrCache>
@@ -371,33 +416,48 @@
           </c:cat>
           <c:val>
             <c:numRef>
-              <c:f>Sheet1!$C$2:$C$9</c:f>
+              <c:f>Sheet1!$C$2:$C$14</c:f>
               <c:numCache>
                 <c:formatCode>General</c:formatCode>
-                <c:ptCount val="8"/>
+                <c:ptCount val="13"/>
                 <c:pt idx="0">
+                  <c:v>10.1</c:v>
+                </c:pt>
+                <c:pt idx="1">
+                  <c:v>10.5</c:v>
+                </c:pt>
+                <c:pt idx="2">
+                  <c:v>11.1</c:v>
+                </c:pt>
+                <c:pt idx="3">
                   <c:v>12</c:v>
                 </c:pt>
-                <c:pt idx="1">
-                  <c:v>12.1</c:v>
-                </c:pt>
-                <c:pt idx="2">
-                  <c:v>12.5</c:v>
-                </c:pt>
-                <c:pt idx="3">
+                <c:pt idx="4">
                   <c:v>13.1</c:v>
                 </c:pt>
-                <c:pt idx="4">
-                  <c:v>13.9</c:v>
-                </c:pt>
                 <c:pt idx="5">
-                  <c:v>15</c:v>
+                  <c:v>14.5</c:v>
                 </c:pt>
                 <c:pt idx="6">
-                  <c:v>16.3</c:v>
+                  <c:v>16.1</c:v>
                 </c:pt>
                 <c:pt idx="7">
                   <c:v>17.9</c:v>
+                </c:pt>
+                <c:pt idx="8">
+                  <c:v>20</c:v>
+                </c:pt>
+                <c:pt idx="9">
+                  <c:v>22.4</c:v>
+                </c:pt>
+                <c:pt idx="10">
+                  <c:v>25</c:v>
+                </c:pt>
+                <c:pt idx="11">
+                  <c:v>27.8</c:v>
+                </c:pt>
+                <c:pt idx="12">
+                  <c:v>30.9</c:v>
                 </c:pt>
               </c:numCache>
             </c:numRef>
@@ -475,33 +535,48 @@
           </c:marker>
           <c:cat>
             <c:multiLvlStrRef>
-              <c:f>Sheet1!$A$2:$A$9</c:f>
+              <c:f>Sheet1!$A$2:$A$14</c:f>
               <c:multiLvlStrCache>
-                <c:ptCount val="8"/>
+                <c:ptCount val="13"/>
                 <c:lvl>
                   <c:pt idx="0">
-                    <c:v>0</c:v>
+                    <c:v>10</c:v>
                   </c:pt>
                   <c:pt idx="1">
-                    <c:v>1</c:v>
+                    <c:v>20</c:v>
                   </c:pt>
                   <c:pt idx="2">
-                    <c:v>2</c:v>
+                    <c:v>30</c:v>
                   </c:pt>
                   <c:pt idx="3">
-                    <c:v>3</c:v>
+                    <c:v>40</c:v>
                   </c:pt>
                   <c:pt idx="4">
-                    <c:v>4</c:v>
+                    <c:v>50</c:v>
                   </c:pt>
                   <c:pt idx="5">
-                    <c:v>5</c:v>
+                    <c:v>60</c:v>
                   </c:pt>
                   <c:pt idx="6">
-                    <c:v>6</c:v>
+                    <c:v>70</c:v>
                   </c:pt>
                   <c:pt idx="7">
-                    <c:v>7</c:v>
+                    <c:v>80</c:v>
+                  </c:pt>
+                  <c:pt idx="8">
+                    <c:v>90</c:v>
+                  </c:pt>
+                  <c:pt idx="9">
+                    <c:v>100</c:v>
+                  </c:pt>
+                  <c:pt idx="10">
+                    <c:v>110</c:v>
+                  </c:pt>
+                  <c:pt idx="11">
+                    <c:v>120</c:v>
+                  </c:pt>
+                  <c:pt idx="12">
+                    <c:v>130</c:v>
                   </c:pt>
                 </c:lvl>
               </c:multiLvlStrCache>
@@ -509,33 +584,48 @@
           </c:cat>
           <c:val>
             <c:numRef>
-              <c:f>Sheet1!$D$2:$D$9</c:f>
+              <c:f>Sheet1!$D$2:$D$14</c:f>
               <c:numCache>
                 <c:formatCode>General</c:formatCode>
-                <c:ptCount val="8"/>
+                <c:ptCount val="13"/>
                 <c:pt idx="0">
-                  <c:v>12</c:v>
+                  <c:v>10.6</c:v>
                 </c:pt>
                 <c:pt idx="1">
-                  <c:v>12.4</c:v>
+                  <c:v>12.3</c:v>
                 </c:pt>
                 <c:pt idx="2">
-                  <c:v>13.7</c:v>
+                  <c:v>15.2</c:v>
                 </c:pt>
                 <c:pt idx="3">
-                  <c:v>15.9</c:v>
+                  <c:v>19.2</c:v>
                 </c:pt>
                 <c:pt idx="4">
-                  <c:v>18.8</c:v>
+                  <c:v>24.3</c:v>
                 </c:pt>
                 <c:pt idx="5">
-                  <c:v>22.7</c:v>
+                  <c:v>30.7</c:v>
                 </c:pt>
                 <c:pt idx="6">
-                  <c:v>27.4</c:v>
+                  <c:v>38.1</c:v>
                 </c:pt>
                 <c:pt idx="7">
-                  <c:v>33</c:v>
+                  <c:v/>
+                </c:pt>
+                <c:pt idx="8">
+                  <c:v/>
+                </c:pt>
+                <c:pt idx="9">
+                  <c:v/>
+                </c:pt>
+                <c:pt idx="10">
+                  <c:v/>
+                </c:pt>
+                <c:pt idx="11">
+                  <c:v/>
+                </c:pt>
+                <c:pt idx="12">
+                  <c:v/>
                 </c:pt>
               </c:numCache>
             </c:numRef>
@@ -551,7 +641,7 @@
               <c:strCache>
                 <c:ptCount val="1"/>
                 <c:pt idx="0">
-                  <c:v>Pump curve, slowed by VFD</c:v>
+                  <c:v>Pump slowed by VFD (72% speed)</c:v>
                 </c:pt>
               </c:strCache>
             </c:strRef>
@@ -613,33 +703,48 @@
           </c:marker>
           <c:cat>
             <c:multiLvlStrRef>
-              <c:f>Sheet1!$A$2:$A$9</c:f>
+              <c:f>Sheet1!$A$2:$A$14</c:f>
               <c:multiLvlStrCache>
-                <c:ptCount val="8"/>
+                <c:ptCount val="13"/>
                 <c:lvl>
                   <c:pt idx="0">
-                    <c:v>0</c:v>
+                    <c:v>10</c:v>
                   </c:pt>
                   <c:pt idx="1">
-                    <c:v>1</c:v>
+                    <c:v>20</c:v>
                   </c:pt>
                   <c:pt idx="2">
-                    <c:v>2</c:v>
+                    <c:v>30</c:v>
                   </c:pt>
                   <c:pt idx="3">
-                    <c:v>3</c:v>
+                    <c:v>40</c:v>
                   </c:pt>
                   <c:pt idx="4">
-                    <c:v>4</c:v>
+                    <c:v>50</c:v>
                   </c:pt>
                   <c:pt idx="5">
-                    <c:v>5</c:v>
+                    <c:v>60</c:v>
                   </c:pt>
                   <c:pt idx="6">
-                    <c:v>6</c:v>
+                    <c:v>70</c:v>
                   </c:pt>
                   <c:pt idx="7">
-                    <c:v>7</c:v>
+                    <c:v>80</c:v>
+                  </c:pt>
+                  <c:pt idx="8">
+                    <c:v>90</c:v>
+                  </c:pt>
+                  <c:pt idx="9">
+                    <c:v>100</c:v>
+                  </c:pt>
+                  <c:pt idx="10">
+                    <c:v>110</c:v>
+                  </c:pt>
+                  <c:pt idx="11">
+                    <c:v>120</c:v>
+                  </c:pt>
+                  <c:pt idx="12">
+                    <c:v>130</c:v>
                   </c:pt>
                 </c:lvl>
               </c:multiLvlStrCache>
@@ -647,33 +752,48 @@
           </c:cat>
           <c:val>
             <c:numRef>
-              <c:f>Sheet1!$E$2:$E$9</c:f>
+              <c:f>Sheet1!$E$2:$E$14</c:f>
               <c:numCache>
                 <c:formatCode>General</c:formatCode>
-                <c:ptCount val="8"/>
+                <c:ptCount val="13"/>
                 <c:pt idx="0">
-                  <c:v>28.9</c:v>
+                  <c:v>17.1</c:v>
                 </c:pt>
                 <c:pt idx="1">
-                  <c:v>28.6</c:v>
+                  <c:v>17</c:v>
                 </c:pt>
                 <c:pt idx="2">
-                  <c:v>27.5</c:v>
+                  <c:v>16.8</c:v>
                 </c:pt>
                 <c:pt idx="3">
-                  <c:v>25.8</c:v>
+                  <c:v>16.5</c:v>
                 </c:pt>
                 <c:pt idx="4">
-                  <c:v>23.3</c:v>
+                  <c:v>16.1</c:v>
                 </c:pt>
                 <c:pt idx="5">
-                  <c:v>20.2</c:v>
+                  <c:v>15.5</c:v>
                 </c:pt>
                 <c:pt idx="6">
-                  <c:v>16.3</c:v>
+                  <c:v>14.7</c:v>
                 </c:pt>
                 <c:pt idx="7">
-                  <c:v>11.8</c:v>
+                  <c:v>13.7</c:v>
+                </c:pt>
+                <c:pt idx="8">
+                  <c:v>12.3</c:v>
+                </c:pt>
+                <c:pt idx="9">
+                  <c:v/>
+                </c:pt>
+                <c:pt idx="10">
+                  <c:v/>
+                </c:pt>
+                <c:pt idx="11">
+                  <c:v/>
+                </c:pt>
+                <c:pt idx="12">
+                  <c:v/>
                 </c:pt>
               </c:numCache>
             </c:numRef>
@@ -737,7 +857,7 @@
                     </a:solidFill>
                     <a:latin typeface="Arial"/>
                   </a:rPr>
-                  <a:t>Flow →</a:t>
+                  <a:t>Flow, m³/h</a:t>
                 </a:r>
               </a:p>
             </c:rich>
@@ -783,7 +903,7 @@
         <c:axId val="2094734552"/>
         <c:scaling>
           <c:orientation val="minMax"/>
-          <c:max val="45"/>
+          <c:max val="40"/>
           <c:min val="0"/>
         </c:scaling>
         <c:delete val="0"/>
@@ -820,7 +940,7 @@
                     </a:solidFill>
                     <a:latin typeface="Arial"/>
                   </a:rPr>
-                  <a:t>Head →</a:t>
+                  <a:t>Head, m</a:t>
                 </a:r>
               </a:p>
             </c:rich>
@@ -2264,7 +2384,7 @@
           <a:p>
             <a:r>
               <a:rPr lang="en-US" dirty="0"/>
-              <a:t>The workflow is a design intent. No hardware has been field-tested yet.</a:t>
+              <a:t>Schneider products are named only as examples of where an audited MSME goes next. No integration claim.</a:t>
             </a:r>
             <a:endParaRPr lang="en-US" dirty="0"/>
           </a:p>
@@ -2352,7 +2472,7 @@
           <a:p>
             <a:r>
               <a:rPr lang="en-US" dirty="0"/>
-              <a:t>ACTUALLY TESTED: nothing yet, no hardware or field data. Say this out loud.</a:t>
+              <a:t>ACTUALLY TESTED: nothing yet. Simulated/designed: savings, waste split, calibration, drift detection, cost estimates. To be tested: flow inference vs a reference meter, throttled-valve and blocked-strainer cases, wear drift, pilots, before/after VFD saving.</a:t>
             </a:r>
             <a:endParaRPr lang="en-US" dirty="0"/>
           </a:p>
@@ -2440,7 +2560,7 @@
           <a:p>
             <a:r>
               <a:rPr lang="en-US" dirty="0"/>
-              <a:t>Close with: cheap kit, clever inference, answers in rupees, honest about limits, brings VFD savings to MSMEs that never get audited.</a:t>
+              <a:t>Close with the key message, then the ask: a pilot plant and a reference flow meter for the bench test.</a:t>
             </a:r>
             <a:endParaRPr lang="en-US" dirty="0"/>
           </a:p>
@@ -2704,7 +2824,7 @@
           <a:p>
             <a:r>
               <a:rPr lang="en-US" dirty="0"/>
-              <a:t>The kit is read-only: clamp on the motor cable, sensors on existing gauge ports. The owner keeps the data.</a:t>
+              <a:t>The kit is read-only: clamp on the motor cable, sensors on existing gauge ports, installed by a plant electrician. Workflow: clamp, fit, log 7-14 days, read the rupee report, fix, verify, move the kit to the next pump.</a:t>
             </a:r>
             <a:endParaRPr lang="en-US" dirty="0"/>
           </a:p>
@@ -2792,7 +2912,7 @@
           <a:p>
             <a:r>
               <a:rPr lang="en-US" dirty="0"/>
-              <a:t>Curves are schematic and illustrative shapes, not the Grundfos data. Real fits are in the simulation scripts.</a:t>
+              <a:t>Pump curve = cubic fit to the 14 manufacturer points (Q 10-130 m3/h). System curve is an ASSUMPTION: 10 m static lift plus friction through the rated point. Throttled and VFD curves are computed from those with affinity laws. Simulated, not measured.</a:t>
             </a:r>
             <a:endParaRPr lang="en-US" dirty="0"/>
           </a:p>
@@ -3144,7 +3264,7 @@
           <a:p>
             <a:r>
               <a:rPr lang="en-US" dirty="0"/>
-              <a:t>Schneider products are named only as examples of where an audited MSME goes next. No integration claim.</a:t>
+              <a:t>If asked about Altivar Process: it does sensorless flow inside the drive, which is great once the drive is bought. We help decide which pumps deserve one, and verify the saving after.</a:t>
             </a:r>
             <a:endParaRPr lang="en-US" dirty="0"/>
           </a:p>
@@ -5217,7 +5337,7 @@
                 <a:ea typeface="Calibri" pitchFamily="34" charset="-122"/>
                 <a:cs typeface="Calibri" pitchFamily="34" charset="-120"/>
               </a:rPr>
-              <a:t>Ease of Use &amp; Safety</a:t>
+              <a:t>Ecosystem Fit: Audit → Drive → Verify</a:t>
             </a:r>
             <a:endParaRPr lang="en-US" sz="3000" dirty="0"/>
           </a:p>
@@ -5256,7 +5376,7 @@
                 <a:ea typeface="Calibri" pitchFamily="34" charset="-122"/>
                 <a:cs typeface="Calibri" pitchFamily="34" charset="-120"/>
               </a:rPr>
-              <a:t>Clamp → Fit → Log → Read ₹ report → Fix → Verify.</a:t>
+              <a:t>PumpRupee is the low-cost front door to VFD and energy-management adoption.</a:t>
             </a:r>
             <a:endParaRPr lang="en-US" sz="1600" dirty="0"/>
           </a:p>
@@ -5271,11 +5391,11 @@
         <p:spPr>
           <a:xfrm>
             <a:off x="548640" y="1371600"/>
-            <a:ext cx="1463040" cy="1188720"/>
+            <a:ext cx="3611880" cy="1828800"/>
           </a:xfrm>
           <a:prstGeom prst="roundRect">
             <a:avLst>
-              <a:gd name="adj" fmla="val 6154"/>
+              <a:gd name="adj" fmla="val 4000"/>
             </a:avLst>
           </a:prstGeom>
           <a:solidFill>
@@ -5297,8 +5417,8 @@
         </p:nvSpPr>
         <p:spPr>
           <a:xfrm>
-            <a:off x="640080" y="1444752"/>
-            <a:ext cx="365760" cy="365760"/>
+            <a:off x="685800" y="1481328"/>
+            <a:ext cx="502920" cy="502920"/>
           </a:xfrm>
           <a:prstGeom prst="ellipse">
             <a:avLst/>
@@ -5314,1202 +5434,9 @@
           </a:ln>
         </p:spPr>
       </p:sp>
-      <p:sp>
-        <p:nvSpPr>
-          <p:cNvPr id="6" name="Text 4"/>
-          <p:cNvSpPr txBox="1"/>
-          <p:nvPr/>
-        </p:nvSpPr>
-        <p:spPr>
-          <a:xfrm>
-            <a:off x="640080" y="1444752"/>
-            <a:ext cx="365760" cy="365760"/>
-          </a:xfrm>
-          <a:prstGeom prst="rect">
-            <a:avLst/>
-          </a:prstGeom>
-          <a:noFill/>
-          <a:ln/>
-        </p:spPr>
-        <p:txBody>
-          <a:bodyPr wrap="square" lIns="0" tIns="0" rIns="0" bIns="0" rtlCol="0" anchor="ctr"/>
-          <a:lstStyle/>
-          <a:p>
-            <a:pPr algn="ctr" indent="0" marL="0">
-              <a:buNone/>
-            </a:pPr>
-            <a:r>
-              <a:rPr lang="en-US" sz="1500" b="1" dirty="0">
-                <a:solidFill>
-                  <a:srgbClr val="FFFFFF"/>
-                </a:solidFill>
-                <a:latin typeface="Calibri" pitchFamily="34" charset="0"/>
-                <a:ea typeface="Calibri" pitchFamily="34" charset="-122"/>
-                <a:cs typeface="Calibri" pitchFamily="34" charset="-120"/>
-              </a:rPr>
-              <a:t>1</a:t>
-            </a:r>
-            <a:endParaRPr lang="en-US" sz="1500" dirty="0"/>
-          </a:p>
-        </p:txBody>
-      </p:sp>
-      <p:sp>
-        <p:nvSpPr>
-          <p:cNvPr id="7" name="Text 5"/>
-          <p:cNvSpPr txBox="1"/>
-          <p:nvPr/>
-        </p:nvSpPr>
-        <p:spPr>
-          <a:xfrm>
-            <a:off x="640080" y="1874520"/>
-            <a:ext cx="1298448" cy="640080"/>
-          </a:xfrm>
-          <a:prstGeom prst="rect">
-            <a:avLst/>
-          </a:prstGeom>
-          <a:noFill/>
-          <a:ln/>
-        </p:spPr>
-        <p:txBody>
-          <a:bodyPr wrap="square" lIns="0" tIns="0" rIns="0" bIns="0" rtlCol="0" anchor="t"/>
-          <a:lstStyle/>
-          <a:p>
-            <a:pPr indent="0" marL="0">
-              <a:buNone/>
-            </a:pPr>
-            <a:r>
-              <a:rPr lang="en-US" sz="1500" b="1" dirty="0">
-                <a:solidFill>
-                  <a:srgbClr val="16261F"/>
-                </a:solidFill>
-                <a:latin typeface="Calibri" pitchFamily="34" charset="0"/>
-                <a:ea typeface="Calibri" pitchFamily="34" charset="-122"/>
-                <a:cs typeface="Calibri" pitchFamily="34" charset="-120"/>
-              </a:rPr>
-              <a:t>Clamp</a:t>
-            </a:r>
-            <a:endParaRPr lang="en-US" sz="1500" dirty="0"/>
-          </a:p>
-          <a:p>
-            <a:pPr indent="0" marL="0">
-              <a:buNone/>
-            </a:pPr>
-            <a:r>
-              <a:rPr lang="en-US" sz="1200" dirty="0">
-                <a:solidFill>
-                  <a:srgbClr val="55655D"/>
-                </a:solidFill>
-                <a:latin typeface="Calibri" pitchFamily="34" charset="0"/>
-                <a:ea typeface="Calibri" pitchFamily="34" charset="-122"/>
-                <a:cs typeface="Calibri" pitchFamily="34" charset="-120"/>
-              </a:rPr>
-              <a:t>On the motor cable</a:t>
-            </a:r>
-            <a:endParaRPr lang="en-US" sz="1500" dirty="0"/>
-          </a:p>
-        </p:txBody>
-      </p:sp>
-      <p:sp>
-        <p:nvSpPr>
-          <p:cNvPr id="8" name="Shape 6"/>
-          <p:cNvSpPr/>
-          <p:nvPr/>
-        </p:nvSpPr>
-        <p:spPr>
-          <a:xfrm>
-            <a:off x="2011680" y="1828800"/>
-            <a:ext cx="137160" cy="201168"/>
-          </a:xfrm>
-          <a:prstGeom prst="rightArrow">
-            <a:avLst/>
-          </a:prstGeom>
-          <a:solidFill>
-            <a:srgbClr val="3DCD58"/>
-          </a:solidFill>
-          <a:ln w="12700">
-            <a:solidFill>
-              <a:srgbClr val="3DCD58"/>
-            </a:solidFill>
-            <a:prstDash val="solid"/>
-          </a:ln>
-        </p:spPr>
-      </p:sp>
-      <p:sp>
-        <p:nvSpPr>
-          <p:cNvPr id="9" name="Shape 7"/>
-          <p:cNvSpPr/>
-          <p:nvPr/>
-        </p:nvSpPr>
-        <p:spPr>
-          <a:xfrm>
-            <a:off x="2148840" y="1371600"/>
-            <a:ext cx="1463040" cy="1188720"/>
-          </a:xfrm>
-          <a:prstGeom prst="roundRect">
-            <a:avLst>
-              <a:gd name="adj" fmla="val 6154"/>
-            </a:avLst>
-          </a:prstGeom>
-          <a:solidFill>
-            <a:srgbClr val="FFFFFF"/>
-          </a:solidFill>
-          <a:ln w="12700">
-            <a:solidFill>
-              <a:srgbClr val="D3DFD7"/>
-            </a:solidFill>
-            <a:prstDash val="solid"/>
-          </a:ln>
-        </p:spPr>
-      </p:sp>
-      <p:sp>
-        <p:nvSpPr>
-          <p:cNvPr id="10" name="Shape 8"/>
-          <p:cNvSpPr/>
-          <p:nvPr/>
-        </p:nvSpPr>
-        <p:spPr>
-          <a:xfrm>
-            <a:off x="2240280" y="1444752"/>
-            <a:ext cx="365760" cy="365760"/>
-          </a:xfrm>
-          <a:prstGeom prst="ellipse">
-            <a:avLst/>
-          </a:prstGeom>
-          <a:solidFill>
-            <a:srgbClr val="0E5A32"/>
-          </a:solidFill>
-          <a:ln w="12700">
-            <a:solidFill>
-              <a:srgbClr val="0E5A32"/>
-            </a:solidFill>
-            <a:prstDash val="solid"/>
-          </a:ln>
-        </p:spPr>
-      </p:sp>
-      <p:sp>
-        <p:nvSpPr>
-          <p:cNvPr id="11" name="Text 9"/>
-          <p:cNvSpPr txBox="1"/>
-          <p:nvPr/>
-        </p:nvSpPr>
-        <p:spPr>
-          <a:xfrm>
-            <a:off x="2240280" y="1444752"/>
-            <a:ext cx="365760" cy="365760"/>
-          </a:xfrm>
-          <a:prstGeom prst="rect">
-            <a:avLst/>
-          </a:prstGeom>
-          <a:noFill/>
-          <a:ln/>
-        </p:spPr>
-        <p:txBody>
-          <a:bodyPr wrap="square" lIns="0" tIns="0" rIns="0" bIns="0" rtlCol="0" anchor="ctr"/>
-          <a:lstStyle/>
-          <a:p>
-            <a:pPr algn="ctr" indent="0" marL="0">
-              <a:buNone/>
-            </a:pPr>
-            <a:r>
-              <a:rPr lang="en-US" sz="1500" b="1" dirty="0">
-                <a:solidFill>
-                  <a:srgbClr val="FFFFFF"/>
-                </a:solidFill>
-                <a:latin typeface="Calibri" pitchFamily="34" charset="0"/>
-                <a:ea typeface="Calibri" pitchFamily="34" charset="-122"/>
-                <a:cs typeface="Calibri" pitchFamily="34" charset="-120"/>
-              </a:rPr>
-              <a:t>2</a:t>
-            </a:r>
-            <a:endParaRPr lang="en-US" sz="1500" dirty="0"/>
-          </a:p>
-        </p:txBody>
-      </p:sp>
-      <p:sp>
-        <p:nvSpPr>
-          <p:cNvPr id="12" name="Text 10"/>
-          <p:cNvSpPr txBox="1"/>
-          <p:nvPr/>
-        </p:nvSpPr>
-        <p:spPr>
-          <a:xfrm>
-            <a:off x="2240280" y="1874520"/>
-            <a:ext cx="1298448" cy="640080"/>
-          </a:xfrm>
-          <a:prstGeom prst="rect">
-            <a:avLst/>
-          </a:prstGeom>
-          <a:noFill/>
-          <a:ln/>
-        </p:spPr>
-        <p:txBody>
-          <a:bodyPr wrap="square" lIns="0" tIns="0" rIns="0" bIns="0" rtlCol="0" anchor="t"/>
-          <a:lstStyle/>
-          <a:p>
-            <a:pPr indent="0" marL="0">
-              <a:buNone/>
-            </a:pPr>
-            <a:r>
-              <a:rPr lang="en-US" sz="1500" b="1" dirty="0">
-                <a:solidFill>
-                  <a:srgbClr val="16261F"/>
-                </a:solidFill>
-                <a:latin typeface="Calibri" pitchFamily="34" charset="0"/>
-                <a:ea typeface="Calibri" pitchFamily="34" charset="-122"/>
-                <a:cs typeface="Calibri" pitchFamily="34" charset="-120"/>
-              </a:rPr>
-              <a:t>Fit</a:t>
-            </a:r>
-            <a:endParaRPr lang="en-US" sz="1500" dirty="0"/>
-          </a:p>
-          <a:p>
-            <a:pPr indent="0" marL="0">
-              <a:buNone/>
-            </a:pPr>
-            <a:r>
-              <a:rPr lang="en-US" sz="1200" dirty="0">
-                <a:solidFill>
-                  <a:srgbClr val="55655D"/>
-                </a:solidFill>
-                <a:latin typeface="Calibri" pitchFamily="34" charset="0"/>
-                <a:ea typeface="Calibri" pitchFamily="34" charset="-122"/>
-                <a:cs typeface="Calibri" pitchFamily="34" charset="-120"/>
-              </a:rPr>
-              <a:t>Sensors on gauge ports</a:t>
-            </a:r>
-            <a:endParaRPr lang="en-US" sz="1500" dirty="0"/>
-          </a:p>
-        </p:txBody>
-      </p:sp>
-      <p:sp>
-        <p:nvSpPr>
-          <p:cNvPr id="13" name="Shape 11"/>
-          <p:cNvSpPr/>
-          <p:nvPr/>
-        </p:nvSpPr>
-        <p:spPr>
-          <a:xfrm>
-            <a:off x="3611880" y="1828800"/>
-            <a:ext cx="137160" cy="201168"/>
-          </a:xfrm>
-          <a:prstGeom prst="rightArrow">
-            <a:avLst/>
-          </a:prstGeom>
-          <a:solidFill>
-            <a:srgbClr val="3DCD58"/>
-          </a:solidFill>
-          <a:ln w="12700">
-            <a:solidFill>
-              <a:srgbClr val="3DCD58"/>
-            </a:solidFill>
-            <a:prstDash val="solid"/>
-          </a:ln>
-        </p:spPr>
-      </p:sp>
-      <p:sp>
-        <p:nvSpPr>
-          <p:cNvPr id="14" name="Shape 12"/>
-          <p:cNvSpPr/>
-          <p:nvPr/>
-        </p:nvSpPr>
-        <p:spPr>
-          <a:xfrm>
-            <a:off x="3749040" y="1371600"/>
-            <a:ext cx="1463040" cy="1188720"/>
-          </a:xfrm>
-          <a:prstGeom prst="roundRect">
-            <a:avLst>
-              <a:gd name="adj" fmla="val 6154"/>
-            </a:avLst>
-          </a:prstGeom>
-          <a:solidFill>
-            <a:srgbClr val="FFFFFF"/>
-          </a:solidFill>
-          <a:ln w="12700">
-            <a:solidFill>
-              <a:srgbClr val="D3DFD7"/>
-            </a:solidFill>
-            <a:prstDash val="solid"/>
-          </a:ln>
-        </p:spPr>
-      </p:sp>
-      <p:sp>
-        <p:nvSpPr>
-          <p:cNvPr id="15" name="Shape 13"/>
-          <p:cNvSpPr/>
-          <p:nvPr/>
-        </p:nvSpPr>
-        <p:spPr>
-          <a:xfrm>
-            <a:off x="3840480" y="1444752"/>
-            <a:ext cx="365760" cy="365760"/>
-          </a:xfrm>
-          <a:prstGeom prst="ellipse">
-            <a:avLst/>
-          </a:prstGeom>
-          <a:solidFill>
-            <a:srgbClr val="0E5A32"/>
-          </a:solidFill>
-          <a:ln w="12700">
-            <a:solidFill>
-              <a:srgbClr val="0E5A32"/>
-            </a:solidFill>
-            <a:prstDash val="solid"/>
-          </a:ln>
-        </p:spPr>
-      </p:sp>
-      <p:sp>
-        <p:nvSpPr>
-          <p:cNvPr id="16" name="Text 14"/>
-          <p:cNvSpPr txBox="1"/>
-          <p:nvPr/>
-        </p:nvSpPr>
-        <p:spPr>
-          <a:xfrm>
-            <a:off x="3840480" y="1444752"/>
-            <a:ext cx="365760" cy="365760"/>
-          </a:xfrm>
-          <a:prstGeom prst="rect">
-            <a:avLst/>
-          </a:prstGeom>
-          <a:noFill/>
-          <a:ln/>
-        </p:spPr>
-        <p:txBody>
-          <a:bodyPr wrap="square" lIns="0" tIns="0" rIns="0" bIns="0" rtlCol="0" anchor="ctr"/>
-          <a:lstStyle/>
-          <a:p>
-            <a:pPr algn="ctr" indent="0" marL="0">
-              <a:buNone/>
-            </a:pPr>
-            <a:r>
-              <a:rPr lang="en-US" sz="1500" b="1" dirty="0">
-                <a:solidFill>
-                  <a:srgbClr val="FFFFFF"/>
-                </a:solidFill>
-                <a:latin typeface="Calibri" pitchFamily="34" charset="0"/>
-                <a:ea typeface="Calibri" pitchFamily="34" charset="-122"/>
-                <a:cs typeface="Calibri" pitchFamily="34" charset="-120"/>
-              </a:rPr>
-              <a:t>3</a:t>
-            </a:r>
-            <a:endParaRPr lang="en-US" sz="1500" dirty="0"/>
-          </a:p>
-        </p:txBody>
-      </p:sp>
-      <p:sp>
-        <p:nvSpPr>
-          <p:cNvPr id="17" name="Text 15"/>
-          <p:cNvSpPr txBox="1"/>
-          <p:nvPr/>
-        </p:nvSpPr>
-        <p:spPr>
-          <a:xfrm>
-            <a:off x="3840480" y="1874520"/>
-            <a:ext cx="1298448" cy="640080"/>
-          </a:xfrm>
-          <a:prstGeom prst="rect">
-            <a:avLst/>
-          </a:prstGeom>
-          <a:noFill/>
-          <a:ln/>
-        </p:spPr>
-        <p:txBody>
-          <a:bodyPr wrap="square" lIns="0" tIns="0" rIns="0" bIns="0" rtlCol="0" anchor="t"/>
-          <a:lstStyle/>
-          <a:p>
-            <a:pPr indent="0" marL="0">
-              <a:buNone/>
-            </a:pPr>
-            <a:r>
-              <a:rPr lang="en-US" sz="1500" b="1" dirty="0">
-                <a:solidFill>
-                  <a:srgbClr val="16261F"/>
-                </a:solidFill>
-                <a:latin typeface="Calibri" pitchFamily="34" charset="0"/>
-                <a:ea typeface="Calibri" pitchFamily="34" charset="-122"/>
-                <a:cs typeface="Calibri" pitchFamily="34" charset="-120"/>
-              </a:rPr>
-              <a:t>Log</a:t>
-            </a:r>
-            <a:endParaRPr lang="en-US" sz="1500" dirty="0"/>
-          </a:p>
-          <a:p>
-            <a:pPr indent="0" marL="0">
-              <a:buNone/>
-            </a:pPr>
-            <a:r>
-              <a:rPr lang="en-US" sz="1200" dirty="0">
-                <a:solidFill>
-                  <a:srgbClr val="55655D"/>
-                </a:solidFill>
-                <a:latin typeface="Calibri" pitchFamily="34" charset="0"/>
-                <a:ea typeface="Calibri" pitchFamily="34" charset="-122"/>
-                <a:cs typeface="Calibri" pitchFamily="34" charset="-120"/>
-              </a:rPr>
-              <a:t>7–14 days</a:t>
-            </a:r>
-            <a:endParaRPr lang="en-US" sz="1500" dirty="0"/>
-          </a:p>
-        </p:txBody>
-      </p:sp>
-      <p:sp>
-        <p:nvSpPr>
-          <p:cNvPr id="18" name="Shape 16"/>
-          <p:cNvSpPr/>
-          <p:nvPr/>
-        </p:nvSpPr>
-        <p:spPr>
-          <a:xfrm>
-            <a:off x="5212080" y="1828800"/>
-            <a:ext cx="137160" cy="201168"/>
-          </a:xfrm>
-          <a:prstGeom prst="rightArrow">
-            <a:avLst/>
-          </a:prstGeom>
-          <a:solidFill>
-            <a:srgbClr val="3DCD58"/>
-          </a:solidFill>
-          <a:ln w="12700">
-            <a:solidFill>
-              <a:srgbClr val="3DCD58"/>
-            </a:solidFill>
-            <a:prstDash val="solid"/>
-          </a:ln>
-        </p:spPr>
-      </p:sp>
-      <p:sp>
-        <p:nvSpPr>
-          <p:cNvPr id="19" name="Shape 17"/>
-          <p:cNvSpPr/>
-          <p:nvPr/>
-        </p:nvSpPr>
-        <p:spPr>
-          <a:xfrm>
-            <a:off x="5349240" y="1371600"/>
-            <a:ext cx="1463040" cy="1188720"/>
-          </a:xfrm>
-          <a:prstGeom prst="roundRect">
-            <a:avLst>
-              <a:gd name="adj" fmla="val 6154"/>
-            </a:avLst>
-          </a:prstGeom>
-          <a:solidFill>
-            <a:srgbClr val="FFFFFF"/>
-          </a:solidFill>
-          <a:ln w="12700">
-            <a:solidFill>
-              <a:srgbClr val="D3DFD7"/>
-            </a:solidFill>
-            <a:prstDash val="solid"/>
-          </a:ln>
-        </p:spPr>
-      </p:sp>
-      <p:sp>
-        <p:nvSpPr>
-          <p:cNvPr id="20" name="Shape 18"/>
-          <p:cNvSpPr/>
-          <p:nvPr/>
-        </p:nvSpPr>
-        <p:spPr>
-          <a:xfrm>
-            <a:off x="5440680" y="1444752"/>
-            <a:ext cx="365760" cy="365760"/>
-          </a:xfrm>
-          <a:prstGeom prst="ellipse">
-            <a:avLst/>
-          </a:prstGeom>
-          <a:solidFill>
-            <a:srgbClr val="0E5A32"/>
-          </a:solidFill>
-          <a:ln w="12700">
-            <a:solidFill>
-              <a:srgbClr val="0E5A32"/>
-            </a:solidFill>
-            <a:prstDash val="solid"/>
-          </a:ln>
-        </p:spPr>
-      </p:sp>
-      <p:sp>
-        <p:nvSpPr>
-          <p:cNvPr id="21" name="Text 19"/>
-          <p:cNvSpPr txBox="1"/>
-          <p:nvPr/>
-        </p:nvSpPr>
-        <p:spPr>
-          <a:xfrm>
-            <a:off x="5440680" y="1444752"/>
-            <a:ext cx="365760" cy="365760"/>
-          </a:xfrm>
-          <a:prstGeom prst="rect">
-            <a:avLst/>
-          </a:prstGeom>
-          <a:noFill/>
-          <a:ln/>
-        </p:spPr>
-        <p:txBody>
-          <a:bodyPr wrap="square" lIns="0" tIns="0" rIns="0" bIns="0" rtlCol="0" anchor="ctr"/>
-          <a:lstStyle/>
-          <a:p>
-            <a:pPr algn="ctr" indent="0" marL="0">
-              <a:buNone/>
-            </a:pPr>
-            <a:r>
-              <a:rPr lang="en-US" sz="1500" b="1" dirty="0">
-                <a:solidFill>
-                  <a:srgbClr val="FFFFFF"/>
-                </a:solidFill>
-                <a:latin typeface="Calibri" pitchFamily="34" charset="0"/>
-                <a:ea typeface="Calibri" pitchFamily="34" charset="-122"/>
-                <a:cs typeface="Calibri" pitchFamily="34" charset="-120"/>
-              </a:rPr>
-              <a:t>4</a:t>
-            </a:r>
-            <a:endParaRPr lang="en-US" sz="1500" dirty="0"/>
-          </a:p>
-        </p:txBody>
-      </p:sp>
-      <p:sp>
-        <p:nvSpPr>
-          <p:cNvPr id="22" name="Text 20"/>
-          <p:cNvSpPr txBox="1"/>
-          <p:nvPr/>
-        </p:nvSpPr>
-        <p:spPr>
-          <a:xfrm>
-            <a:off x="5440680" y="1874520"/>
-            <a:ext cx="1298448" cy="640080"/>
-          </a:xfrm>
-          <a:prstGeom prst="rect">
-            <a:avLst/>
-          </a:prstGeom>
-          <a:noFill/>
-          <a:ln/>
-        </p:spPr>
-        <p:txBody>
-          <a:bodyPr wrap="square" lIns="0" tIns="0" rIns="0" bIns="0" rtlCol="0" anchor="t"/>
-          <a:lstStyle/>
-          <a:p>
-            <a:pPr indent="0" marL="0">
-              <a:buNone/>
-            </a:pPr>
-            <a:r>
-              <a:rPr lang="en-US" sz="1500" b="1" dirty="0">
-                <a:solidFill>
-                  <a:srgbClr val="16261F"/>
-                </a:solidFill>
-                <a:latin typeface="Calibri" pitchFamily="34" charset="0"/>
-                <a:ea typeface="Calibri" pitchFamily="34" charset="-122"/>
-                <a:cs typeface="Calibri" pitchFamily="34" charset="-120"/>
-              </a:rPr>
-              <a:t>Read</a:t>
-            </a:r>
-            <a:endParaRPr lang="en-US" sz="1500" dirty="0"/>
-          </a:p>
-          <a:p>
-            <a:pPr indent="0" marL="0">
-              <a:buNone/>
-            </a:pPr>
-            <a:r>
-              <a:rPr lang="en-US" sz="1200" dirty="0">
-                <a:solidFill>
-                  <a:srgbClr val="55655D"/>
-                </a:solidFill>
-                <a:latin typeface="Calibri" pitchFamily="34" charset="0"/>
-                <a:ea typeface="Calibri" pitchFamily="34" charset="-122"/>
-                <a:cs typeface="Calibri" pitchFamily="34" charset="-120"/>
-              </a:rPr>
-              <a:t>₹ report</a:t>
-            </a:r>
-            <a:endParaRPr lang="en-US" sz="1500" dirty="0"/>
-          </a:p>
-        </p:txBody>
-      </p:sp>
-      <p:sp>
-        <p:nvSpPr>
-          <p:cNvPr id="23" name="Shape 21"/>
-          <p:cNvSpPr/>
-          <p:nvPr/>
-        </p:nvSpPr>
-        <p:spPr>
-          <a:xfrm>
-            <a:off x="6812280" y="1828800"/>
-            <a:ext cx="137160" cy="201168"/>
-          </a:xfrm>
-          <a:prstGeom prst="rightArrow">
-            <a:avLst/>
-          </a:prstGeom>
-          <a:solidFill>
-            <a:srgbClr val="3DCD58"/>
-          </a:solidFill>
-          <a:ln w="12700">
-            <a:solidFill>
-              <a:srgbClr val="3DCD58"/>
-            </a:solidFill>
-            <a:prstDash val="solid"/>
-          </a:ln>
-        </p:spPr>
-      </p:sp>
-      <p:sp>
-        <p:nvSpPr>
-          <p:cNvPr id="24" name="Shape 22"/>
-          <p:cNvSpPr/>
-          <p:nvPr/>
-        </p:nvSpPr>
-        <p:spPr>
-          <a:xfrm>
-            <a:off x="6949440" y="1371600"/>
-            <a:ext cx="1463040" cy="1188720"/>
-          </a:xfrm>
-          <a:prstGeom prst="roundRect">
-            <a:avLst>
-              <a:gd name="adj" fmla="val 6154"/>
-            </a:avLst>
-          </a:prstGeom>
-          <a:solidFill>
-            <a:srgbClr val="FFFFFF"/>
-          </a:solidFill>
-          <a:ln w="12700">
-            <a:solidFill>
-              <a:srgbClr val="D3DFD7"/>
-            </a:solidFill>
-            <a:prstDash val="solid"/>
-          </a:ln>
-        </p:spPr>
-      </p:sp>
-      <p:sp>
-        <p:nvSpPr>
-          <p:cNvPr id="25" name="Shape 23"/>
-          <p:cNvSpPr/>
-          <p:nvPr/>
-        </p:nvSpPr>
-        <p:spPr>
-          <a:xfrm>
-            <a:off x="7040880" y="1444752"/>
-            <a:ext cx="365760" cy="365760"/>
-          </a:xfrm>
-          <a:prstGeom prst="ellipse">
-            <a:avLst/>
-          </a:prstGeom>
-          <a:solidFill>
-            <a:srgbClr val="0E5A32"/>
-          </a:solidFill>
-          <a:ln w="12700">
-            <a:solidFill>
-              <a:srgbClr val="0E5A32"/>
-            </a:solidFill>
-            <a:prstDash val="solid"/>
-          </a:ln>
-        </p:spPr>
-      </p:sp>
-      <p:sp>
-        <p:nvSpPr>
-          <p:cNvPr id="26" name="Text 24"/>
-          <p:cNvSpPr txBox="1"/>
-          <p:nvPr/>
-        </p:nvSpPr>
-        <p:spPr>
-          <a:xfrm>
-            <a:off x="7040880" y="1444752"/>
-            <a:ext cx="365760" cy="365760"/>
-          </a:xfrm>
-          <a:prstGeom prst="rect">
-            <a:avLst/>
-          </a:prstGeom>
-          <a:noFill/>
-          <a:ln/>
-        </p:spPr>
-        <p:txBody>
-          <a:bodyPr wrap="square" lIns="0" tIns="0" rIns="0" bIns="0" rtlCol="0" anchor="ctr"/>
-          <a:lstStyle/>
-          <a:p>
-            <a:pPr algn="ctr" indent="0" marL="0">
-              <a:buNone/>
-            </a:pPr>
-            <a:r>
-              <a:rPr lang="en-US" sz="1500" b="1" dirty="0">
-                <a:solidFill>
-                  <a:srgbClr val="FFFFFF"/>
-                </a:solidFill>
-                <a:latin typeface="Calibri" pitchFamily="34" charset="0"/>
-                <a:ea typeface="Calibri" pitchFamily="34" charset="-122"/>
-                <a:cs typeface="Calibri" pitchFamily="34" charset="-120"/>
-              </a:rPr>
-              <a:t>5</a:t>
-            </a:r>
-            <a:endParaRPr lang="en-US" sz="1500" dirty="0"/>
-          </a:p>
-        </p:txBody>
-      </p:sp>
-      <p:sp>
-        <p:nvSpPr>
-          <p:cNvPr id="27" name="Text 25"/>
-          <p:cNvSpPr txBox="1"/>
-          <p:nvPr/>
-        </p:nvSpPr>
-        <p:spPr>
-          <a:xfrm>
-            <a:off x="7040880" y="1874520"/>
-            <a:ext cx="1298448" cy="640080"/>
-          </a:xfrm>
-          <a:prstGeom prst="rect">
-            <a:avLst/>
-          </a:prstGeom>
-          <a:noFill/>
-          <a:ln/>
-        </p:spPr>
-        <p:txBody>
-          <a:bodyPr wrap="square" lIns="0" tIns="0" rIns="0" bIns="0" rtlCol="0" anchor="t"/>
-          <a:lstStyle/>
-          <a:p>
-            <a:pPr indent="0" marL="0">
-              <a:buNone/>
-            </a:pPr>
-            <a:r>
-              <a:rPr lang="en-US" sz="1500" b="1" dirty="0">
-                <a:solidFill>
-                  <a:srgbClr val="16261F"/>
-                </a:solidFill>
-                <a:latin typeface="Calibri" pitchFamily="34" charset="0"/>
-                <a:ea typeface="Calibri" pitchFamily="34" charset="-122"/>
-                <a:cs typeface="Calibri" pitchFamily="34" charset="-120"/>
-              </a:rPr>
-              <a:t>Fix</a:t>
-            </a:r>
-            <a:endParaRPr lang="en-US" sz="1500" dirty="0"/>
-          </a:p>
-          <a:p>
-            <a:pPr indent="0" marL="0">
-              <a:buNone/>
-            </a:pPr>
-            <a:r>
-              <a:rPr lang="en-US" sz="1200" dirty="0">
-                <a:solidFill>
-                  <a:srgbClr val="55655D"/>
-                </a:solidFill>
-                <a:latin typeface="Calibri" pitchFamily="34" charset="0"/>
-                <a:ea typeface="Calibri" pitchFamily="34" charset="-122"/>
-                <a:cs typeface="Calibri" pitchFamily="34" charset="-120"/>
-              </a:rPr>
-              <a:t>Cheapest first</a:t>
-            </a:r>
-            <a:endParaRPr lang="en-US" sz="1500" dirty="0"/>
-          </a:p>
-        </p:txBody>
-      </p:sp>
-      <p:sp>
-        <p:nvSpPr>
-          <p:cNvPr id="28" name="Shape 26"/>
-          <p:cNvSpPr/>
-          <p:nvPr/>
-        </p:nvSpPr>
-        <p:spPr>
-          <a:xfrm>
-            <a:off x="8412480" y="1828800"/>
-            <a:ext cx="137160" cy="201168"/>
-          </a:xfrm>
-          <a:prstGeom prst="rightArrow">
-            <a:avLst/>
-          </a:prstGeom>
-          <a:solidFill>
-            <a:srgbClr val="3DCD58"/>
-          </a:solidFill>
-          <a:ln w="12700">
-            <a:solidFill>
-              <a:srgbClr val="3DCD58"/>
-            </a:solidFill>
-            <a:prstDash val="solid"/>
-          </a:ln>
-        </p:spPr>
-      </p:sp>
-      <p:sp>
-        <p:nvSpPr>
-          <p:cNvPr id="29" name="Shape 27"/>
-          <p:cNvSpPr/>
-          <p:nvPr/>
-        </p:nvSpPr>
-        <p:spPr>
-          <a:xfrm>
-            <a:off x="8549640" y="1371600"/>
-            <a:ext cx="1463040" cy="1188720"/>
-          </a:xfrm>
-          <a:prstGeom prst="roundRect">
-            <a:avLst>
-              <a:gd name="adj" fmla="val 6154"/>
-            </a:avLst>
-          </a:prstGeom>
-          <a:solidFill>
-            <a:srgbClr val="FFFFFF"/>
-          </a:solidFill>
-          <a:ln w="12700">
-            <a:solidFill>
-              <a:srgbClr val="D3DFD7"/>
-            </a:solidFill>
-            <a:prstDash val="solid"/>
-          </a:ln>
-        </p:spPr>
-      </p:sp>
-      <p:sp>
-        <p:nvSpPr>
-          <p:cNvPr id="30" name="Shape 28"/>
-          <p:cNvSpPr/>
-          <p:nvPr/>
-        </p:nvSpPr>
-        <p:spPr>
-          <a:xfrm>
-            <a:off x="8641080" y="1444752"/>
-            <a:ext cx="365760" cy="365760"/>
-          </a:xfrm>
-          <a:prstGeom prst="ellipse">
-            <a:avLst/>
-          </a:prstGeom>
-          <a:solidFill>
-            <a:srgbClr val="0E5A32"/>
-          </a:solidFill>
-          <a:ln w="12700">
-            <a:solidFill>
-              <a:srgbClr val="0E5A32"/>
-            </a:solidFill>
-            <a:prstDash val="solid"/>
-          </a:ln>
-        </p:spPr>
-      </p:sp>
-      <p:sp>
-        <p:nvSpPr>
-          <p:cNvPr id="31" name="Text 29"/>
-          <p:cNvSpPr txBox="1"/>
-          <p:nvPr/>
-        </p:nvSpPr>
-        <p:spPr>
-          <a:xfrm>
-            <a:off x="8641080" y="1444752"/>
-            <a:ext cx="365760" cy="365760"/>
-          </a:xfrm>
-          <a:prstGeom prst="rect">
-            <a:avLst/>
-          </a:prstGeom>
-          <a:noFill/>
-          <a:ln/>
-        </p:spPr>
-        <p:txBody>
-          <a:bodyPr wrap="square" lIns="0" tIns="0" rIns="0" bIns="0" rtlCol="0" anchor="ctr"/>
-          <a:lstStyle/>
-          <a:p>
-            <a:pPr algn="ctr" indent="0" marL="0">
-              <a:buNone/>
-            </a:pPr>
-            <a:r>
-              <a:rPr lang="en-US" sz="1500" b="1" dirty="0">
-                <a:solidFill>
-                  <a:srgbClr val="FFFFFF"/>
-                </a:solidFill>
-                <a:latin typeface="Calibri" pitchFamily="34" charset="0"/>
-                <a:ea typeface="Calibri" pitchFamily="34" charset="-122"/>
-                <a:cs typeface="Calibri" pitchFamily="34" charset="-120"/>
-              </a:rPr>
-              <a:t>6</a:t>
-            </a:r>
-            <a:endParaRPr lang="en-US" sz="1500" dirty="0"/>
-          </a:p>
-        </p:txBody>
-      </p:sp>
-      <p:sp>
-        <p:nvSpPr>
-          <p:cNvPr id="32" name="Text 30"/>
-          <p:cNvSpPr txBox="1"/>
-          <p:nvPr/>
-        </p:nvSpPr>
-        <p:spPr>
-          <a:xfrm>
-            <a:off x="8641080" y="1874520"/>
-            <a:ext cx="1298448" cy="640080"/>
-          </a:xfrm>
-          <a:prstGeom prst="rect">
-            <a:avLst/>
-          </a:prstGeom>
-          <a:noFill/>
-          <a:ln/>
-        </p:spPr>
-        <p:txBody>
-          <a:bodyPr wrap="square" lIns="0" tIns="0" rIns="0" bIns="0" rtlCol="0" anchor="t"/>
-          <a:lstStyle/>
-          <a:p>
-            <a:pPr indent="0" marL="0">
-              <a:buNone/>
-            </a:pPr>
-            <a:r>
-              <a:rPr lang="en-US" sz="1500" b="1" dirty="0">
-                <a:solidFill>
-                  <a:srgbClr val="16261F"/>
-                </a:solidFill>
-                <a:latin typeface="Calibri" pitchFamily="34" charset="0"/>
-                <a:ea typeface="Calibri" pitchFamily="34" charset="-122"/>
-                <a:cs typeface="Calibri" pitchFamily="34" charset="-120"/>
-              </a:rPr>
-              <a:t>Verify</a:t>
-            </a:r>
-            <a:endParaRPr lang="en-US" sz="1500" dirty="0"/>
-          </a:p>
-          <a:p>
-            <a:pPr indent="0" marL="0">
-              <a:buNone/>
-            </a:pPr>
-            <a:r>
-              <a:rPr lang="en-US" sz="1200" dirty="0">
-                <a:solidFill>
-                  <a:srgbClr val="55655D"/>
-                </a:solidFill>
-                <a:latin typeface="Calibri" pitchFamily="34" charset="0"/>
-                <a:ea typeface="Calibri" pitchFamily="34" charset="-122"/>
-                <a:cs typeface="Calibri" pitchFamily="34" charset="-120"/>
-              </a:rPr>
-              <a:t>Re-measure</a:t>
-            </a:r>
-            <a:endParaRPr lang="en-US" sz="1500" dirty="0"/>
-          </a:p>
-        </p:txBody>
-      </p:sp>
-      <p:sp>
-        <p:nvSpPr>
-          <p:cNvPr id="33" name="Shape 31"/>
-          <p:cNvSpPr/>
-          <p:nvPr/>
-        </p:nvSpPr>
-        <p:spPr>
-          <a:xfrm>
-            <a:off x="10012680" y="1828800"/>
-            <a:ext cx="137160" cy="201168"/>
-          </a:xfrm>
-          <a:prstGeom prst="rightArrow">
-            <a:avLst/>
-          </a:prstGeom>
-          <a:solidFill>
-            <a:srgbClr val="3DCD58"/>
-          </a:solidFill>
-          <a:ln w="12700">
-            <a:solidFill>
-              <a:srgbClr val="3DCD58"/>
-            </a:solidFill>
-            <a:prstDash val="solid"/>
-          </a:ln>
-        </p:spPr>
-      </p:sp>
-      <p:sp>
-        <p:nvSpPr>
-          <p:cNvPr id="34" name="Shape 32"/>
-          <p:cNvSpPr/>
-          <p:nvPr/>
-        </p:nvSpPr>
-        <p:spPr>
-          <a:xfrm>
-            <a:off x="10149840" y="1371600"/>
-            <a:ext cx="1463040" cy="1188720"/>
-          </a:xfrm>
-          <a:prstGeom prst="roundRect">
-            <a:avLst>
-              <a:gd name="adj" fmla="val 6154"/>
-            </a:avLst>
-          </a:prstGeom>
-          <a:solidFill>
-            <a:srgbClr val="FFFFFF"/>
-          </a:solidFill>
-          <a:ln w="12700">
-            <a:solidFill>
-              <a:srgbClr val="D3DFD7"/>
-            </a:solidFill>
-            <a:prstDash val="solid"/>
-          </a:ln>
-        </p:spPr>
-      </p:sp>
-      <p:sp>
-        <p:nvSpPr>
-          <p:cNvPr id="35" name="Shape 33"/>
-          <p:cNvSpPr/>
-          <p:nvPr/>
-        </p:nvSpPr>
-        <p:spPr>
-          <a:xfrm>
-            <a:off x="10241280" y="1444752"/>
-            <a:ext cx="365760" cy="365760"/>
-          </a:xfrm>
-          <a:prstGeom prst="ellipse">
-            <a:avLst/>
-          </a:prstGeom>
-          <a:solidFill>
-            <a:srgbClr val="0E5A32"/>
-          </a:solidFill>
-          <a:ln w="12700">
-            <a:solidFill>
-              <a:srgbClr val="0E5A32"/>
-            </a:solidFill>
-            <a:prstDash val="solid"/>
-          </a:ln>
-        </p:spPr>
-      </p:sp>
-      <p:sp>
-        <p:nvSpPr>
-          <p:cNvPr id="36" name="Text 34"/>
-          <p:cNvSpPr txBox="1"/>
-          <p:nvPr/>
-        </p:nvSpPr>
-        <p:spPr>
-          <a:xfrm>
-            <a:off x="10241280" y="1444752"/>
-            <a:ext cx="365760" cy="365760"/>
-          </a:xfrm>
-          <a:prstGeom prst="rect">
-            <a:avLst/>
-          </a:prstGeom>
-          <a:noFill/>
-          <a:ln/>
-        </p:spPr>
-        <p:txBody>
-          <a:bodyPr wrap="square" lIns="0" tIns="0" rIns="0" bIns="0" rtlCol="0" anchor="ctr"/>
-          <a:lstStyle/>
-          <a:p>
-            <a:pPr algn="ctr" indent="0" marL="0">
-              <a:buNone/>
-            </a:pPr>
-            <a:r>
-              <a:rPr lang="en-US" sz="1500" b="1" dirty="0">
-                <a:solidFill>
-                  <a:srgbClr val="FFFFFF"/>
-                </a:solidFill>
-                <a:latin typeface="Calibri" pitchFamily="34" charset="0"/>
-                <a:ea typeface="Calibri" pitchFamily="34" charset="-122"/>
-                <a:cs typeface="Calibri" pitchFamily="34" charset="-120"/>
-              </a:rPr>
-              <a:t>7</a:t>
-            </a:r>
-            <a:endParaRPr lang="en-US" sz="1500" dirty="0"/>
-          </a:p>
-        </p:txBody>
-      </p:sp>
-      <p:sp>
-        <p:nvSpPr>
-          <p:cNvPr id="37" name="Text 35"/>
-          <p:cNvSpPr txBox="1"/>
-          <p:nvPr/>
-        </p:nvSpPr>
-        <p:spPr>
-          <a:xfrm>
-            <a:off x="10241280" y="1874520"/>
-            <a:ext cx="1298448" cy="640080"/>
-          </a:xfrm>
-          <a:prstGeom prst="rect">
-            <a:avLst/>
-          </a:prstGeom>
-          <a:noFill/>
-          <a:ln/>
-        </p:spPr>
-        <p:txBody>
-          <a:bodyPr wrap="square" lIns="0" tIns="0" rIns="0" bIns="0" rtlCol="0" anchor="t"/>
-          <a:lstStyle/>
-          <a:p>
-            <a:pPr indent="0" marL="0">
-              <a:buNone/>
-            </a:pPr>
-            <a:r>
-              <a:rPr lang="en-US" sz="1500" b="1" dirty="0">
-                <a:solidFill>
-                  <a:srgbClr val="16261F"/>
-                </a:solidFill>
-                <a:latin typeface="Calibri" pitchFamily="34" charset="0"/>
-                <a:ea typeface="Calibri" pitchFamily="34" charset="-122"/>
-                <a:cs typeface="Calibri" pitchFamily="34" charset="-120"/>
-              </a:rPr>
-              <a:t>Move</a:t>
-            </a:r>
-            <a:endParaRPr lang="en-US" sz="1500" dirty="0"/>
-          </a:p>
-          <a:p>
-            <a:pPr indent="0" marL="0">
-              <a:buNone/>
-            </a:pPr>
-            <a:r>
-              <a:rPr lang="en-US" sz="1200" dirty="0">
-                <a:solidFill>
-                  <a:srgbClr val="55655D"/>
-                </a:solidFill>
-                <a:latin typeface="Calibri" pitchFamily="34" charset="0"/>
-                <a:ea typeface="Calibri" pitchFamily="34" charset="-122"/>
-                <a:cs typeface="Calibri" pitchFamily="34" charset="-120"/>
-              </a:rPr>
-              <a:t>Kit to next pump</a:t>
-            </a:r>
-            <a:endParaRPr lang="en-US" sz="1500" dirty="0"/>
-          </a:p>
-        </p:txBody>
-      </p:sp>
-      <p:sp>
-        <p:nvSpPr>
-          <p:cNvPr id="38" name="Shape 36"/>
-          <p:cNvSpPr/>
-          <p:nvPr/>
-        </p:nvSpPr>
-        <p:spPr>
-          <a:xfrm>
-            <a:off x="548640" y="2788920"/>
-            <a:ext cx="5394960" cy="3520440"/>
-          </a:xfrm>
-          <a:prstGeom prst="roundRect">
-            <a:avLst>
-              <a:gd name="adj" fmla="val 2078"/>
-            </a:avLst>
-          </a:prstGeom>
-          <a:solidFill>
-            <a:srgbClr val="FFFFFF"/>
-          </a:solidFill>
-          <a:ln w="12700">
-            <a:solidFill>
-              <a:srgbClr val="D3DFD7"/>
-            </a:solidFill>
-            <a:prstDash val="solid"/>
-          </a:ln>
-        </p:spPr>
-      </p:sp>
-      <p:sp>
-        <p:nvSpPr>
-          <p:cNvPr id="39" name="Text 37"/>
-          <p:cNvSpPr txBox="1"/>
-          <p:nvPr/>
-        </p:nvSpPr>
-        <p:spPr>
-          <a:xfrm>
-            <a:off x="685800" y="2852928"/>
-            <a:ext cx="5120640" cy="365760"/>
-          </a:xfrm>
-          <a:prstGeom prst="rect">
-            <a:avLst/>
-          </a:prstGeom>
-          <a:noFill/>
-          <a:ln/>
-        </p:spPr>
-        <p:txBody>
-          <a:bodyPr wrap="square" lIns="0" tIns="0" rIns="0" bIns="0" rtlCol="0" anchor="t"/>
-          <a:lstStyle/>
-          <a:p>
-            <a:pPr indent="0" marL="0">
-              <a:buNone/>
-            </a:pPr>
-            <a:r>
-              <a:rPr lang="en-US" sz="1700" b="1" dirty="0">
-                <a:solidFill>
-                  <a:srgbClr val="0E5A32"/>
-                </a:solidFill>
-                <a:latin typeface="Calibri" pitchFamily="34" charset="0"/>
-                <a:ea typeface="Calibri" pitchFamily="34" charset="-122"/>
-                <a:cs typeface="Calibri" pitchFamily="34" charset="-120"/>
-              </a:rPr>
-              <a:t>The owner or technician does NOT need</a:t>
-            </a:r>
-            <a:endParaRPr lang="en-US" sz="1700" dirty="0"/>
-          </a:p>
-        </p:txBody>
-      </p:sp>
       <p:pic>
         <p:nvPicPr>
-          <p:cNvPr id="40" name="Image 0" descr="preencoded.png">    </p:cNvPr>
+          <p:cNvPr id="6" name="Image 0" descr="preencoded.png">    </p:cNvPr>
           <p:cNvPicPr>
             <a:picLocks noChangeAspect="1"/>
           </p:cNvPicPr>
@@ -6523,8 +5450,8 @@
         </p:blipFill>
         <p:spPr>
           <a:xfrm>
-            <a:off x="731520" y="3383280"/>
-            <a:ext cx="310896" cy="310896"/>
+            <a:off x="806501" y="1602029"/>
+            <a:ext cx="261518" cy="261518"/>
           </a:xfrm>
           <a:prstGeom prst="rect">
             <a:avLst/>
@@ -6533,14 +5460,14 @@
       </p:pic>
       <p:sp>
         <p:nvSpPr>
-          <p:cNvPr id="41" name="Text 38"/>
-          <p:cNvSpPr txBox="1"/>
-          <p:nvPr/>
-        </p:nvSpPr>
-        <p:spPr>
-          <a:xfrm>
-            <a:off x="1188720" y="3337560"/>
-            <a:ext cx="4572000" cy="411480"/>
+          <p:cNvPr id="7" name="Text 4"/>
+          <p:cNvSpPr txBox="1"/>
+          <p:nvPr/>
+        </p:nvSpPr>
+        <p:spPr>
+          <a:xfrm>
+            <a:off x="1325880" y="1481328"/>
+            <a:ext cx="2651760" cy="502920"/>
           </a:xfrm>
           <a:prstGeom prst="rect">
             <a:avLst/>
@@ -6556,7 +5483,46 @@
               <a:buNone/>
             </a:pPr>
             <a:r>
-              <a:rPr lang="en-US" sz="1600" dirty="0">
+              <a:rPr lang="en-US" sz="2000" b="1" dirty="0">
+                <a:solidFill>
+                  <a:srgbClr val="0E5A32"/>
+                </a:solidFill>
+                <a:latin typeface="Calibri" pitchFamily="34" charset="0"/>
+                <a:ea typeface="Calibri" pitchFamily="34" charset="-122"/>
+                <a:cs typeface="Calibri" pitchFamily="34" charset="-120"/>
+              </a:rPr>
+              <a:t>Electrify</a:t>
+            </a:r>
+            <a:endParaRPr lang="en-US" sz="2000" dirty="0"/>
+          </a:p>
+        </p:txBody>
+      </p:sp>
+      <p:sp>
+        <p:nvSpPr>
+          <p:cNvPr id="8" name="Text 5"/>
+          <p:cNvSpPr txBox="1"/>
+          <p:nvPr/>
+        </p:nvSpPr>
+        <p:spPr>
+          <a:xfrm>
+            <a:off x="685800" y="2103120"/>
+            <a:ext cx="3337560" cy="1051560"/>
+          </a:xfrm>
+          <a:prstGeom prst="rect">
+            <a:avLst/>
+          </a:prstGeom>
+          <a:noFill/>
+          <a:ln/>
+        </p:spPr>
+        <p:txBody>
+          <a:bodyPr wrap="square" lIns="0" tIns="0" rIns="0" bIns="0" rtlCol="0" anchor="t"/>
+          <a:lstStyle/>
+          <a:p>
+            <a:pPr indent="0" marL="0">
+              <a:buNone/>
+            </a:pPr>
+            <a:r>
+              <a:rPr lang="en-US" sz="1300" dirty="0">
                 <a:solidFill>
                   <a:srgbClr val="16261F"/>
                 </a:solidFill>
@@ -6564,15 +5530,67 @@
                 <a:ea typeface="Calibri" pitchFamily="34" charset="-122"/>
                 <a:cs typeface="Calibri" pitchFamily="34" charset="-120"/>
               </a:rPr>
-              <a:t>A flow meter</a:t>
-            </a:r>
-            <a:endParaRPr lang="en-US" sz="1600" dirty="0"/>
-          </a:p>
-        </p:txBody>
+              <a:t>Makes motor electrical energy visible with a clamp-on power measurement and points owners to efficient drives.</a:t>
+            </a:r>
+            <a:endParaRPr lang="en-US" sz="1300" dirty="0"/>
+          </a:p>
+        </p:txBody>
+      </p:sp>
+      <p:sp>
+        <p:nvSpPr>
+          <p:cNvPr id="9" name="Shape 6"/>
+          <p:cNvSpPr/>
+          <p:nvPr/>
+        </p:nvSpPr>
+        <p:spPr>
+          <a:xfrm>
+            <a:off x="4297680" y="1371600"/>
+            <a:ext cx="3611880" cy="1828800"/>
+          </a:xfrm>
+          <a:prstGeom prst="roundRect">
+            <a:avLst>
+              <a:gd name="adj" fmla="val 4000"/>
+            </a:avLst>
+          </a:prstGeom>
+          <a:solidFill>
+            <a:srgbClr val="FFFFFF"/>
+          </a:solidFill>
+          <a:ln w="12700">
+            <a:solidFill>
+              <a:srgbClr val="D3DFD7"/>
+            </a:solidFill>
+            <a:prstDash val="solid"/>
+          </a:ln>
+        </p:spPr>
+      </p:sp>
+      <p:sp>
+        <p:nvSpPr>
+          <p:cNvPr id="10" name="Shape 7"/>
+          <p:cNvSpPr/>
+          <p:nvPr/>
+        </p:nvSpPr>
+        <p:spPr>
+          <a:xfrm>
+            <a:off x="4434840" y="1481328"/>
+            <a:ext cx="502920" cy="502920"/>
+          </a:xfrm>
+          <a:prstGeom prst="ellipse">
+            <a:avLst/>
+          </a:prstGeom>
+          <a:solidFill>
+            <a:srgbClr val="0E5A32"/>
+          </a:solidFill>
+          <a:ln w="12700">
+            <a:solidFill>
+              <a:srgbClr val="0E5A32"/>
+            </a:solidFill>
+            <a:prstDash val="solid"/>
+          </a:ln>
+        </p:spPr>
       </p:sp>
       <p:pic>
         <p:nvPicPr>
-          <p:cNvPr id="42" name="Image 1" descr="preencoded.png">    </p:cNvPr>
+          <p:cNvPr id="11" name="Image 1" descr="preencoded.png">    </p:cNvPr>
           <p:cNvPicPr>
             <a:picLocks noChangeAspect="1"/>
           </p:cNvPicPr>
@@ -6586,8 +5604,8 @@
         </p:blipFill>
         <p:spPr>
           <a:xfrm>
-            <a:off x="731520" y="3886200"/>
-            <a:ext cx="310896" cy="310896"/>
+            <a:off x="4555541" y="1602029"/>
+            <a:ext cx="261518" cy="261518"/>
           </a:xfrm>
           <a:prstGeom prst="rect">
             <a:avLst/>
@@ -6596,14 +5614,14 @@
       </p:pic>
       <p:sp>
         <p:nvSpPr>
-          <p:cNvPr id="43" name="Text 39"/>
-          <p:cNvSpPr txBox="1"/>
-          <p:nvPr/>
-        </p:nvSpPr>
-        <p:spPr>
-          <a:xfrm>
-            <a:off x="1188720" y="3840480"/>
-            <a:ext cx="4572000" cy="411480"/>
+          <p:cNvPr id="12" name="Text 8"/>
+          <p:cNvSpPr txBox="1"/>
+          <p:nvPr/>
+        </p:nvSpPr>
+        <p:spPr>
+          <a:xfrm>
+            <a:off x="5074920" y="1481328"/>
+            <a:ext cx="2651760" cy="502920"/>
           </a:xfrm>
           <a:prstGeom prst="rect">
             <a:avLst/>
@@ -6619,7 +5637,46 @@
               <a:buNone/>
             </a:pPr>
             <a:r>
-              <a:rPr lang="en-US" sz="1600" dirty="0">
+              <a:rPr lang="en-US" sz="2000" b="1" dirty="0">
+                <a:solidFill>
+                  <a:srgbClr val="0E5A32"/>
+                </a:solidFill>
+                <a:latin typeface="Calibri" pitchFamily="34" charset="0"/>
+                <a:ea typeface="Calibri" pitchFamily="34" charset="-122"/>
+                <a:cs typeface="Calibri" pitchFamily="34" charset="-120"/>
+              </a:rPr>
+              <a:t>Automate</a:t>
+            </a:r>
+            <a:endParaRPr lang="en-US" sz="2000" dirty="0"/>
+          </a:p>
+        </p:txBody>
+      </p:sp>
+      <p:sp>
+        <p:nvSpPr>
+          <p:cNvPr id="13" name="Text 9"/>
+          <p:cNvSpPr txBox="1"/>
+          <p:nvPr/>
+        </p:nvSpPr>
+        <p:spPr>
+          <a:xfrm>
+            <a:off x="4434840" y="2103120"/>
+            <a:ext cx="3337560" cy="1051560"/>
+          </a:xfrm>
+          <a:prstGeom prst="rect">
+            <a:avLst/>
+          </a:prstGeom>
+          <a:noFill/>
+          <a:ln/>
+        </p:spPr>
+        <p:txBody>
+          <a:bodyPr wrap="square" lIns="0" tIns="0" rIns="0" bIns="0" rtlCol="0" anchor="t"/>
+          <a:lstStyle/>
+          <a:p>
+            <a:pPr indent="0" marL="0">
+              <a:buNone/>
+            </a:pPr>
+            <a:r>
+              <a:rPr lang="en-US" sz="1300" dirty="0">
                 <a:solidFill>
                   <a:srgbClr val="16261F"/>
                 </a:solidFill>
@@ -6627,15 +5684,67 @@
                 <a:ea typeface="Calibri" pitchFamily="34" charset="-122"/>
                 <a:cs typeface="Calibri" pitchFamily="34" charset="-120"/>
               </a:rPr>
-              <a:t>Pipe cutting</a:t>
-            </a:r>
-            <a:endParaRPr lang="en-US" sz="1600" dirty="0"/>
-          </a:p>
-        </p:txBody>
+              <a:t>Shows which pumps justify a drive and the lowest safe setpoint. The drive does the controlling; PumpRupee never does.</a:t>
+            </a:r>
+            <a:endParaRPr lang="en-US" sz="1300" dirty="0"/>
+          </a:p>
+        </p:txBody>
+      </p:sp>
+      <p:sp>
+        <p:nvSpPr>
+          <p:cNvPr id="14" name="Shape 10"/>
+          <p:cNvSpPr/>
+          <p:nvPr/>
+        </p:nvSpPr>
+        <p:spPr>
+          <a:xfrm>
+            <a:off x="8046720" y="1371600"/>
+            <a:ext cx="3611880" cy="1828800"/>
+          </a:xfrm>
+          <a:prstGeom prst="roundRect">
+            <a:avLst>
+              <a:gd name="adj" fmla="val 4000"/>
+            </a:avLst>
+          </a:prstGeom>
+          <a:solidFill>
+            <a:srgbClr val="FFFFFF"/>
+          </a:solidFill>
+          <a:ln w="12700">
+            <a:solidFill>
+              <a:srgbClr val="D3DFD7"/>
+            </a:solidFill>
+            <a:prstDash val="solid"/>
+          </a:ln>
+        </p:spPr>
+      </p:sp>
+      <p:sp>
+        <p:nvSpPr>
+          <p:cNvPr id="15" name="Shape 11"/>
+          <p:cNvSpPr/>
+          <p:nvPr/>
+        </p:nvSpPr>
+        <p:spPr>
+          <a:xfrm>
+            <a:off x="8183880" y="1481328"/>
+            <a:ext cx="502920" cy="502920"/>
+          </a:xfrm>
+          <a:prstGeom prst="ellipse">
+            <a:avLst/>
+          </a:prstGeom>
+          <a:solidFill>
+            <a:srgbClr val="0E5A32"/>
+          </a:solidFill>
+          <a:ln w="12700">
+            <a:solidFill>
+              <a:srgbClr val="0E5A32"/>
+            </a:solidFill>
+            <a:prstDash val="solid"/>
+          </a:ln>
+        </p:spPr>
       </p:sp>
       <p:pic>
         <p:nvPicPr>
-          <p:cNvPr id="44" name="Image 2" descr="preencoded.png">    </p:cNvPr>
+          <p:cNvPr id="16" name="Image 2" descr="preencoded.png">    </p:cNvPr>
           <p:cNvPicPr>
             <a:picLocks noChangeAspect="1"/>
           </p:cNvPicPr>
@@ -6649,8 +5758,8 @@
         </p:blipFill>
         <p:spPr>
           <a:xfrm>
-            <a:off x="731520" y="4389120"/>
-            <a:ext cx="310896" cy="310896"/>
+            <a:off x="8304581" y="1602029"/>
+            <a:ext cx="261518" cy="261518"/>
           </a:xfrm>
           <a:prstGeom prst="rect">
             <a:avLst/>
@@ -6659,14 +5768,14 @@
       </p:pic>
       <p:sp>
         <p:nvSpPr>
-          <p:cNvPr id="45" name="Text 40"/>
-          <p:cNvSpPr txBox="1"/>
-          <p:nvPr/>
-        </p:nvSpPr>
-        <p:spPr>
-          <a:xfrm>
-            <a:off x="1188720" y="4343400"/>
-            <a:ext cx="4572000" cy="411480"/>
+          <p:cNvPr id="17" name="Text 12"/>
+          <p:cNvSpPr txBox="1"/>
+          <p:nvPr/>
+        </p:nvSpPr>
+        <p:spPr>
+          <a:xfrm>
+            <a:off x="8823960" y="1481328"/>
+            <a:ext cx="2651760" cy="502920"/>
           </a:xfrm>
           <a:prstGeom prst="rect">
             <a:avLst/>
@@ -6682,7 +5791,46 @@
               <a:buNone/>
             </a:pPr>
             <a:r>
-              <a:rPr lang="en-US" sz="1600" dirty="0">
+              <a:rPr lang="en-US" sz="2000" b="1" dirty="0">
+                <a:solidFill>
+                  <a:srgbClr val="0E5A32"/>
+                </a:solidFill>
+                <a:latin typeface="Calibri" pitchFamily="34" charset="0"/>
+                <a:ea typeface="Calibri" pitchFamily="34" charset="-122"/>
+                <a:cs typeface="Calibri" pitchFamily="34" charset="-120"/>
+              </a:rPr>
+              <a:t>Digitalise</a:t>
+            </a:r>
+            <a:endParaRPr lang="en-US" sz="2000" dirty="0"/>
+          </a:p>
+        </p:txBody>
+      </p:sp>
+      <p:sp>
+        <p:nvSpPr>
+          <p:cNvPr id="18" name="Text 13"/>
+          <p:cNvSpPr txBox="1"/>
+          <p:nvPr/>
+        </p:nvSpPr>
+        <p:spPr>
+          <a:xfrm>
+            <a:off x="8183880" y="2103120"/>
+            <a:ext cx="3337560" cy="1051560"/>
+          </a:xfrm>
+          <a:prstGeom prst="rect">
+            <a:avLst/>
+          </a:prstGeom>
+          <a:noFill/>
+          <a:ln/>
+        </p:spPr>
+        <p:txBody>
+          <a:bodyPr wrap="square" lIns="0" tIns="0" rIns="0" bIns="0" rtlCol="0" anchor="t"/>
+          <a:lstStyle/>
+          <a:p>
+            <a:pPr indent="0" marL="0">
+              <a:buNone/>
+            </a:pPr>
+            <a:r>
+              <a:rPr lang="en-US" sz="1300" dirty="0">
                 <a:solidFill>
                   <a:srgbClr val="16261F"/>
                 </a:solidFill>
@@ -6690,152 +5838,198 @@
                 <a:ea typeface="Calibri" pitchFamily="34" charset="-122"/>
                 <a:cs typeface="Calibri" pitchFamily="34" charset="-120"/>
               </a:rPr>
-              <a:t>Production shutdown</a:t>
-            </a:r>
-            <a:endParaRPr lang="en-US" sz="1600" dirty="0"/>
-          </a:p>
-        </p:txBody>
-      </p:sp>
-      <p:pic>
-        <p:nvPicPr>
-          <p:cNvPr id="46" name="Image 3" descr="preencoded.png">    </p:cNvPr>
-          <p:cNvPicPr>
-            <a:picLocks noChangeAspect="1"/>
-          </p:cNvPicPr>
-          <p:nvPr/>
-        </p:nvPicPr>
-        <p:blipFill>
-          <a:blip r:embed="rId4"/>
-          <a:stretch>
-            <a:fillRect/>
-          </a:stretch>
-        </p:blipFill>
-        <p:spPr>
-          <a:xfrm>
-            <a:off x="731520" y="4892040"/>
-            <a:ext cx="310896" cy="310896"/>
-          </a:xfrm>
-          <a:prstGeom prst="rect">
-            <a:avLst/>
-          </a:prstGeom>
-        </p:spPr>
-      </p:pic>
-      <p:sp>
-        <p:nvSpPr>
-          <p:cNvPr id="47" name="Text 41"/>
-          <p:cNvSpPr txBox="1"/>
-          <p:nvPr/>
-        </p:nvSpPr>
-        <p:spPr>
-          <a:xfrm>
-            <a:off x="1188720" y="4846320"/>
-            <a:ext cx="4572000" cy="411480"/>
-          </a:xfrm>
-          <a:prstGeom prst="rect">
-            <a:avLst/>
-          </a:prstGeom>
-          <a:noFill/>
-          <a:ln/>
-        </p:spPr>
-        <p:txBody>
-          <a:bodyPr wrap="square" lIns="0" tIns="0" rIns="0" bIns="0" rtlCol="0" anchor="ctr"/>
-          <a:lstStyle/>
-          <a:p>
-            <a:pPr indent="0" marL="0">
-              <a:buNone/>
-            </a:pPr>
-            <a:r>
-              <a:rPr lang="en-US" sz="1600" dirty="0">
-                <a:solidFill>
-                  <a:srgbClr val="16261F"/>
-                </a:solidFill>
-                <a:latin typeface="Calibri" pitchFamily="34" charset="0"/>
-                <a:ea typeface="Calibri" pitchFamily="34" charset="-122"/>
-                <a:cs typeface="Calibri" pitchFamily="34" charset="-120"/>
-              </a:rPr>
-              <a:t>Hydraulic expertise</a:t>
-            </a:r>
-            <a:endParaRPr lang="en-US" sz="1600" dirty="0"/>
-          </a:p>
-        </p:txBody>
-      </p:sp>
-      <p:pic>
-        <p:nvPicPr>
-          <p:cNvPr id="48" name="Image 4" descr="preencoded.png">    </p:cNvPr>
-          <p:cNvPicPr>
-            <a:picLocks noChangeAspect="1"/>
-          </p:cNvPicPr>
-          <p:nvPr/>
-        </p:nvPicPr>
-        <p:blipFill>
-          <a:blip r:embed="rId5"/>
-          <a:stretch>
-            <a:fillRect/>
-          </a:stretch>
-        </p:blipFill>
-        <p:spPr>
-          <a:xfrm>
-            <a:off x="731520" y="5394960"/>
-            <a:ext cx="310896" cy="310896"/>
-          </a:xfrm>
-          <a:prstGeom prst="rect">
-            <a:avLst/>
-          </a:prstGeom>
-        </p:spPr>
-      </p:pic>
-      <p:sp>
-        <p:nvSpPr>
-          <p:cNvPr id="49" name="Text 42"/>
-          <p:cNvSpPr txBox="1"/>
-          <p:nvPr/>
-        </p:nvSpPr>
-        <p:spPr>
-          <a:xfrm>
-            <a:off x="1188720" y="5349240"/>
-            <a:ext cx="4572000" cy="411480"/>
-          </a:xfrm>
-          <a:prstGeom prst="rect">
-            <a:avLst/>
-          </a:prstGeom>
-          <a:noFill/>
-          <a:ln/>
-        </p:spPr>
-        <p:txBody>
-          <a:bodyPr wrap="square" lIns="0" tIns="0" rIns="0" bIns="0" rtlCol="0" anchor="ctr"/>
-          <a:lstStyle/>
-          <a:p>
-            <a:pPr indent="0" marL="0">
-              <a:buNone/>
-            </a:pPr>
-            <a:r>
-              <a:rPr lang="en-US" sz="1600" dirty="0">
-                <a:solidFill>
-                  <a:srgbClr val="16261F"/>
-                </a:solidFill>
-                <a:latin typeface="Calibri" pitchFamily="34" charset="0"/>
-                <a:ea typeface="Calibri" pitchFamily="34" charset="-122"/>
-                <a:cs typeface="Calibri" pitchFamily="34" charset="-120"/>
-              </a:rPr>
-              <a:t>Reading graphs</a:t>
-            </a:r>
-            <a:endParaRPr lang="en-US" sz="1600" dirty="0"/>
-          </a:p>
-        </p:txBody>
-      </p:sp>
-      <p:sp>
-        <p:nvSpPr>
-          <p:cNvPr id="50" name="Shape 43"/>
+              <a:t>Logs become a ₹ business case and a before/after proof. The owner keeps the data and can use any drive.</a:t>
+            </a:r>
+            <a:endParaRPr lang="en-US" sz="1300" dirty="0"/>
+          </a:p>
+        </p:txBody>
+      </p:sp>
+      <p:sp>
+        <p:nvSpPr>
+          <p:cNvPr id="19" name="Shape 14"/>
           <p:cNvSpPr/>
           <p:nvPr/>
         </p:nvSpPr>
         <p:spPr>
           <a:xfrm>
-            <a:off x="6263640" y="2788920"/>
-            <a:ext cx="5394960" cy="3520440"/>
+            <a:off x="548640" y="3520440"/>
+            <a:ext cx="2011680" cy="1325880"/>
           </a:xfrm>
           <a:prstGeom prst="roundRect">
             <a:avLst>
-              <a:gd name="adj" fmla="val 2078"/>
+              <a:gd name="adj" fmla="val 5517"/>
+            </a:avLst>
+          </a:prstGeom>
+          <a:solidFill>
+            <a:srgbClr val="E3F6E8"/>
+          </a:solidFill>
+          <a:ln w="25400">
+            <a:solidFill>
+              <a:srgbClr val="3DCD58"/>
+            </a:solidFill>
+            <a:prstDash val="solid"/>
+          </a:ln>
+        </p:spPr>
+      </p:sp>
+      <p:sp>
+        <p:nvSpPr>
+          <p:cNvPr id="20" name="Shape 15"/>
+          <p:cNvSpPr/>
+          <p:nvPr/>
+        </p:nvSpPr>
+        <p:spPr>
+          <a:xfrm>
+            <a:off x="658368" y="3611880"/>
+            <a:ext cx="347472" cy="347472"/>
+          </a:xfrm>
+          <a:prstGeom prst="ellipse">
+            <a:avLst/>
+          </a:prstGeom>
+          <a:solidFill>
+            <a:srgbClr val="0E5A32"/>
+          </a:solidFill>
+          <a:ln w="12700">
+            <a:solidFill>
+              <a:srgbClr val="0E5A32"/>
+            </a:solidFill>
+            <a:prstDash val="solid"/>
+          </a:ln>
+        </p:spPr>
+      </p:sp>
+      <p:sp>
+        <p:nvSpPr>
+          <p:cNvPr id="21" name="Text 16"/>
+          <p:cNvSpPr txBox="1"/>
+          <p:nvPr/>
+        </p:nvSpPr>
+        <p:spPr>
+          <a:xfrm>
+            <a:off x="658368" y="3611880"/>
+            <a:ext cx="347472" cy="347472"/>
+          </a:xfrm>
+          <a:prstGeom prst="rect">
+            <a:avLst/>
+          </a:prstGeom>
+          <a:noFill/>
+          <a:ln/>
+        </p:spPr>
+        <p:txBody>
+          <a:bodyPr wrap="square" lIns="0" tIns="0" rIns="0" bIns="0" rtlCol="0" anchor="ctr"/>
+          <a:lstStyle/>
+          <a:p>
+            <a:pPr algn="ctr" indent="0" marL="0">
+              <a:buNone/>
+            </a:pPr>
+            <a:r>
+              <a:rPr lang="en-US" sz="1400" b="1" dirty="0">
+                <a:solidFill>
+                  <a:srgbClr val="FFFFFF"/>
+                </a:solidFill>
+                <a:latin typeface="Calibri" pitchFamily="34" charset="0"/>
+                <a:ea typeface="Calibri" pitchFamily="34" charset="-122"/>
+                <a:cs typeface="Calibri" pitchFamily="34" charset="-120"/>
+              </a:rPr>
+              <a:t>1</a:t>
+            </a:r>
+            <a:endParaRPr lang="en-US" sz="1400" dirty="0"/>
+          </a:p>
+        </p:txBody>
+      </p:sp>
+      <p:sp>
+        <p:nvSpPr>
+          <p:cNvPr id="22" name="Text 17"/>
+          <p:cNvSpPr txBox="1"/>
+          <p:nvPr/>
+        </p:nvSpPr>
+        <p:spPr>
+          <a:xfrm>
+            <a:off x="658368" y="4023360"/>
+            <a:ext cx="1810512" cy="777240"/>
+          </a:xfrm>
+          <a:prstGeom prst="rect">
+            <a:avLst/>
+          </a:prstGeom>
+          <a:noFill/>
+          <a:ln/>
+        </p:spPr>
+        <p:txBody>
+          <a:bodyPr wrap="square" lIns="0" tIns="0" rIns="0" bIns="0" rtlCol="0" anchor="t"/>
+          <a:lstStyle/>
+          <a:p>
+            <a:pPr indent="0" marL="0">
+              <a:buNone/>
+            </a:pPr>
+            <a:r>
+              <a:rPr lang="en-US" sz="1400" b="1" dirty="0">
+                <a:solidFill>
+                  <a:srgbClr val="16261F"/>
+                </a:solidFill>
+                <a:latin typeface="Calibri" pitchFamily="34" charset="0"/>
+                <a:ea typeface="Calibri" pitchFamily="34" charset="-122"/>
+                <a:cs typeface="Calibri" pitchFamily="34" charset="-120"/>
+              </a:rPr>
+              <a:t>PumpRupee audit</a:t>
+            </a:r>
+            <a:endParaRPr lang="en-US" sz="1400" dirty="0"/>
+          </a:p>
+          <a:p>
+            <a:pPr indent="0" marL="0">
+              <a:buNone/>
+            </a:pPr>
+            <a:r>
+              <a:rPr lang="en-US" sz="1200" dirty="0">
+                <a:solidFill>
+                  <a:srgbClr val="55655D"/>
+                </a:solidFill>
+                <a:latin typeface="Calibri" pitchFamily="34" charset="0"/>
+                <a:ea typeface="Calibri" pitchFamily="34" charset="-122"/>
+                <a:cs typeface="Calibri" pitchFamily="34" charset="-120"/>
+              </a:rPr>
+              <a:t>Clamp-on, 7–14 days</a:t>
+            </a:r>
+            <a:endParaRPr lang="en-US" sz="1400" dirty="0"/>
+          </a:p>
+        </p:txBody>
+      </p:sp>
+      <p:sp>
+        <p:nvSpPr>
+          <p:cNvPr id="23" name="Shape 18"/>
+          <p:cNvSpPr/>
+          <p:nvPr/>
+        </p:nvSpPr>
+        <p:spPr>
+          <a:xfrm>
+            <a:off x="2578608" y="4023360"/>
+            <a:ext cx="201168" cy="256032"/>
+          </a:xfrm>
+          <a:prstGeom prst="rightArrow">
+            <a:avLst/>
+          </a:prstGeom>
+          <a:solidFill>
+            <a:srgbClr val="3DCD58"/>
+          </a:solidFill>
+          <a:ln w="12700">
+            <a:solidFill>
+              <a:srgbClr val="3DCD58"/>
+            </a:solidFill>
+            <a:prstDash val="solid"/>
+          </a:ln>
+        </p:spPr>
+      </p:sp>
+      <p:sp>
+        <p:nvSpPr>
+          <p:cNvPr id="24" name="Shape 19"/>
+          <p:cNvSpPr/>
+          <p:nvPr/>
+        </p:nvSpPr>
+        <p:spPr>
+          <a:xfrm>
+            <a:off x="2798064" y="3520440"/>
+            <a:ext cx="2011680" cy="1325880"/>
+          </a:xfrm>
+          <a:prstGeom prst="roundRect">
+            <a:avLst>
+              <a:gd name="adj" fmla="val 5517"/>
             </a:avLst>
           </a:prstGeom>
           <a:solidFill>
@@ -6851,14 +6045,78 @@
       </p:sp>
       <p:sp>
         <p:nvSpPr>
-          <p:cNvPr id="51" name="Text 44"/>
-          <p:cNvSpPr txBox="1"/>
-          <p:nvPr/>
-        </p:nvSpPr>
-        <p:spPr>
-          <a:xfrm>
-            <a:off x="6400800" y="2852928"/>
-            <a:ext cx="5120640" cy="365760"/>
+          <p:cNvPr id="25" name="Shape 20"/>
+          <p:cNvSpPr/>
+          <p:nvPr/>
+        </p:nvSpPr>
+        <p:spPr>
+          <a:xfrm>
+            <a:off x="2907792" y="3611880"/>
+            <a:ext cx="347472" cy="347472"/>
+          </a:xfrm>
+          <a:prstGeom prst="ellipse">
+            <a:avLst/>
+          </a:prstGeom>
+          <a:solidFill>
+            <a:srgbClr val="9AA5A0"/>
+          </a:solidFill>
+          <a:ln w="12700">
+            <a:solidFill>
+              <a:srgbClr val="9AA5A0"/>
+            </a:solidFill>
+            <a:prstDash val="solid"/>
+          </a:ln>
+        </p:spPr>
+      </p:sp>
+      <p:sp>
+        <p:nvSpPr>
+          <p:cNvPr id="26" name="Text 21"/>
+          <p:cNvSpPr txBox="1"/>
+          <p:nvPr/>
+        </p:nvSpPr>
+        <p:spPr>
+          <a:xfrm>
+            <a:off x="2907792" y="3611880"/>
+            <a:ext cx="347472" cy="347472"/>
+          </a:xfrm>
+          <a:prstGeom prst="rect">
+            <a:avLst/>
+          </a:prstGeom>
+          <a:noFill/>
+          <a:ln/>
+        </p:spPr>
+        <p:txBody>
+          <a:bodyPr wrap="square" lIns="0" tIns="0" rIns="0" bIns="0" rtlCol="0" anchor="ctr"/>
+          <a:lstStyle/>
+          <a:p>
+            <a:pPr algn="ctr" indent="0" marL="0">
+              <a:buNone/>
+            </a:pPr>
+            <a:r>
+              <a:rPr lang="en-US" sz="1400" b="1" dirty="0">
+                <a:solidFill>
+                  <a:srgbClr val="FFFFFF"/>
+                </a:solidFill>
+                <a:latin typeface="Calibri" pitchFamily="34" charset="0"/>
+                <a:ea typeface="Calibri" pitchFamily="34" charset="-122"/>
+                <a:cs typeface="Calibri" pitchFamily="34" charset="-120"/>
+              </a:rPr>
+              <a:t>2</a:t>
+            </a:r>
+            <a:endParaRPr lang="en-US" sz="1400" dirty="0"/>
+          </a:p>
+        </p:txBody>
+      </p:sp>
+      <p:sp>
+        <p:nvSpPr>
+          <p:cNvPr id="27" name="Text 22"/>
+          <p:cNvSpPr txBox="1"/>
+          <p:nvPr/>
+        </p:nvSpPr>
+        <p:spPr>
+          <a:xfrm>
+            <a:off x="2907792" y="4023360"/>
+            <a:ext cx="1810512" cy="777240"/>
           </a:xfrm>
           <a:prstGeom prst="rect">
             <a:avLst/>
@@ -6874,7 +6132,606 @@
               <a:buNone/>
             </a:pPr>
             <a:r>
-              <a:rPr lang="en-US" sz="1700" b="1" dirty="0">
+              <a:rPr lang="en-US" sz="1400" b="1" dirty="0">
+                <a:solidFill>
+                  <a:srgbClr val="16261F"/>
+                </a:solidFill>
+                <a:latin typeface="Calibri" pitchFamily="34" charset="0"/>
+                <a:ea typeface="Calibri" pitchFamily="34" charset="-122"/>
+                <a:cs typeface="Calibri" pitchFamily="34" charset="-120"/>
+              </a:rPr>
+              <a:t>₹ business case</a:t>
+            </a:r>
+            <a:endParaRPr lang="en-US" sz="1400" dirty="0"/>
+          </a:p>
+          <a:p>
+            <a:pPr indent="0" marL="0">
+              <a:buNone/>
+            </a:pPr>
+            <a:r>
+              <a:rPr lang="en-US" sz="1200" dirty="0">
+                <a:solidFill>
+                  <a:srgbClr val="55655D"/>
+                </a:solidFill>
+                <a:latin typeface="Calibri" pitchFamily="34" charset="0"/>
+                <a:ea typeface="Calibri" pitchFamily="34" charset="-122"/>
+                <a:cs typeface="Calibri" pitchFamily="34" charset="-120"/>
+              </a:rPr>
+              <a:t>Waste by cause + VFD verdict</a:t>
+            </a:r>
+            <a:endParaRPr lang="en-US" sz="1400" dirty="0"/>
+          </a:p>
+        </p:txBody>
+      </p:sp>
+      <p:sp>
+        <p:nvSpPr>
+          <p:cNvPr id="28" name="Shape 23"/>
+          <p:cNvSpPr/>
+          <p:nvPr/>
+        </p:nvSpPr>
+        <p:spPr>
+          <a:xfrm>
+            <a:off x="4828032" y="4023360"/>
+            <a:ext cx="201168" cy="256032"/>
+          </a:xfrm>
+          <a:prstGeom prst="rightArrow">
+            <a:avLst/>
+          </a:prstGeom>
+          <a:solidFill>
+            <a:srgbClr val="3DCD58"/>
+          </a:solidFill>
+          <a:ln w="12700">
+            <a:solidFill>
+              <a:srgbClr val="3DCD58"/>
+            </a:solidFill>
+            <a:prstDash val="solid"/>
+          </a:ln>
+        </p:spPr>
+      </p:sp>
+      <p:sp>
+        <p:nvSpPr>
+          <p:cNvPr id="29" name="Shape 24"/>
+          <p:cNvSpPr/>
+          <p:nvPr/>
+        </p:nvSpPr>
+        <p:spPr>
+          <a:xfrm>
+            <a:off x="5047488" y="3520440"/>
+            <a:ext cx="2011680" cy="1325880"/>
+          </a:xfrm>
+          <a:prstGeom prst="roundRect">
+            <a:avLst>
+              <a:gd name="adj" fmla="val 5517"/>
+            </a:avLst>
+          </a:prstGeom>
+          <a:solidFill>
+            <a:srgbClr val="FFFFFF"/>
+          </a:solidFill>
+          <a:ln w="12700">
+            <a:solidFill>
+              <a:srgbClr val="D3DFD7"/>
+            </a:solidFill>
+            <a:prstDash val="solid"/>
+          </a:ln>
+        </p:spPr>
+      </p:sp>
+      <p:sp>
+        <p:nvSpPr>
+          <p:cNvPr id="30" name="Shape 25"/>
+          <p:cNvSpPr/>
+          <p:nvPr/>
+        </p:nvSpPr>
+        <p:spPr>
+          <a:xfrm>
+            <a:off x="5157216" y="3611880"/>
+            <a:ext cx="347472" cy="347472"/>
+          </a:xfrm>
+          <a:prstGeom prst="ellipse">
+            <a:avLst/>
+          </a:prstGeom>
+          <a:solidFill>
+            <a:srgbClr val="9AA5A0"/>
+          </a:solidFill>
+          <a:ln w="12700">
+            <a:solidFill>
+              <a:srgbClr val="9AA5A0"/>
+            </a:solidFill>
+            <a:prstDash val="solid"/>
+          </a:ln>
+        </p:spPr>
+      </p:sp>
+      <p:sp>
+        <p:nvSpPr>
+          <p:cNvPr id="31" name="Text 26"/>
+          <p:cNvSpPr txBox="1"/>
+          <p:nvPr/>
+        </p:nvSpPr>
+        <p:spPr>
+          <a:xfrm>
+            <a:off x="5157216" y="3611880"/>
+            <a:ext cx="347472" cy="347472"/>
+          </a:xfrm>
+          <a:prstGeom prst="rect">
+            <a:avLst/>
+          </a:prstGeom>
+          <a:noFill/>
+          <a:ln/>
+        </p:spPr>
+        <p:txBody>
+          <a:bodyPr wrap="square" lIns="0" tIns="0" rIns="0" bIns="0" rtlCol="0" anchor="ctr"/>
+          <a:lstStyle/>
+          <a:p>
+            <a:pPr algn="ctr" indent="0" marL="0">
+              <a:buNone/>
+            </a:pPr>
+            <a:r>
+              <a:rPr lang="en-US" sz="1400" b="1" dirty="0">
+                <a:solidFill>
+                  <a:srgbClr val="FFFFFF"/>
+                </a:solidFill>
+                <a:latin typeface="Calibri" pitchFamily="34" charset="0"/>
+                <a:ea typeface="Calibri" pitchFamily="34" charset="-122"/>
+                <a:cs typeface="Calibri" pitchFamily="34" charset="-120"/>
+              </a:rPr>
+              <a:t>3</a:t>
+            </a:r>
+            <a:endParaRPr lang="en-US" sz="1400" dirty="0"/>
+          </a:p>
+        </p:txBody>
+      </p:sp>
+      <p:sp>
+        <p:nvSpPr>
+          <p:cNvPr id="32" name="Text 27"/>
+          <p:cNvSpPr txBox="1"/>
+          <p:nvPr/>
+        </p:nvSpPr>
+        <p:spPr>
+          <a:xfrm>
+            <a:off x="5157216" y="4023360"/>
+            <a:ext cx="1810512" cy="777240"/>
+          </a:xfrm>
+          <a:prstGeom prst="rect">
+            <a:avLst/>
+          </a:prstGeom>
+          <a:noFill/>
+          <a:ln/>
+        </p:spPr>
+        <p:txBody>
+          <a:bodyPr wrap="square" lIns="0" tIns="0" rIns="0" bIns="0" rtlCol="0" anchor="t"/>
+          <a:lstStyle/>
+          <a:p>
+            <a:pPr indent="0" marL="0">
+              <a:buNone/>
+            </a:pPr>
+            <a:r>
+              <a:rPr lang="en-US" sz="1400" b="1" dirty="0">
+                <a:solidFill>
+                  <a:srgbClr val="16261F"/>
+                </a:solidFill>
+                <a:latin typeface="Calibri" pitchFamily="34" charset="0"/>
+                <a:ea typeface="Calibri" pitchFamily="34" charset="-122"/>
+                <a:cs typeface="Calibri" pitchFamily="34" charset="-120"/>
+              </a:rPr>
+              <a:t>VFD installed</a:t>
+            </a:r>
+            <a:endParaRPr lang="en-US" sz="1400" dirty="0"/>
+          </a:p>
+          <a:p>
+            <a:pPr indent="0" marL="0">
+              <a:buNone/>
+            </a:pPr>
+            <a:r>
+              <a:rPr lang="en-US" sz="1200" dirty="0">
+                <a:solidFill>
+                  <a:srgbClr val="55655D"/>
+                </a:solidFill>
+                <a:latin typeface="Calibri" pitchFamily="34" charset="0"/>
+                <a:ea typeface="Calibri" pitchFamily="34" charset="-122"/>
+                <a:cs typeface="Calibri" pitchFamily="34" charset="-120"/>
+              </a:rPr>
+              <a:t>e.g. Altivar Process</a:t>
+            </a:r>
+            <a:endParaRPr lang="en-US" sz="1400" dirty="0"/>
+          </a:p>
+        </p:txBody>
+      </p:sp>
+      <p:sp>
+        <p:nvSpPr>
+          <p:cNvPr id="33" name="Shape 28"/>
+          <p:cNvSpPr/>
+          <p:nvPr/>
+        </p:nvSpPr>
+        <p:spPr>
+          <a:xfrm>
+            <a:off x="7077456" y="4023360"/>
+            <a:ext cx="201168" cy="256032"/>
+          </a:xfrm>
+          <a:prstGeom prst="rightArrow">
+            <a:avLst/>
+          </a:prstGeom>
+          <a:solidFill>
+            <a:srgbClr val="3DCD58"/>
+          </a:solidFill>
+          <a:ln w="12700">
+            <a:solidFill>
+              <a:srgbClr val="3DCD58"/>
+            </a:solidFill>
+            <a:prstDash val="solid"/>
+          </a:ln>
+        </p:spPr>
+      </p:sp>
+      <p:sp>
+        <p:nvSpPr>
+          <p:cNvPr id="34" name="Shape 29"/>
+          <p:cNvSpPr/>
+          <p:nvPr/>
+        </p:nvSpPr>
+        <p:spPr>
+          <a:xfrm>
+            <a:off x="7296912" y="3520440"/>
+            <a:ext cx="2011680" cy="1325880"/>
+          </a:xfrm>
+          <a:prstGeom prst="roundRect">
+            <a:avLst>
+              <a:gd name="adj" fmla="val 5517"/>
+            </a:avLst>
+          </a:prstGeom>
+          <a:solidFill>
+            <a:srgbClr val="E3F6E8"/>
+          </a:solidFill>
+          <a:ln w="25400">
+            <a:solidFill>
+              <a:srgbClr val="3DCD58"/>
+            </a:solidFill>
+            <a:prstDash val="solid"/>
+          </a:ln>
+        </p:spPr>
+      </p:sp>
+      <p:sp>
+        <p:nvSpPr>
+          <p:cNvPr id="35" name="Shape 30"/>
+          <p:cNvSpPr/>
+          <p:nvPr/>
+        </p:nvSpPr>
+        <p:spPr>
+          <a:xfrm>
+            <a:off x="7406640" y="3611880"/>
+            <a:ext cx="347472" cy="347472"/>
+          </a:xfrm>
+          <a:prstGeom prst="ellipse">
+            <a:avLst/>
+          </a:prstGeom>
+          <a:solidFill>
+            <a:srgbClr val="0E5A32"/>
+          </a:solidFill>
+          <a:ln w="12700">
+            <a:solidFill>
+              <a:srgbClr val="0E5A32"/>
+            </a:solidFill>
+            <a:prstDash val="solid"/>
+          </a:ln>
+        </p:spPr>
+      </p:sp>
+      <p:sp>
+        <p:nvSpPr>
+          <p:cNvPr id="36" name="Text 31"/>
+          <p:cNvSpPr txBox="1"/>
+          <p:nvPr/>
+        </p:nvSpPr>
+        <p:spPr>
+          <a:xfrm>
+            <a:off x="7406640" y="3611880"/>
+            <a:ext cx="347472" cy="347472"/>
+          </a:xfrm>
+          <a:prstGeom prst="rect">
+            <a:avLst/>
+          </a:prstGeom>
+          <a:noFill/>
+          <a:ln/>
+        </p:spPr>
+        <p:txBody>
+          <a:bodyPr wrap="square" lIns="0" tIns="0" rIns="0" bIns="0" rtlCol="0" anchor="ctr"/>
+          <a:lstStyle/>
+          <a:p>
+            <a:pPr algn="ctr" indent="0" marL="0">
+              <a:buNone/>
+            </a:pPr>
+            <a:r>
+              <a:rPr lang="en-US" sz="1400" b="1" dirty="0">
+                <a:solidFill>
+                  <a:srgbClr val="FFFFFF"/>
+                </a:solidFill>
+                <a:latin typeface="Calibri" pitchFamily="34" charset="0"/>
+                <a:ea typeface="Calibri" pitchFamily="34" charset="-122"/>
+                <a:cs typeface="Calibri" pitchFamily="34" charset="-120"/>
+              </a:rPr>
+              <a:t>4</a:t>
+            </a:r>
+            <a:endParaRPr lang="en-US" sz="1400" dirty="0"/>
+          </a:p>
+        </p:txBody>
+      </p:sp>
+      <p:sp>
+        <p:nvSpPr>
+          <p:cNvPr id="37" name="Text 32"/>
+          <p:cNvSpPr txBox="1"/>
+          <p:nvPr/>
+        </p:nvSpPr>
+        <p:spPr>
+          <a:xfrm>
+            <a:off x="7406640" y="4023360"/>
+            <a:ext cx="1810512" cy="777240"/>
+          </a:xfrm>
+          <a:prstGeom prst="rect">
+            <a:avLst/>
+          </a:prstGeom>
+          <a:noFill/>
+          <a:ln/>
+        </p:spPr>
+        <p:txBody>
+          <a:bodyPr wrap="square" lIns="0" tIns="0" rIns="0" bIns="0" rtlCol="0" anchor="t"/>
+          <a:lstStyle/>
+          <a:p>
+            <a:pPr indent="0" marL="0">
+              <a:buNone/>
+            </a:pPr>
+            <a:r>
+              <a:rPr lang="en-US" sz="1400" b="1" dirty="0">
+                <a:solidFill>
+                  <a:srgbClr val="16261F"/>
+                </a:solidFill>
+                <a:latin typeface="Calibri" pitchFamily="34" charset="0"/>
+                <a:ea typeface="Calibri" pitchFamily="34" charset="-122"/>
+                <a:cs typeface="Calibri" pitchFamily="34" charset="-120"/>
+              </a:rPr>
+              <a:t>PumpRupee re-measures</a:t>
+            </a:r>
+            <a:endParaRPr lang="en-US" sz="1400" dirty="0"/>
+          </a:p>
+          <a:p>
+            <a:pPr indent="0" marL="0">
+              <a:buNone/>
+            </a:pPr>
+            <a:r>
+              <a:rPr lang="en-US" sz="1200" dirty="0">
+                <a:solidFill>
+                  <a:srgbClr val="55655D"/>
+                </a:solidFill>
+                <a:latin typeface="Calibri" pitchFamily="34" charset="0"/>
+                <a:ea typeface="Calibri" pitchFamily="34" charset="-122"/>
+                <a:cs typeface="Calibri" pitchFamily="34" charset="-120"/>
+              </a:rPr>
+              <a:t>Same kit, after the fix</a:t>
+            </a:r>
+            <a:endParaRPr lang="en-US" sz="1400" dirty="0"/>
+          </a:p>
+        </p:txBody>
+      </p:sp>
+      <p:sp>
+        <p:nvSpPr>
+          <p:cNvPr id="38" name="Shape 33"/>
+          <p:cNvSpPr/>
+          <p:nvPr/>
+        </p:nvSpPr>
+        <p:spPr>
+          <a:xfrm>
+            <a:off x="9326880" y="4023360"/>
+            <a:ext cx="201168" cy="256032"/>
+          </a:xfrm>
+          <a:prstGeom prst="rightArrow">
+            <a:avLst/>
+          </a:prstGeom>
+          <a:solidFill>
+            <a:srgbClr val="3DCD58"/>
+          </a:solidFill>
+          <a:ln w="12700">
+            <a:solidFill>
+              <a:srgbClr val="3DCD58"/>
+            </a:solidFill>
+            <a:prstDash val="solid"/>
+          </a:ln>
+        </p:spPr>
+      </p:sp>
+      <p:sp>
+        <p:nvSpPr>
+          <p:cNvPr id="39" name="Shape 34"/>
+          <p:cNvSpPr/>
+          <p:nvPr/>
+        </p:nvSpPr>
+        <p:spPr>
+          <a:xfrm>
+            <a:off x="9546336" y="3520440"/>
+            <a:ext cx="2011680" cy="1325880"/>
+          </a:xfrm>
+          <a:prstGeom prst="roundRect">
+            <a:avLst>
+              <a:gd name="adj" fmla="val 5517"/>
+            </a:avLst>
+          </a:prstGeom>
+          <a:solidFill>
+            <a:srgbClr val="FFFFFF"/>
+          </a:solidFill>
+          <a:ln w="12700">
+            <a:solidFill>
+              <a:srgbClr val="D3DFD7"/>
+            </a:solidFill>
+            <a:prstDash val="solid"/>
+          </a:ln>
+        </p:spPr>
+      </p:sp>
+      <p:sp>
+        <p:nvSpPr>
+          <p:cNvPr id="40" name="Shape 35"/>
+          <p:cNvSpPr/>
+          <p:nvPr/>
+        </p:nvSpPr>
+        <p:spPr>
+          <a:xfrm>
+            <a:off x="9656064" y="3611880"/>
+            <a:ext cx="347472" cy="347472"/>
+          </a:xfrm>
+          <a:prstGeom prst="ellipse">
+            <a:avLst/>
+          </a:prstGeom>
+          <a:solidFill>
+            <a:srgbClr val="9AA5A0"/>
+          </a:solidFill>
+          <a:ln w="12700">
+            <a:solidFill>
+              <a:srgbClr val="9AA5A0"/>
+            </a:solidFill>
+            <a:prstDash val="solid"/>
+          </a:ln>
+        </p:spPr>
+      </p:sp>
+      <p:sp>
+        <p:nvSpPr>
+          <p:cNvPr id="41" name="Text 36"/>
+          <p:cNvSpPr txBox="1"/>
+          <p:nvPr/>
+        </p:nvSpPr>
+        <p:spPr>
+          <a:xfrm>
+            <a:off x="9656064" y="3611880"/>
+            <a:ext cx="347472" cy="347472"/>
+          </a:xfrm>
+          <a:prstGeom prst="rect">
+            <a:avLst/>
+          </a:prstGeom>
+          <a:noFill/>
+          <a:ln/>
+        </p:spPr>
+        <p:txBody>
+          <a:bodyPr wrap="square" lIns="0" tIns="0" rIns="0" bIns="0" rtlCol="0" anchor="ctr"/>
+          <a:lstStyle/>
+          <a:p>
+            <a:pPr algn="ctr" indent="0" marL="0">
+              <a:buNone/>
+            </a:pPr>
+            <a:r>
+              <a:rPr lang="en-US" sz="1400" b="1" dirty="0">
+                <a:solidFill>
+                  <a:srgbClr val="FFFFFF"/>
+                </a:solidFill>
+                <a:latin typeface="Calibri" pitchFamily="34" charset="0"/>
+                <a:ea typeface="Calibri" pitchFamily="34" charset="-122"/>
+                <a:cs typeface="Calibri" pitchFamily="34" charset="-120"/>
+              </a:rPr>
+              <a:t>5</a:t>
+            </a:r>
+            <a:endParaRPr lang="en-US" sz="1400" dirty="0"/>
+          </a:p>
+        </p:txBody>
+      </p:sp>
+      <p:sp>
+        <p:nvSpPr>
+          <p:cNvPr id="42" name="Text 37"/>
+          <p:cNvSpPr txBox="1"/>
+          <p:nvPr/>
+        </p:nvSpPr>
+        <p:spPr>
+          <a:xfrm>
+            <a:off x="9656064" y="4023360"/>
+            <a:ext cx="1810512" cy="777240"/>
+          </a:xfrm>
+          <a:prstGeom prst="rect">
+            <a:avLst/>
+          </a:prstGeom>
+          <a:noFill/>
+          <a:ln/>
+        </p:spPr>
+        <p:txBody>
+          <a:bodyPr wrap="square" lIns="0" tIns="0" rIns="0" bIns="0" rtlCol="0" anchor="t"/>
+          <a:lstStyle/>
+          <a:p>
+            <a:pPr indent="0" marL="0">
+              <a:buNone/>
+            </a:pPr>
+            <a:r>
+              <a:rPr lang="en-US" sz="1400" b="1" dirty="0">
+                <a:solidFill>
+                  <a:srgbClr val="16261F"/>
+                </a:solidFill>
+                <a:latin typeface="Calibri" pitchFamily="34" charset="0"/>
+                <a:ea typeface="Calibri" pitchFamily="34" charset="-122"/>
+                <a:cs typeface="Calibri" pitchFamily="34" charset="-120"/>
+              </a:rPr>
+              <a:t>Verified saving</a:t>
+            </a:r>
+            <a:endParaRPr lang="en-US" sz="1400" dirty="0"/>
+          </a:p>
+          <a:p>
+            <a:pPr indent="0" marL="0">
+              <a:buNone/>
+            </a:pPr>
+            <a:r>
+              <a:rPr lang="en-US" sz="1200" dirty="0">
+                <a:solidFill>
+                  <a:srgbClr val="55655D"/>
+                </a:solidFill>
+                <a:latin typeface="Calibri" pitchFamily="34" charset="0"/>
+                <a:ea typeface="Calibri" pitchFamily="34" charset="-122"/>
+                <a:cs typeface="Calibri" pitchFamily="34" charset="-120"/>
+              </a:rPr>
+              <a:t>Feeds energy management, e.g. EcoStruxure</a:t>
+            </a:r>
+            <a:endParaRPr lang="en-US" sz="1400" dirty="0"/>
+          </a:p>
+        </p:txBody>
+      </p:sp>
+      <p:sp>
+        <p:nvSpPr>
+          <p:cNvPr id="43" name="Shape 38"/>
+          <p:cNvSpPr/>
+          <p:nvPr/>
+        </p:nvSpPr>
+        <p:spPr>
+          <a:xfrm>
+            <a:off x="548640" y="5029200"/>
+            <a:ext cx="6766560" cy="1280160"/>
+          </a:xfrm>
+          <a:prstGeom prst="roundRect">
+            <a:avLst>
+              <a:gd name="adj" fmla="val 5714"/>
+            </a:avLst>
+          </a:prstGeom>
+          <a:solidFill>
+            <a:srgbClr val="E3F6E8"/>
+          </a:solidFill>
+          <a:ln w="19050">
+            <a:solidFill>
+              <a:srgbClr val="3DCD58"/>
+            </a:solidFill>
+            <a:prstDash val="solid"/>
+          </a:ln>
+        </p:spPr>
+      </p:sp>
+      <p:sp>
+        <p:nvSpPr>
+          <p:cNvPr id="44" name="Text 39"/>
+          <p:cNvSpPr txBox="1"/>
+          <p:nvPr/>
+        </p:nvSpPr>
+        <p:spPr>
+          <a:xfrm>
+            <a:off x="731520" y="5074920"/>
+            <a:ext cx="6400800" cy="1188720"/>
+          </a:xfrm>
+          <a:prstGeom prst="rect">
+            <a:avLst/>
+          </a:prstGeom>
+          <a:noFill/>
+          <a:ln/>
+        </p:spPr>
+        <p:txBody>
+          <a:bodyPr wrap="square" lIns="0" tIns="0" rIns="0" bIns="0" rtlCol="0" anchor="ctr"/>
+          <a:lstStyle/>
+          <a:p>
+            <a:pPr indent="0" marL="0">
+              <a:buNone/>
+            </a:pPr>
+            <a:r>
+              <a:rPr lang="en-US" sz="1500" b="1" dirty="0">
                 <a:solidFill>
                   <a:srgbClr val="0E5A32"/>
                 </a:solidFill>
@@ -6882,46 +6739,66 @@
                 <a:ea typeface="Calibri" pitchFamily="34" charset="-122"/>
                 <a:cs typeface="Calibri" pitchFamily="34" charset="-120"/>
               </a:rPr>
-              <a:t>Safety &amp; reliability by design</a:t>
-            </a:r>
-            <a:endParaRPr lang="en-US" sz="1700" dirty="0"/>
-          </a:p>
-        </p:txBody>
-      </p:sp>
-      <p:pic>
-        <p:nvPicPr>
-          <p:cNvPr id="52" name="Image 5" descr="preencoded.png">    </p:cNvPr>
-          <p:cNvPicPr>
-            <a:picLocks noChangeAspect="1"/>
-          </p:cNvPicPr>
-          <p:nvPr/>
-        </p:nvPicPr>
-        <p:blipFill>
-          <a:blip r:embed="rId6"/>
-          <a:stretch>
-            <a:fillRect/>
-          </a:stretch>
-        </p:blipFill>
-        <p:spPr>
-          <a:xfrm>
-            <a:off x="6446520" y="3383280"/>
-            <a:ext cx="310896" cy="310896"/>
-          </a:xfrm>
-          <a:prstGeom prst="rect">
-            <a:avLst/>
-          </a:prstGeom>
-        </p:spPr>
-      </p:pic>
-      <p:sp>
-        <p:nvSpPr>
-          <p:cNvPr id="53" name="Text 45"/>
-          <p:cNvSpPr txBox="1"/>
-          <p:nvPr/>
-        </p:nvSpPr>
-        <p:spPr>
-          <a:xfrm>
-            <a:off x="6903720" y="3337560"/>
-            <a:ext cx="4663440" cy="411480"/>
+              <a:t>Why this helps drive and EMS adoption</a:t>
+            </a:r>
+            <a:endParaRPr lang="en-US" sz="1500" dirty="0"/>
+          </a:p>
+          <a:p>
+            <a:pPr indent="0" marL="0">
+              <a:buNone/>
+            </a:pPr>
+            <a:r>
+              <a:rPr lang="en-US" sz="1300" dirty="0">
+                <a:solidFill>
+                  <a:srgbClr val="16261F"/>
+                </a:solidFill>
+                <a:latin typeface="Calibri" pitchFamily="34" charset="0"/>
+                <a:ea typeface="Calibri" pitchFamily="34" charset="-122"/>
+                <a:cs typeface="Calibri" pitchFamily="34" charset="-120"/>
+              </a:rPr>
+              <a:t>MSMEs that skip audits today get a ₹ case they understand, a pump-specific verdict before capex, and proof after.</a:t>
+            </a:r>
+            <a:endParaRPr lang="en-US" sz="1500" dirty="0"/>
+          </a:p>
+        </p:txBody>
+      </p:sp>
+      <p:sp>
+        <p:nvSpPr>
+          <p:cNvPr id="45" name="Shape 40"/>
+          <p:cNvSpPr/>
+          <p:nvPr/>
+        </p:nvSpPr>
+        <p:spPr>
+          <a:xfrm>
+            <a:off x="7498080" y="5029200"/>
+            <a:ext cx="4160520" cy="1280160"/>
+          </a:xfrm>
+          <a:prstGeom prst="roundRect">
+            <a:avLst>
+              <a:gd name="adj" fmla="val 5714"/>
+            </a:avLst>
+          </a:prstGeom>
+          <a:solidFill>
+            <a:srgbClr val="FFFFFF"/>
+          </a:solidFill>
+          <a:ln w="12700">
+            <a:solidFill>
+              <a:srgbClr val="D3DFD7"/>
+            </a:solidFill>
+            <a:prstDash val="solid"/>
+          </a:ln>
+        </p:spPr>
+      </p:sp>
+      <p:sp>
+        <p:nvSpPr>
+          <p:cNvPr id="46" name="Text 41"/>
+          <p:cNvSpPr txBox="1"/>
+          <p:nvPr/>
+        </p:nvSpPr>
+        <p:spPr>
+          <a:xfrm>
+            <a:off x="7635240" y="5074920"/>
+            <a:ext cx="3931920" cy="1188720"/>
           </a:xfrm>
           <a:prstGeom prst="rect">
             <a:avLst/>
@@ -6937,7 +6814,24 @@
               <a:buNone/>
             </a:pPr>
             <a:r>
-              <a:rPr lang="en-US" sz="1500" dirty="0">
+              <a:rPr lang="en-US" sz="1500" b="1" dirty="0">
+                <a:solidFill>
+                  <a:srgbClr val="0E5A32"/>
+                </a:solidFill>
+                <a:latin typeface="Calibri" pitchFamily="34" charset="0"/>
+                <a:ea typeface="Calibri" pitchFamily="34" charset="-122"/>
+                <a:cs typeface="Calibri" pitchFamily="34" charset="-120"/>
+              </a:rPr>
+              <a:t>Smart Manufacturing fit</a:t>
+            </a:r>
+            <a:endParaRPr lang="en-US" sz="1500" dirty="0"/>
+          </a:p>
+          <a:p>
+            <a:pPr indent="0" marL="0">
+              <a:buNone/>
+            </a:pPr>
+            <a:r>
+              <a:rPr lang="en-US" sz="1300" dirty="0">
                 <a:solidFill>
                   <a:srgbClr val="16261F"/>
                 </a:solidFill>
@@ -6945,300 +6839,26 @@
                 <a:ea typeface="Calibri" pitchFamily="34" charset="-122"/>
                 <a:cs typeface="Calibri" pitchFamily="34" charset="-120"/>
               </a:rPr>
-              <a:t>Non-invasive power clamp</a:t>
+              <a:t>Energy efficiency · productivity · digitalisation · sustainability</a:t>
             </a:r>
             <a:endParaRPr lang="en-US" sz="1500" dirty="0"/>
           </a:p>
-        </p:txBody>
-      </p:sp>
-      <p:pic>
-        <p:nvPicPr>
-          <p:cNvPr id="54" name="Image 6" descr="preencoded.png">    </p:cNvPr>
-          <p:cNvPicPr>
-            <a:picLocks noChangeAspect="1"/>
-          </p:cNvPicPr>
-          <p:nvPr/>
-        </p:nvPicPr>
-        <p:blipFill>
-          <a:blip r:embed="rId7"/>
-          <a:stretch>
-            <a:fillRect/>
-          </a:stretch>
-        </p:blipFill>
-        <p:spPr>
-          <a:xfrm>
-            <a:off x="6446520" y="3886200"/>
-            <a:ext cx="310896" cy="310896"/>
-          </a:xfrm>
-          <a:prstGeom prst="rect">
-            <a:avLst/>
-          </a:prstGeom>
-        </p:spPr>
-      </p:pic>
-      <p:sp>
-        <p:nvSpPr>
-          <p:cNvPr id="55" name="Text 46"/>
-          <p:cNvSpPr txBox="1"/>
-          <p:nvPr/>
-        </p:nvSpPr>
-        <p:spPr>
-          <a:xfrm>
-            <a:off x="6903720" y="3886200"/>
-            <a:ext cx="4663440" cy="411480"/>
-          </a:xfrm>
-          <a:prstGeom prst="rect">
-            <a:avLst/>
-          </a:prstGeom>
-          <a:noFill/>
-          <a:ln/>
-        </p:spPr>
-        <p:txBody>
-          <a:bodyPr wrap="square" lIns="0" tIns="0" rIns="0" bIns="0" rtlCol="0" anchor="ctr"/>
-          <a:lstStyle/>
           <a:p>
             <a:pPr indent="0" marL="0">
               <a:buNone/>
             </a:pPr>
             <a:r>
-              <a:rPr lang="en-US" sz="1500" dirty="0">
-                <a:solidFill>
-                  <a:srgbClr val="16261F"/>
-                </a:solidFill>
-                <a:latin typeface="Calibri" pitchFamily="34" charset="0"/>
-                <a:ea typeface="Calibri" pitchFamily="34" charset="-122"/>
-                <a:cs typeface="Calibri" pitchFamily="34" charset="-120"/>
-              </a:rPr>
-              <a:t>Pressure sensors on existing gauge ports</a:t>
+              <a:rPr lang="en-US" sz="1100" i="1" dirty="0">
+                <a:solidFill>
+                  <a:srgbClr val="55655D"/>
+                </a:solidFill>
+                <a:latin typeface="Calibri" pitchFamily="34" charset="0"/>
+                <a:ea typeface="Calibri" pitchFamily="34" charset="-122"/>
+                <a:cs typeface="Calibri" pitchFamily="34" charset="-120"/>
+              </a:rPr>
+              <a:t>Concept only: no drive or platform integration built.</a:t>
             </a:r>
             <a:endParaRPr lang="en-US" sz="1500" dirty="0"/>
-          </a:p>
-        </p:txBody>
-      </p:sp>
-      <p:pic>
-        <p:nvPicPr>
-          <p:cNvPr id="56" name="Image 7" descr="preencoded.png">    </p:cNvPr>
-          <p:cNvPicPr>
-            <a:picLocks noChangeAspect="1"/>
-          </p:cNvPicPr>
-          <p:nvPr/>
-        </p:nvPicPr>
-        <p:blipFill>
-          <a:blip r:embed="rId8"/>
-          <a:stretch>
-            <a:fillRect/>
-          </a:stretch>
-        </p:blipFill>
-        <p:spPr>
-          <a:xfrm>
-            <a:off x="6446520" y="4389120"/>
-            <a:ext cx="310896" cy="310896"/>
-          </a:xfrm>
-          <a:prstGeom prst="rect">
-            <a:avLst/>
-          </a:prstGeom>
-        </p:spPr>
-      </p:pic>
-      <p:sp>
-        <p:nvSpPr>
-          <p:cNvPr id="57" name="Text 47"/>
-          <p:cNvSpPr txBox="1"/>
-          <p:nvPr/>
-        </p:nvSpPr>
-        <p:spPr>
-          <a:xfrm>
-            <a:off x="6903720" y="4434840"/>
-            <a:ext cx="4663440" cy="411480"/>
-          </a:xfrm>
-          <a:prstGeom prst="rect">
-            <a:avLst/>
-          </a:prstGeom>
-          <a:noFill/>
-          <a:ln/>
-        </p:spPr>
-        <p:txBody>
-          <a:bodyPr wrap="square" lIns="0" tIns="0" rIns="0" bIns="0" rtlCol="0" anchor="ctr"/>
-          <a:lstStyle/>
-          <a:p>
-            <a:pPr indent="0" marL="0">
-              <a:buNone/>
-            </a:pPr>
-            <a:r>
-              <a:rPr lang="en-US" sz="1500" dirty="0">
-                <a:solidFill>
-                  <a:srgbClr val="16261F"/>
-                </a:solidFill>
-                <a:latin typeface="Calibri" pitchFamily="34" charset="0"/>
-                <a:ea typeface="Calibri" pitchFamily="34" charset="-122"/>
-                <a:cs typeface="Calibri" pitchFamily="34" charset="-120"/>
-              </a:rPr>
-              <a:t>Rated enclosure; installed by a plant electrician</a:t>
-            </a:r>
-            <a:endParaRPr lang="en-US" sz="1500" dirty="0"/>
-          </a:p>
-        </p:txBody>
-      </p:sp>
-      <p:pic>
-        <p:nvPicPr>
-          <p:cNvPr id="58" name="Image 8" descr="preencoded.png">    </p:cNvPr>
-          <p:cNvPicPr>
-            <a:picLocks noChangeAspect="1"/>
-          </p:cNvPicPr>
-          <p:nvPr/>
-        </p:nvPicPr>
-        <p:blipFill>
-          <a:blip r:embed="rId9"/>
-          <a:stretch>
-            <a:fillRect/>
-          </a:stretch>
-        </p:blipFill>
-        <p:spPr>
-          <a:xfrm>
-            <a:off x="6446520" y="4892040"/>
-            <a:ext cx="310896" cy="310896"/>
-          </a:xfrm>
-          <a:prstGeom prst="rect">
-            <a:avLst/>
-          </a:prstGeom>
-        </p:spPr>
-      </p:pic>
-      <p:sp>
-        <p:nvSpPr>
-          <p:cNvPr id="59" name="Text 48"/>
-          <p:cNvSpPr txBox="1"/>
-          <p:nvPr/>
-        </p:nvSpPr>
-        <p:spPr>
-          <a:xfrm>
-            <a:off x="6903720" y="4983480"/>
-            <a:ext cx="4663440" cy="411480"/>
-          </a:xfrm>
-          <a:prstGeom prst="rect">
-            <a:avLst/>
-          </a:prstGeom>
-          <a:noFill/>
-          <a:ln/>
-        </p:spPr>
-        <p:txBody>
-          <a:bodyPr wrap="square" lIns="0" tIns="0" rIns="0" bIns="0" rtlCol="0" anchor="ctr"/>
-          <a:lstStyle/>
-          <a:p>
-            <a:pPr indent="0" marL="0">
-              <a:buNone/>
-            </a:pPr>
-            <a:r>
-              <a:rPr lang="en-US" sz="1500" dirty="0">
-                <a:solidFill>
-                  <a:srgbClr val="16261F"/>
-                </a:solidFill>
-                <a:latin typeface="Calibri" pitchFamily="34" charset="0"/>
-                <a:ea typeface="Calibri" pitchFamily="34" charset="-122"/>
-                <a:cs typeface="Calibri" pitchFamily="34" charset="-120"/>
-              </a:rPr>
-              <a:t>Kit only recommends, never controls the pump</a:t>
-            </a:r>
-            <a:endParaRPr lang="en-US" sz="1500" dirty="0"/>
-          </a:p>
-        </p:txBody>
-      </p:sp>
-      <p:pic>
-        <p:nvPicPr>
-          <p:cNvPr id="60" name="Image 9" descr="preencoded.png">    </p:cNvPr>
-          <p:cNvPicPr>
-            <a:picLocks noChangeAspect="1"/>
-          </p:cNvPicPr>
-          <p:nvPr/>
-        </p:nvPicPr>
-        <p:blipFill>
-          <a:blip r:embed="rId10"/>
-          <a:stretch>
-            <a:fillRect/>
-          </a:stretch>
-        </p:blipFill>
-        <p:spPr>
-          <a:xfrm>
-            <a:off x="6446520" y="5394960"/>
-            <a:ext cx="310896" cy="310896"/>
-          </a:xfrm>
-          <a:prstGeom prst="rect">
-            <a:avLst/>
-          </a:prstGeom>
-        </p:spPr>
-      </p:pic>
-      <p:sp>
-        <p:nvSpPr>
-          <p:cNvPr id="61" name="Text 49"/>
-          <p:cNvSpPr txBox="1"/>
-          <p:nvPr/>
-        </p:nvSpPr>
-        <p:spPr>
-          <a:xfrm>
-            <a:off x="6903720" y="5532120"/>
-            <a:ext cx="4663440" cy="411480"/>
-          </a:xfrm>
-          <a:prstGeom prst="rect">
-            <a:avLst/>
-          </a:prstGeom>
-          <a:noFill/>
-          <a:ln/>
-        </p:spPr>
-        <p:txBody>
-          <a:bodyPr wrap="square" lIns="0" tIns="0" rIns="0" bIns="0" rtlCol="0" anchor="ctr"/>
-          <a:lstStyle/>
-          <a:p>
-            <a:pPr indent="0" marL="0">
-              <a:buNone/>
-            </a:pPr>
-            <a:r>
-              <a:rPr lang="en-US" sz="1500" dirty="0">
-                <a:solidFill>
-                  <a:srgbClr val="16261F"/>
-                </a:solidFill>
-                <a:latin typeface="Calibri" pitchFamily="34" charset="0"/>
-                <a:ea typeface="Calibri" pitchFamily="34" charset="-122"/>
-                <a:cs typeface="Calibri" pitchFamily="34" charset="-120"/>
-              </a:rPr>
-              <a:t>Owner keeps the data</a:t>
-            </a:r>
-            <a:endParaRPr lang="en-US" sz="1500" dirty="0"/>
-          </a:p>
-        </p:txBody>
-      </p:sp>
-      <p:sp>
-        <p:nvSpPr>
-          <p:cNvPr id="62" name="Text 50"/>
-          <p:cNvSpPr txBox="1"/>
-          <p:nvPr/>
-        </p:nvSpPr>
-        <p:spPr>
-          <a:xfrm>
-            <a:off x="6400800" y="5852160"/>
-            <a:ext cx="5120640" cy="365760"/>
-          </a:xfrm>
-          <a:prstGeom prst="rect">
-            <a:avLst/>
-          </a:prstGeom>
-          <a:noFill/>
-          <a:ln/>
-        </p:spPr>
-        <p:txBody>
-          <a:bodyPr wrap="square" lIns="0" tIns="0" rIns="0" bIns="0" rtlCol="0" anchor="t"/>
-          <a:lstStyle/>
-          <a:p>
-            <a:pPr indent="0" marL="0">
-              <a:buNone/>
-            </a:pPr>
-            <a:r>
-              <a:rPr lang="en-US" sz="1100" i="1" dirty="0">
-                <a:solidFill>
-                  <a:srgbClr val="55655D"/>
-                </a:solidFill>
-                <a:latin typeface="Calibri" pitchFamily="34" charset="0"/>
-                <a:ea typeface="Calibri" pitchFamily="34" charset="-122"/>
-                <a:cs typeface="Calibri" pitchFamily="34" charset="-120"/>
-              </a:rPr>
-              <a:t>Closed-valve power / shut-off head anchors are optional, brief, and within the pump maker's limits.</a:t>
-            </a:r>
-            <a:endParaRPr lang="en-US" sz="1100" dirty="0"/>
           </a:p>
         </p:txBody>
       </p:sp>
@@ -7757,7 +7377,7 @@
         </p:nvSpPr>
         <p:spPr>
           <a:xfrm>
-            <a:off x="731520" y="3429000"/>
+            <a:off x="731520" y="3474720"/>
             <a:ext cx="2743200" cy="274320"/>
           </a:xfrm>
           <a:prstGeom prst="rect">
@@ -7796,12 +7416,12 @@
         </p:nvSpPr>
         <p:spPr>
           <a:xfrm>
-            <a:off x="731520" y="3749040"/>
-            <a:ext cx="3383280" cy="329184"/>
+            <a:off x="731520" y="3794760"/>
+            <a:ext cx="3566160" cy="347472"/>
           </a:xfrm>
           <a:prstGeom prst="roundRect">
             <a:avLst>
-              <a:gd name="adj" fmla="val 16667"/>
+              <a:gd name="adj" fmla="val 15789"/>
             </a:avLst>
           </a:prstGeom>
           <a:solidFill>
@@ -7823,8 +7443,8 @@
         </p:nvSpPr>
         <p:spPr>
           <a:xfrm>
-            <a:off x="822960" y="3749040"/>
-            <a:ext cx="3200400" cy="329184"/>
+            <a:off x="822960" y="3794760"/>
+            <a:ext cx="3383280" cy="347472"/>
           </a:xfrm>
           <a:prstGeom prst="rect">
             <a:avLst/>
@@ -7862,12 +7482,12 @@
         </p:nvSpPr>
         <p:spPr>
           <a:xfrm>
-            <a:off x="960120" y="4133088"/>
-            <a:ext cx="3383280" cy="329184"/>
+            <a:off x="960120" y="4206240"/>
+            <a:ext cx="3566160" cy="347472"/>
           </a:xfrm>
           <a:prstGeom prst="roundRect">
             <a:avLst>
-              <a:gd name="adj" fmla="val 16667"/>
+              <a:gd name="adj" fmla="val 15789"/>
             </a:avLst>
           </a:prstGeom>
           <a:solidFill>
@@ -7889,8 +7509,8 @@
         </p:nvSpPr>
         <p:spPr>
           <a:xfrm>
-            <a:off x="1051560" y="4133088"/>
-            <a:ext cx="3200400" cy="329184"/>
+            <a:off x="1051560" y="4206240"/>
+            <a:ext cx="3383280" cy="347472"/>
           </a:xfrm>
           <a:prstGeom prst="rect">
             <a:avLst/>
@@ -7928,12 +7548,12 @@
         </p:nvSpPr>
         <p:spPr>
           <a:xfrm>
-            <a:off x="1188720" y="4517136"/>
-            <a:ext cx="3383280" cy="329184"/>
+            <a:off x="1188720" y="4617720"/>
+            <a:ext cx="3566160" cy="347472"/>
           </a:xfrm>
           <a:prstGeom prst="roundRect">
             <a:avLst>
-              <a:gd name="adj" fmla="val 16667"/>
+              <a:gd name="adj" fmla="val 15789"/>
             </a:avLst>
           </a:prstGeom>
           <a:solidFill>
@@ -7955,8 +7575,8 @@
         </p:nvSpPr>
         <p:spPr>
           <a:xfrm>
-            <a:off x="1280160" y="4517136"/>
-            <a:ext cx="3200400" cy="329184"/>
+            <a:off x="1280160" y="4617720"/>
+            <a:ext cx="3383280" cy="347472"/>
           </a:xfrm>
           <a:prstGeom prst="rect">
             <a:avLst/>
@@ -7994,12 +7614,12 @@
         </p:nvSpPr>
         <p:spPr>
           <a:xfrm>
-            <a:off x="1417320" y="4901184"/>
-            <a:ext cx="3383280" cy="329184"/>
+            <a:off x="1417320" y="5029200"/>
+            <a:ext cx="3566160" cy="347472"/>
           </a:xfrm>
           <a:prstGeom prst="roundRect">
             <a:avLst>
-              <a:gd name="adj" fmla="val 16667"/>
+              <a:gd name="adj" fmla="val 15789"/>
             </a:avLst>
           </a:prstGeom>
           <a:solidFill>
@@ -8021,8 +7641,8 @@
         </p:nvSpPr>
         <p:spPr>
           <a:xfrm>
-            <a:off x="1508760" y="4901184"/>
-            <a:ext cx="3200400" cy="329184"/>
+            <a:off x="1508760" y="5029200"/>
+            <a:ext cx="3383280" cy="347472"/>
           </a:xfrm>
           <a:prstGeom prst="rect">
             <a:avLst/>
@@ -8060,8 +7680,8 @@
         </p:nvSpPr>
         <p:spPr>
           <a:xfrm>
-            <a:off x="731520" y="5349240"/>
-            <a:ext cx="5303520" cy="914400"/>
+            <a:off x="731520" y="5532120"/>
+            <a:ext cx="5303520" cy="731520"/>
           </a:xfrm>
           <a:prstGeom prst="rect">
             <a:avLst/>
@@ -8077,29 +7697,15 @@
               <a:buNone/>
             </a:pPr>
             <a:r>
-              <a:rPr lang="en-US" sz="1200" b="1" dirty="0">
-                <a:solidFill>
-                  <a:srgbClr val="0E5A32"/>
-                </a:solidFill>
-                <a:latin typeface="Calibri" pitchFamily="34" charset="0"/>
-                <a:ea typeface="Calibri" pitchFamily="34" charset="-122"/>
-                <a:cs typeface="Calibri" pitchFamily="34" charset="-120"/>
-              </a:rPr>
-              <a:t>Applications: </a:t>
-            </a:r>
-            <a:pPr indent="0" marL="0">
-              <a:buNone/>
-            </a:pPr>
-            <a:r>
               <a:rPr lang="en-US" sz="1200" dirty="0">
                 <a:solidFill>
-                  <a:srgbClr val="16261F"/>
-                </a:solidFill>
-                <a:latin typeface="Calibri" pitchFamily="34" charset="0"/>
-                <a:ea typeface="Calibri" pitchFamily="34" charset="-122"/>
-                <a:cs typeface="Calibri" pitchFamily="34" charset="-120"/>
-              </a:rPr>
-              <a:t>MSME factories, water utilities, textile/dyeing, food processing, commercial HVAC chilled-water pumps. Agricultural pumping: future scope only.</a:t>
+                  <a:srgbClr val="55655D"/>
+                </a:solidFill>
+                <a:latin typeface="Calibri" pitchFamily="34" charset="0"/>
+                <a:ea typeface="Calibri" pitchFamily="34" charset="-122"/>
+                <a:cs typeface="Calibri" pitchFamily="34" charset="-120"/>
+              </a:rPr>
+              <a:t>For: MSME factories, water utilities, textile, food processing, HVAC chilled water.</a:t>
             </a:r>
             <a:endParaRPr lang="en-US" sz="1200" dirty="0"/>
           </a:p>
@@ -8284,7 +7890,7 @@
         </p:nvSpPr>
         <p:spPr>
           <a:xfrm>
-            <a:off x="6446520" y="2240280"/>
+            <a:off x="6446520" y="2212848"/>
             <a:ext cx="3977640" cy="384048"/>
           </a:xfrm>
           <a:prstGeom prst="rect">
@@ -8323,7 +7929,7 @@
         </p:nvSpPr>
         <p:spPr>
           <a:xfrm>
-            <a:off x="10515600" y="2276856"/>
+            <a:off x="10515600" y="2249424"/>
             <a:ext cx="1005840" cy="310896"/>
           </a:xfrm>
           <a:prstGeom prst="roundRect">
@@ -8350,7 +7956,7 @@
         </p:nvSpPr>
         <p:spPr>
           <a:xfrm>
-            <a:off x="10515600" y="2276856"/>
+            <a:off x="10515600" y="2249424"/>
             <a:ext cx="1005840" cy="310896"/>
           </a:xfrm>
           <a:prstGeom prst="rect">
@@ -8389,7 +7995,7 @@
         </p:nvSpPr>
         <p:spPr>
           <a:xfrm>
-            <a:off x="6446520" y="2697480"/>
+            <a:off x="6446520" y="2642616"/>
             <a:ext cx="3977640" cy="384048"/>
           </a:xfrm>
           <a:prstGeom prst="rect">
@@ -8428,7 +8034,7 @@
         </p:nvSpPr>
         <p:spPr>
           <a:xfrm>
-            <a:off x="10515600" y="2734056"/>
+            <a:off x="10515600" y="2679192"/>
             <a:ext cx="1005840" cy="310896"/>
           </a:xfrm>
           <a:prstGeom prst="roundRect">
@@ -8455,7 +8061,7 @@
         </p:nvSpPr>
         <p:spPr>
           <a:xfrm>
-            <a:off x="10515600" y="2734056"/>
+            <a:off x="10515600" y="2679192"/>
             <a:ext cx="1005840" cy="310896"/>
           </a:xfrm>
           <a:prstGeom prst="rect">
@@ -8494,7 +8100,7 @@
         </p:nvSpPr>
         <p:spPr>
           <a:xfrm>
-            <a:off x="6446520" y="3154680"/>
+            <a:off x="6446520" y="3072384"/>
             <a:ext cx="3977640" cy="384048"/>
           </a:xfrm>
           <a:prstGeom prst="rect">
@@ -8533,7 +8139,7 @@
         </p:nvSpPr>
         <p:spPr>
           <a:xfrm>
-            <a:off x="10515600" y="3191256"/>
+            <a:off x="10515600" y="3108960"/>
             <a:ext cx="1005840" cy="310896"/>
           </a:xfrm>
           <a:prstGeom prst="roundRect">
@@ -8560,7 +8166,7 @@
         </p:nvSpPr>
         <p:spPr>
           <a:xfrm>
-            <a:off x="10515600" y="3191256"/>
+            <a:off x="10515600" y="3108960"/>
             <a:ext cx="1005840" cy="310896"/>
           </a:xfrm>
           <a:prstGeom prst="rect">
@@ -8599,7 +8205,7 @@
         </p:nvSpPr>
         <p:spPr>
           <a:xfrm>
-            <a:off x="6446520" y="3611880"/>
+            <a:off x="6446520" y="3502152"/>
             <a:ext cx="3977640" cy="384048"/>
           </a:xfrm>
           <a:prstGeom prst="rect">
@@ -8638,7 +8244,7 @@
         </p:nvSpPr>
         <p:spPr>
           <a:xfrm>
-            <a:off x="10515600" y="3648456"/>
+            <a:off x="10515600" y="3538728"/>
             <a:ext cx="1005840" cy="310896"/>
           </a:xfrm>
           <a:prstGeom prst="roundRect">
@@ -8665,7 +8271,7 @@
         </p:nvSpPr>
         <p:spPr>
           <a:xfrm>
-            <a:off x="10515600" y="3648456"/>
+            <a:off x="10515600" y="3538728"/>
             <a:ext cx="1005840" cy="310896"/>
           </a:xfrm>
           <a:prstGeom prst="rect">
@@ -8698,63 +8304,24 @@
       </p:sp>
       <p:sp>
         <p:nvSpPr>
-          <p:cNvPr id="40" name="Text 38"/>
-          <p:cNvSpPr txBox="1"/>
-          <p:nvPr/>
-        </p:nvSpPr>
-        <p:spPr>
-          <a:xfrm>
-            <a:off x="6446520" y="4160520"/>
-            <a:ext cx="2743200" cy="274320"/>
-          </a:xfrm>
-          <a:prstGeom prst="rect">
-            <a:avLst/>
-          </a:prstGeom>
-          <a:noFill/>
-          <a:ln/>
-        </p:spPr>
-        <p:txBody>
-          <a:bodyPr wrap="square" lIns="0" tIns="0" rIns="0" bIns="0" rtlCol="0" anchor="t"/>
-          <a:lstStyle/>
-          <a:p>
-            <a:pPr indent="0" marL="0">
-              <a:buNone/>
-            </a:pPr>
-            <a:r>
-              <a:rPr lang="en-US" sz="1500" b="1" dirty="0">
-                <a:solidFill>
-                  <a:srgbClr val="0E5A32"/>
-                </a:solidFill>
-                <a:latin typeface="Calibri" pitchFamily="34" charset="0"/>
-                <a:ea typeface="Calibri" pitchFamily="34" charset="-122"/>
-                <a:cs typeface="Calibri" pitchFamily="34" charset="-120"/>
-              </a:rPr>
-              <a:t>Validation status</a:t>
-            </a:r>
-            <a:endParaRPr lang="en-US" sz="1500" dirty="0"/>
-          </a:p>
-        </p:txBody>
-      </p:sp>
-      <p:sp>
-        <p:nvSpPr>
-          <p:cNvPr id="41" name="Shape 39"/>
+          <p:cNvPr id="40" name="Shape 38"/>
           <p:cNvSpPr/>
           <p:nvPr/>
         </p:nvSpPr>
         <p:spPr>
           <a:xfrm>
-            <a:off x="6446520" y="4480560"/>
-            <a:ext cx="2514600" cy="1783080"/>
+            <a:off x="6446520" y="4023360"/>
+            <a:ext cx="5074920" cy="2194560"/>
           </a:xfrm>
           <a:prstGeom prst="roundRect">
             <a:avLst>
-              <a:gd name="adj" fmla="val 4103"/>
+              <a:gd name="adj" fmla="val 3333"/>
             </a:avLst>
           </a:prstGeom>
           <a:solidFill>
             <a:srgbClr val="FFF4E5"/>
           </a:solidFill>
-          <a:ln w="19050">
+          <a:ln w="25400">
             <a:solidFill>
               <a:srgbClr val="E07B00"/>
             </a:solidFill>
@@ -8764,14 +8331,53 @@
       </p:sp>
       <p:sp>
         <p:nvSpPr>
+          <p:cNvPr id="41" name="Text 39"/>
+          <p:cNvSpPr txBox="1"/>
+          <p:nvPr/>
+        </p:nvSpPr>
+        <p:spPr>
+          <a:xfrm>
+            <a:off x="6583680" y="4069080"/>
+            <a:ext cx="4846320" cy="274320"/>
+          </a:xfrm>
+          <a:prstGeom prst="rect">
+            <a:avLst/>
+          </a:prstGeom>
+          <a:noFill/>
+          <a:ln/>
+        </p:spPr>
+        <p:txBody>
+          <a:bodyPr wrap="square" lIns="0" tIns="0" rIns="0" bIns="0" rtlCol="0" anchor="t"/>
+          <a:lstStyle/>
+          <a:p>
+            <a:pPr indent="0" marL="0">
+              <a:buNone/>
+            </a:pPr>
+            <a:r>
+              <a:rPr lang="en-US" sz="1400" b="1" dirty="0">
+                <a:solidFill>
+                  <a:srgbClr val="E07B00"/>
+                </a:solidFill>
+                <a:latin typeface="Calibri" pitchFamily="34" charset="0"/>
+                <a:ea typeface="Calibri" pitchFamily="34" charset="-122"/>
+                <a:cs typeface="Calibri" pitchFamily="34" charset="-120"/>
+              </a:rPr>
+              <a:t>Honest limits. Actually tested: nothing yet.</a:t>
+            </a:r>
+            <a:endParaRPr lang="en-US" sz="1400" dirty="0"/>
+          </a:p>
+        </p:txBody>
+      </p:sp>
+      <p:sp>
+        <p:nvSpPr>
           <p:cNvPr id="42" name="Text 40"/>
           <p:cNvSpPr txBox="1"/>
           <p:nvPr/>
         </p:nvSpPr>
         <p:spPr>
           <a:xfrm>
-            <a:off x="6537960" y="4526280"/>
-            <a:ext cx="2331720" cy="1691640"/>
+            <a:off x="6583680" y="4389120"/>
+            <a:ext cx="4846320" cy="1783080"/>
           </a:xfrm>
           <a:prstGeom prst="rect">
             <a:avLst/>
@@ -8783,25 +8389,12 @@
           <a:bodyPr wrap="square" lIns="0" tIns="0" rIns="0" bIns="0" rtlCol="0" anchor="t"/>
           <a:lstStyle/>
           <a:p>
-            <a:pPr indent="0" marL="0">
-              <a:buNone/>
-            </a:pPr>
-            <a:r>
-              <a:rPr lang="en-US" sz="1100" b="1" dirty="0">
-                <a:solidFill>
-                  <a:srgbClr val="E07B00"/>
-                </a:solidFill>
-                <a:latin typeface="Calibri" pitchFamily="34" charset="0"/>
-                <a:ea typeface="Calibri" pitchFamily="34" charset="-122"/>
-                <a:cs typeface="Calibri" pitchFamily="34" charset="-120"/>
-              </a:rPr>
-              <a:t>SIMULATED / DESIGNED</a:t>
-            </a:r>
-            <a:endParaRPr lang="en-US" sz="1100" dirty="0"/>
-          </a:p>
-          <a:p>
-            <a:pPr indent="0" marL="0">
-              <a:buNone/>
+            <a:pPr marL="342900" indent="-342900">
+              <a:spcAft>
+                <a:spcPts val="400"/>
+              </a:spcAft>
+              <a:buSzPct val="100000"/>
+              <a:buChar char="•"/>
             </a:pPr>
             <a:r>
               <a:rPr lang="en-US" sz="1200" dirty="0">
@@ -8812,82 +8405,20 @@
                 <a:ea typeface="Calibri" pitchFamily="34" charset="-122"/>
                 <a:cs typeface="Calibri" pitchFamily="34" charset="-120"/>
               </a:rPr>
-              <a:t>Savings, waste split, calibration, drift detection, cost estimates</a:t>
-            </a:r>
-            <a:endParaRPr lang="en-US" sz="1100" dirty="0"/>
-          </a:p>
-        </p:txBody>
-      </p:sp>
-      <p:sp>
-        <p:nvSpPr>
-          <p:cNvPr id="43" name="Shape 41"/>
-          <p:cNvSpPr/>
-          <p:nvPr/>
-        </p:nvSpPr>
-        <p:spPr>
-          <a:xfrm>
-            <a:off x="9098280" y="4480560"/>
-            <a:ext cx="2423160" cy="1783080"/>
-          </a:xfrm>
-          <a:prstGeom prst="roundRect">
-            <a:avLst>
-              <a:gd name="adj" fmla="val 4103"/>
-            </a:avLst>
-          </a:prstGeom>
-          <a:solidFill>
-            <a:srgbClr val="EEF4F0"/>
-          </a:solidFill>
-          <a:ln w="19050">
-            <a:solidFill>
-              <a:srgbClr val="9AA5A0"/>
-            </a:solidFill>
-            <a:prstDash val="solid"/>
-          </a:ln>
-        </p:spPr>
-      </p:sp>
-      <p:sp>
-        <p:nvSpPr>
-          <p:cNvPr id="44" name="Text 42"/>
-          <p:cNvSpPr txBox="1"/>
-          <p:nvPr/>
-        </p:nvSpPr>
-        <p:spPr>
-          <a:xfrm>
-            <a:off x="9189720" y="4526280"/>
-            <a:ext cx="2240280" cy="1691640"/>
-          </a:xfrm>
-          <a:prstGeom prst="rect">
-            <a:avLst/>
-          </a:prstGeom>
-          <a:noFill/>
-          <a:ln/>
-        </p:spPr>
-        <p:txBody>
-          <a:bodyPr wrap="square" lIns="0" tIns="0" rIns="0" bIns="0" rtlCol="0" anchor="t"/>
-          <a:lstStyle/>
-          <a:p>
-            <a:pPr indent="0" marL="0">
-              <a:buNone/>
-            </a:pPr>
-            <a:r>
-              <a:rPr lang="en-US" sz="1100" b="1" dirty="0">
-                <a:solidFill>
-                  <a:srgbClr val="55655D"/>
-                </a:solidFill>
-                <a:latin typeface="Calibri" pitchFamily="34" charset="0"/>
-                <a:ea typeface="Calibri" pitchFamily="34" charset="-122"/>
-                <a:cs typeface="Calibri" pitchFamily="34" charset="-120"/>
-              </a:rPr>
-              <a:t>TO BE TESTED</a:t>
-            </a:r>
-            <a:endParaRPr lang="en-US" sz="1100" dirty="0"/>
-          </a:p>
-          <a:p>
-            <a:pPr indent="0" marL="0">
-              <a:buNone/>
-            </a:pPr>
-            <a:r>
-              <a:rPr lang="en-US" sz="1100" dirty="0">
+              <a:t>Simulation only: no lab/field data, no real quotes</a:t>
+            </a:r>
+            <a:endParaRPr lang="en-US" sz="1200" dirty="0"/>
+          </a:p>
+          <a:p>
+            <a:pPr marL="342900" indent="-342900">
+              <a:spcAft>
+                <a:spcPts val="400"/>
+              </a:spcAft>
+              <a:buSzPct val="100000"/>
+              <a:buChar char="•"/>
+            </a:pPr>
+            <a:r>
+              <a:rPr lang="en-US" sz="1200" dirty="0">
                 <a:solidFill>
                   <a:srgbClr val="16261F"/>
                 </a:solidFill>
@@ -8895,9 +8426,51 @@
                 <a:ea typeface="Calibri" pitchFamily="34" charset="-122"/>
                 <a:cs typeface="Calibri" pitchFamily="34" charset="-120"/>
               </a:rPr>
-              <a:t>Flow inference vs a reference meter; throttled-valve and blocked-strainer cases; wear drift; pilots; before/after VFD saving</a:t>
-            </a:r>
-            <a:endParaRPr lang="en-US" sz="1100" dirty="0"/>
+              <a:t>System-curve fit is optimistic (same form as the simulated plant)</a:t>
+            </a:r>
+            <a:endParaRPr lang="en-US" sz="1200" dirty="0"/>
+          </a:p>
+          <a:p>
+            <a:pPr marL="342900" indent="-342900">
+              <a:spcAft>
+                <a:spcPts val="400"/>
+              </a:spcAft>
+              <a:buSzPct val="100000"/>
+              <a:buChar char="•"/>
+            </a:pPr>
+            <a:r>
+              <a:rPr lang="en-US" sz="1200" dirty="0">
+                <a:solidFill>
+                  <a:srgbClr val="16261F"/>
+                </a:solidFill>
+                <a:latin typeface="Calibri" pitchFamily="34" charset="0"/>
+                <a:ea typeface="Calibri" pitchFamily="34" charset="-122"/>
+                <a:cs typeface="Calibri" pitchFamily="34" charset="-120"/>
+              </a:rPr>
+              <a:t>Single pump, steady state; no parallel pumps, closed loops, drives, NPSH or control dynamics</a:t>
+            </a:r>
+            <a:endParaRPr lang="en-US" sz="1200" dirty="0"/>
+          </a:p>
+          <a:p>
+            <a:pPr marL="342900" indent="-342900">
+              <a:spcAft>
+                <a:spcPts val="400"/>
+              </a:spcAft>
+              <a:buSzPct val="100000"/>
+              <a:buChar char="•"/>
+            </a:pPr>
+            <a:r>
+              <a:rPr lang="en-US" sz="1200" dirty="0">
+                <a:solidFill>
+                  <a:srgbClr val="16261F"/>
+                </a:solidFill>
+                <a:latin typeface="Calibri" pitchFamily="34" charset="0"/>
+                <a:ea typeface="Calibri" pitchFamily="34" charset="-122"/>
+                <a:cs typeface="Calibri" pitchFamily="34" charset="-120"/>
+              </a:rPr>
+              <a:t>Valve share partly by construction; 54–60% is an upper bound</a:t>
+            </a:r>
+            <a:endParaRPr lang="en-US" sz="1200" dirty="0"/>
           </a:p>
         </p:txBody>
       </p:sp>
@@ -9007,7 +8580,7 @@
                 <a:ea typeface="Calibri" pitchFamily="34" charset="-122"/>
                 <a:cs typeface="Calibri" pitchFamily="34" charset="-120"/>
               </a:rPr>
-              <a:t>PumpRupee on One Page</a:t>
+              <a:t>Team ANS_4X</a:t>
             </a:r>
             <a:endParaRPr lang="en-US" sz="3000" dirty="0"/>
           </a:p>
@@ -9046,7 +8619,7 @@
                 <a:ea typeface="Calibri" pitchFamily="34" charset="-122"/>
                 <a:cs typeface="Calibri" pitchFamily="34" charset="-120"/>
               </a:rPr>
-              <a:t>Cheap kit. Clever inference. Answers in rupees. Honest about limits.</a:t>
+              <a:t>Schneider Electric Yuva Yodha 2026  |  Smart Manufacturing  |  [Institution]</a:t>
             </a:r>
             <a:endParaRPr lang="en-US" sz="1600" dirty="0"/>
           </a:p>
@@ -9060,12 +8633,12 @@
         </p:nvSpPr>
         <p:spPr>
           <a:xfrm>
-            <a:off x="548640" y="1371600"/>
-            <a:ext cx="2011680" cy="1554480"/>
+            <a:off x="548640" y="1417320"/>
+            <a:ext cx="2651760" cy="3566160"/>
           </a:xfrm>
           <a:prstGeom prst="roundRect">
             <a:avLst>
-              <a:gd name="adj" fmla="val 4706"/>
+              <a:gd name="adj" fmla="val 2759"/>
             </a:avLst>
           </a:prstGeom>
           <a:solidFill>
@@ -9087,18 +8660,18 @@
         </p:nvSpPr>
         <p:spPr>
           <a:xfrm>
-            <a:off x="1280160" y="1463040"/>
-            <a:ext cx="548640" cy="548640"/>
+            <a:off x="1234440" y="1600200"/>
+            <a:ext cx="1280160" cy="1280160"/>
           </a:xfrm>
           <a:prstGeom prst="ellipse">
             <a:avLst/>
           </a:prstGeom>
           <a:solidFill>
-            <a:srgbClr val="E07B00"/>
+            <a:srgbClr val="E3F6E8"/>
           </a:solidFill>
-          <a:ln w="12700">
-            <a:solidFill>
-              <a:srgbClr val="E07B00"/>
+          <a:ln w="25400">
+            <a:solidFill>
+              <a:srgbClr val="3DCD58"/>
             </a:solidFill>
             <a:prstDash val="solid"/>
           </a:ln>
@@ -9120,8 +8693,8 @@
         </p:blipFill>
         <p:spPr>
           <a:xfrm>
-            <a:off x="1411834" y="1594714"/>
-            <a:ext cx="285293" cy="285293"/>
+            <a:off x="1536192" y="1901952"/>
+            <a:ext cx="676656" cy="676656"/>
           </a:xfrm>
           <a:prstGeom prst="rect">
             <a:avLst/>
@@ -9136,8 +8709,8 @@
         </p:nvSpPr>
         <p:spPr>
           <a:xfrm>
-            <a:off x="640080" y="2103120"/>
-            <a:ext cx="1828800" cy="777240"/>
+            <a:off x="685800" y="3063240"/>
+            <a:ext cx="2377440" cy="1828800"/>
           </a:xfrm>
           <a:prstGeom prst="rect">
             <a:avLst/>
@@ -9150,10 +8723,13 @@
           <a:lstStyle/>
           <a:p>
             <a:pPr algn="ctr" indent="0" marL="0">
-              <a:buNone/>
-            </a:pPr>
-            <a:r>
-              <a:rPr lang="en-US" sz="1400" b="1" dirty="0">
+              <a:spcAft>
+                <a:spcPts val="400"/>
+              </a:spcAft>
+              <a:buNone/>
+            </a:pPr>
+            <a:r>
+              <a:rPr lang="en-US" sz="2000" b="1" dirty="0">
                 <a:solidFill>
                   <a:srgbClr val="16261F"/>
                 </a:solidFill>
@@ -9161,9 +8737,46 @@
                 <a:ea typeface="Calibri" pitchFamily="34" charset="-122"/>
                 <a:cs typeface="Calibri" pitchFamily="34" charset="-120"/>
               </a:rPr>
-              <a:t>Oversized pump, throttled valve</a:t>
-            </a:r>
-            <a:endParaRPr lang="en-US" sz="1400" dirty="0"/>
+              <a:t>[Name]</a:t>
+            </a:r>
+            <a:endParaRPr lang="en-US" sz="2000" dirty="0"/>
+          </a:p>
+          <a:p>
+            <a:pPr algn="ctr" indent="0" marL="0">
+              <a:spcAft>
+                <a:spcPts val="800"/>
+              </a:spcAft>
+              <a:buNone/>
+            </a:pPr>
+            <a:r>
+              <a:rPr lang="en-US" sz="1500" b="1" dirty="0">
+                <a:solidFill>
+                  <a:srgbClr val="0E5A32"/>
+                </a:solidFill>
+                <a:latin typeface="Calibri" pitchFamily="34" charset="0"/>
+                <a:ea typeface="Calibri" pitchFamily="34" charset="-122"/>
+                <a:cs typeface="Calibri" pitchFamily="34" charset="-120"/>
+              </a:rPr>
+              <a:t>[Role]</a:t>
+            </a:r>
+            <a:endParaRPr lang="en-US" sz="2000" dirty="0"/>
+          </a:p>
+          <a:p>
+            <a:pPr algn="ctr" indent="0" marL="0">
+              <a:buNone/>
+            </a:pPr>
+            <a:r>
+              <a:rPr lang="en-US" sz="1300" dirty="0">
+                <a:solidFill>
+                  <a:srgbClr val="55655D"/>
+                </a:solidFill>
+                <a:latin typeface="Calibri" pitchFamily="34" charset="0"/>
+                <a:ea typeface="Calibri" pitchFamily="34" charset="-122"/>
+                <a:cs typeface="Calibri" pitchFamily="34" charset="-120"/>
+              </a:rPr>
+              <a:t>[Skill: one line relevant to pumps, sensors, data or energy]</a:t>
+            </a:r>
+            <a:endParaRPr lang="en-US" sz="2000" dirty="0"/>
           </a:p>
         </p:txBody>
       </p:sp>
@@ -9175,37 +8788,12 @@
         </p:nvSpPr>
         <p:spPr>
           <a:xfrm>
-            <a:off x="2578608" y="2103120"/>
-            <a:ext cx="201168" cy="256032"/>
-          </a:xfrm>
-          <a:prstGeom prst="rightArrow">
-            <a:avLst/>
-          </a:prstGeom>
-          <a:solidFill>
-            <a:srgbClr val="3DCD58"/>
-          </a:solidFill>
-          <a:ln w="12700">
-            <a:solidFill>
-              <a:srgbClr val="3DCD58"/>
-            </a:solidFill>
-            <a:prstDash val="solid"/>
-          </a:ln>
-        </p:spPr>
-      </p:sp>
-      <p:sp>
-        <p:nvSpPr>
-          <p:cNvPr id="9" name="Shape 6"/>
-          <p:cNvSpPr/>
-          <p:nvPr/>
-        </p:nvSpPr>
-        <p:spPr>
-          <a:xfrm>
-            <a:off x="2798064" y="1371600"/>
-            <a:ext cx="2011680" cy="1554480"/>
+            <a:off x="3362249" y="1417320"/>
+            <a:ext cx="2651760" cy="3566160"/>
           </a:xfrm>
           <a:prstGeom prst="roundRect">
             <a:avLst>
-              <a:gd name="adj" fmla="val 4706"/>
+              <a:gd name="adj" fmla="val 2759"/>
             </a:avLst>
           </a:prstGeom>
           <a:solidFill>
@@ -9221,24 +8809,24 @@
       </p:sp>
       <p:sp>
         <p:nvSpPr>
-          <p:cNvPr id="10" name="Shape 7"/>
+          <p:cNvPr id="9" name="Shape 6"/>
           <p:cNvSpPr/>
           <p:nvPr/>
         </p:nvSpPr>
         <p:spPr>
           <a:xfrm>
-            <a:off x="3529584" y="1463040"/>
-            <a:ext cx="548640" cy="548640"/>
+            <a:off x="4048049" y="1600200"/>
+            <a:ext cx="1280160" cy="1280160"/>
           </a:xfrm>
           <a:prstGeom prst="ellipse">
             <a:avLst/>
           </a:prstGeom>
           <a:solidFill>
-            <a:srgbClr val="0E5A32"/>
+            <a:srgbClr val="E3F6E8"/>
           </a:solidFill>
-          <a:ln w="12700">
-            <a:solidFill>
-              <a:srgbClr val="0E5A32"/>
+          <a:ln w="25400">
+            <a:solidFill>
+              <a:srgbClr val="3DCD58"/>
             </a:solidFill>
             <a:prstDash val="solid"/>
           </a:ln>
@@ -9246,7 +8834,7 @@
       </p:sp>
       <p:pic>
         <p:nvPicPr>
-          <p:cNvPr id="11" name="Image 1" descr="preencoded.png">    </p:cNvPr>
+          <p:cNvPr id="10" name="Image 1" descr="preencoded.png">    </p:cNvPr>
           <p:cNvPicPr>
             <a:picLocks noChangeAspect="1"/>
           </p:cNvPicPr>
@@ -9260,8 +8848,8 @@
         </p:blipFill>
         <p:spPr>
           <a:xfrm>
-            <a:off x="3661258" y="1594714"/>
-            <a:ext cx="285293" cy="285293"/>
+            <a:off x="4349801" y="1901952"/>
+            <a:ext cx="676656" cy="676656"/>
           </a:xfrm>
           <a:prstGeom prst="rect">
             <a:avLst/>
@@ -9270,14 +8858,14 @@
       </p:pic>
       <p:sp>
         <p:nvSpPr>
-          <p:cNvPr id="12" name="Text 8"/>
-          <p:cNvSpPr txBox="1"/>
-          <p:nvPr/>
-        </p:nvSpPr>
-        <p:spPr>
-          <a:xfrm>
-            <a:off x="2889504" y="2103120"/>
-            <a:ext cx="1828800" cy="777240"/>
+          <p:cNvPr id="11" name="Text 7"/>
+          <p:cNvSpPr txBox="1"/>
+          <p:nvPr/>
+        </p:nvSpPr>
+        <p:spPr>
+          <a:xfrm>
+            <a:off x="3499409" y="3063240"/>
+            <a:ext cx="2377440" cy="1828800"/>
           </a:xfrm>
           <a:prstGeom prst="rect">
             <a:avLst/>
@@ -9290,10 +8878,13 @@
           <a:lstStyle/>
           <a:p>
             <a:pPr algn="ctr" indent="0" marL="0">
-              <a:buNone/>
-            </a:pPr>
-            <a:r>
-              <a:rPr lang="en-US" sz="1400" b="1" dirty="0">
+              <a:spcAft>
+                <a:spcPts val="400"/>
+              </a:spcAft>
+              <a:buNone/>
+            </a:pPr>
+            <a:r>
+              <a:rPr lang="en-US" sz="2000" b="1" dirty="0">
                 <a:solidFill>
                   <a:srgbClr val="16261F"/>
                 </a:solidFill>
@@ -9301,68 +8892,63 @@
                 <a:ea typeface="Calibri" pitchFamily="34" charset="-122"/>
                 <a:cs typeface="Calibri" pitchFamily="34" charset="-120"/>
               </a:rPr>
-              <a:t>Clamp-on kit</a:t>
-            </a:r>
-            <a:endParaRPr lang="en-US" sz="1400" dirty="0"/>
+              <a:t>[Name]</a:t>
+            </a:r>
+            <a:endParaRPr lang="en-US" sz="2000" dirty="0"/>
           </a:p>
           <a:p>
             <a:pPr algn="ctr" indent="0" marL="0">
-              <a:buNone/>
-            </a:pPr>
-            <a:r>
-              <a:rPr lang="en-US" sz="1400" b="1" dirty="0">
-                <a:solidFill>
-                  <a:srgbClr val="16261F"/>
-                </a:solidFill>
-                <a:latin typeface="Calibri" pitchFamily="34" charset="0"/>
-                <a:ea typeface="Calibri" pitchFamily="34" charset="-122"/>
-                <a:cs typeface="Calibri" pitchFamily="34" charset="-120"/>
-              </a:rPr>
-              <a:t>₹6,100–13,300</a:t>
-            </a:r>
-            <a:endParaRPr lang="en-US" sz="1400" dirty="0"/>
-          </a:p>
-        </p:txBody>
-      </p:sp>
-      <p:sp>
-        <p:nvSpPr>
-          <p:cNvPr id="13" name="Shape 9"/>
+              <a:spcAft>
+                <a:spcPts val="800"/>
+              </a:spcAft>
+              <a:buNone/>
+            </a:pPr>
+            <a:r>
+              <a:rPr lang="en-US" sz="1500" b="1" dirty="0">
+                <a:solidFill>
+                  <a:srgbClr val="0E5A32"/>
+                </a:solidFill>
+                <a:latin typeface="Calibri" pitchFamily="34" charset="0"/>
+                <a:ea typeface="Calibri" pitchFamily="34" charset="-122"/>
+                <a:cs typeface="Calibri" pitchFamily="34" charset="-120"/>
+              </a:rPr>
+              <a:t>[Role]</a:t>
+            </a:r>
+            <a:endParaRPr lang="en-US" sz="2000" dirty="0"/>
+          </a:p>
+          <a:p>
+            <a:pPr algn="ctr" indent="0" marL="0">
+              <a:buNone/>
+            </a:pPr>
+            <a:r>
+              <a:rPr lang="en-US" sz="1300" dirty="0">
+                <a:solidFill>
+                  <a:srgbClr val="55655D"/>
+                </a:solidFill>
+                <a:latin typeface="Calibri" pitchFamily="34" charset="0"/>
+                <a:ea typeface="Calibri" pitchFamily="34" charset="-122"/>
+                <a:cs typeface="Calibri" pitchFamily="34" charset="-120"/>
+              </a:rPr>
+              <a:t>[Skill: one line relevant to pumps, sensors, data or energy]</a:t>
+            </a:r>
+            <a:endParaRPr lang="en-US" sz="2000" dirty="0"/>
+          </a:p>
+        </p:txBody>
+      </p:sp>
+      <p:sp>
+        <p:nvSpPr>
+          <p:cNvPr id="12" name="Shape 8"/>
           <p:cNvSpPr/>
           <p:nvPr/>
         </p:nvSpPr>
         <p:spPr>
           <a:xfrm>
-            <a:off x="4828032" y="2103120"/>
-            <a:ext cx="201168" cy="256032"/>
-          </a:xfrm>
-          <a:prstGeom prst="rightArrow">
-            <a:avLst/>
-          </a:prstGeom>
-          <a:solidFill>
-            <a:srgbClr val="3DCD58"/>
-          </a:solidFill>
-          <a:ln w="12700">
-            <a:solidFill>
-              <a:srgbClr val="3DCD58"/>
-            </a:solidFill>
-            <a:prstDash val="solid"/>
-          </a:ln>
-        </p:spPr>
-      </p:sp>
-      <p:sp>
-        <p:nvSpPr>
-          <p:cNvPr id="14" name="Shape 10"/>
-          <p:cNvSpPr/>
-          <p:nvPr/>
-        </p:nvSpPr>
-        <p:spPr>
-          <a:xfrm>
-            <a:off x="5047488" y="1371600"/>
-            <a:ext cx="2011680" cy="1554480"/>
+            <a:off x="6175858" y="1417320"/>
+            <a:ext cx="2651760" cy="3566160"/>
           </a:xfrm>
           <a:prstGeom prst="roundRect">
             <a:avLst>
-              <a:gd name="adj" fmla="val 4706"/>
+              <a:gd name="adj" fmla="val 2759"/>
             </a:avLst>
           </a:prstGeom>
           <a:solidFill>
@@ -9378,24 +8964,24 @@
       </p:sp>
       <p:sp>
         <p:nvSpPr>
-          <p:cNvPr id="15" name="Shape 11"/>
+          <p:cNvPr id="13" name="Shape 9"/>
           <p:cNvSpPr/>
           <p:nvPr/>
         </p:nvSpPr>
         <p:spPr>
           <a:xfrm>
-            <a:off x="5779008" y="1463040"/>
-            <a:ext cx="548640" cy="548640"/>
+            <a:off x="6861658" y="1600200"/>
+            <a:ext cx="1280160" cy="1280160"/>
           </a:xfrm>
           <a:prstGeom prst="ellipse">
             <a:avLst/>
           </a:prstGeom>
           <a:solidFill>
-            <a:srgbClr val="0E5A32"/>
+            <a:srgbClr val="E3F6E8"/>
           </a:solidFill>
-          <a:ln w="12700">
-            <a:solidFill>
-              <a:srgbClr val="0E5A32"/>
+          <a:ln w="25400">
+            <a:solidFill>
+              <a:srgbClr val="3DCD58"/>
             </a:solidFill>
             <a:prstDash val="solid"/>
           </a:ln>
@@ -9403,7 +8989,7 @@
       </p:sp>
       <p:pic>
         <p:nvPicPr>
-          <p:cNvPr id="16" name="Image 2" descr="preencoded.png">    </p:cNvPr>
+          <p:cNvPr id="14" name="Image 2" descr="preencoded.png">    </p:cNvPr>
           <p:cNvPicPr>
             <a:picLocks noChangeAspect="1"/>
           </p:cNvPicPr>
@@ -9417,8 +9003,8 @@
         </p:blipFill>
         <p:spPr>
           <a:xfrm>
-            <a:off x="5910682" y="1594714"/>
-            <a:ext cx="285293" cy="285293"/>
+            <a:off x="7163410" y="1901952"/>
+            <a:ext cx="676656" cy="676656"/>
           </a:xfrm>
           <a:prstGeom prst="rect">
             <a:avLst/>
@@ -9427,14 +9013,14 @@
       </p:pic>
       <p:sp>
         <p:nvSpPr>
-          <p:cNvPr id="17" name="Text 12"/>
-          <p:cNvSpPr txBox="1"/>
-          <p:nvPr/>
-        </p:nvSpPr>
-        <p:spPr>
-          <a:xfrm>
-            <a:off x="5138928" y="2103120"/>
-            <a:ext cx="1828800" cy="777240"/>
+          <p:cNvPr id="15" name="Text 10"/>
+          <p:cNvSpPr txBox="1"/>
+          <p:nvPr/>
+        </p:nvSpPr>
+        <p:spPr>
+          <a:xfrm>
+            <a:off x="6313018" y="3063240"/>
+            <a:ext cx="2377440" cy="1828800"/>
           </a:xfrm>
           <a:prstGeom prst="rect">
             <a:avLst/>
@@ -9447,10 +9033,13 @@
           <a:lstStyle/>
           <a:p>
             <a:pPr algn="ctr" indent="0" marL="0">
-              <a:buNone/>
-            </a:pPr>
-            <a:r>
-              <a:rPr lang="en-US" sz="1400" b="1" dirty="0">
+              <a:spcAft>
+                <a:spcPts val="400"/>
+              </a:spcAft>
+              <a:buNone/>
+            </a:pPr>
+            <a:r>
+              <a:rPr lang="en-US" sz="2000" b="1" dirty="0">
                 <a:solidFill>
                   <a:srgbClr val="16261F"/>
                 </a:solidFill>
@@ -9458,51 +9047,63 @@
                 <a:ea typeface="Calibri" pitchFamily="34" charset="-122"/>
                 <a:cs typeface="Calibri" pitchFamily="34" charset="-120"/>
               </a:rPr>
-              <a:t>₹ report by cause</a:t>
-            </a:r>
-            <a:endParaRPr lang="en-US" sz="1400" dirty="0"/>
-          </a:p>
-        </p:txBody>
-      </p:sp>
-      <p:sp>
-        <p:nvSpPr>
-          <p:cNvPr id="18" name="Shape 13"/>
+              <a:t>[Name]</a:t>
+            </a:r>
+            <a:endParaRPr lang="en-US" sz="2000" dirty="0"/>
+          </a:p>
+          <a:p>
+            <a:pPr algn="ctr" indent="0" marL="0">
+              <a:spcAft>
+                <a:spcPts val="800"/>
+              </a:spcAft>
+              <a:buNone/>
+            </a:pPr>
+            <a:r>
+              <a:rPr lang="en-US" sz="1500" b="1" dirty="0">
+                <a:solidFill>
+                  <a:srgbClr val="0E5A32"/>
+                </a:solidFill>
+                <a:latin typeface="Calibri" pitchFamily="34" charset="0"/>
+                <a:ea typeface="Calibri" pitchFamily="34" charset="-122"/>
+                <a:cs typeface="Calibri" pitchFamily="34" charset="-120"/>
+              </a:rPr>
+              <a:t>[Role]</a:t>
+            </a:r>
+            <a:endParaRPr lang="en-US" sz="2000" dirty="0"/>
+          </a:p>
+          <a:p>
+            <a:pPr algn="ctr" indent="0" marL="0">
+              <a:buNone/>
+            </a:pPr>
+            <a:r>
+              <a:rPr lang="en-US" sz="1300" dirty="0">
+                <a:solidFill>
+                  <a:srgbClr val="55655D"/>
+                </a:solidFill>
+                <a:latin typeface="Calibri" pitchFamily="34" charset="0"/>
+                <a:ea typeface="Calibri" pitchFamily="34" charset="-122"/>
+                <a:cs typeface="Calibri" pitchFamily="34" charset="-120"/>
+              </a:rPr>
+              <a:t>[Skill: one line relevant to pumps, sensors, data or energy]</a:t>
+            </a:r>
+            <a:endParaRPr lang="en-US" sz="2000" dirty="0"/>
+          </a:p>
+        </p:txBody>
+      </p:sp>
+      <p:sp>
+        <p:nvSpPr>
+          <p:cNvPr id="16" name="Shape 11"/>
           <p:cNvSpPr/>
           <p:nvPr/>
         </p:nvSpPr>
         <p:spPr>
           <a:xfrm>
-            <a:off x="7077456" y="2103120"/>
-            <a:ext cx="201168" cy="256032"/>
-          </a:xfrm>
-          <a:prstGeom prst="rightArrow">
-            <a:avLst/>
-          </a:prstGeom>
-          <a:solidFill>
-            <a:srgbClr val="3DCD58"/>
-          </a:solidFill>
-          <a:ln w="12700">
-            <a:solidFill>
-              <a:srgbClr val="3DCD58"/>
-            </a:solidFill>
-            <a:prstDash val="solid"/>
-          </a:ln>
-        </p:spPr>
-      </p:sp>
-      <p:sp>
-        <p:nvSpPr>
-          <p:cNvPr id="19" name="Shape 14"/>
-          <p:cNvSpPr/>
-          <p:nvPr/>
-        </p:nvSpPr>
-        <p:spPr>
-          <a:xfrm>
-            <a:off x="7296912" y="1371600"/>
-            <a:ext cx="2011680" cy="1554480"/>
+            <a:off x="8989466" y="1417320"/>
+            <a:ext cx="2651760" cy="3566160"/>
           </a:xfrm>
           <a:prstGeom prst="roundRect">
             <a:avLst>
-              <a:gd name="adj" fmla="val 4706"/>
+              <a:gd name="adj" fmla="val 2759"/>
             </a:avLst>
           </a:prstGeom>
           <a:solidFill>
@@ -9518,24 +9119,24 @@
       </p:sp>
       <p:sp>
         <p:nvSpPr>
-          <p:cNvPr id="20" name="Shape 15"/>
+          <p:cNvPr id="17" name="Shape 12"/>
           <p:cNvSpPr/>
           <p:nvPr/>
         </p:nvSpPr>
         <p:spPr>
           <a:xfrm>
-            <a:off x="8028432" y="1463040"/>
-            <a:ext cx="548640" cy="548640"/>
+            <a:off x="9675266" y="1600200"/>
+            <a:ext cx="1280160" cy="1280160"/>
           </a:xfrm>
           <a:prstGeom prst="ellipse">
             <a:avLst/>
           </a:prstGeom>
           <a:solidFill>
-            <a:srgbClr val="0E5A32"/>
+            <a:srgbClr val="E3F6E8"/>
           </a:solidFill>
-          <a:ln w="12700">
-            <a:solidFill>
-              <a:srgbClr val="0E5A32"/>
+          <a:ln w="25400">
+            <a:solidFill>
+              <a:srgbClr val="3DCD58"/>
             </a:solidFill>
             <a:prstDash val="solid"/>
           </a:ln>
@@ -9543,7 +9144,7 @@
       </p:sp>
       <p:pic>
         <p:nvPicPr>
-          <p:cNvPr id="21" name="Image 3" descr="preencoded.png">    </p:cNvPr>
+          <p:cNvPr id="18" name="Image 3" descr="preencoded.png">    </p:cNvPr>
           <p:cNvPicPr>
             <a:picLocks noChangeAspect="1"/>
           </p:cNvPicPr>
@@ -9557,8 +9158,8 @@
         </p:blipFill>
         <p:spPr>
           <a:xfrm>
-            <a:off x="8160106" y="1594714"/>
-            <a:ext cx="285293" cy="285293"/>
+            <a:off x="9977018" y="1901952"/>
+            <a:ext cx="676656" cy="676656"/>
           </a:xfrm>
           <a:prstGeom prst="rect">
             <a:avLst/>
@@ -9567,14 +9168,14 @@
       </p:pic>
       <p:sp>
         <p:nvSpPr>
-          <p:cNvPr id="22" name="Text 16"/>
-          <p:cNvSpPr txBox="1"/>
-          <p:nvPr/>
-        </p:nvSpPr>
-        <p:spPr>
-          <a:xfrm>
-            <a:off x="7388352" y="2103120"/>
-            <a:ext cx="1828800" cy="777240"/>
+          <p:cNvPr id="19" name="Text 13"/>
+          <p:cNvSpPr txBox="1"/>
+          <p:nvPr/>
+        </p:nvSpPr>
+        <p:spPr>
+          <a:xfrm>
+            <a:off x="9126626" y="3063240"/>
+            <a:ext cx="2377440" cy="1828800"/>
           </a:xfrm>
           <a:prstGeom prst="rect">
             <a:avLst/>
@@ -9587,10 +9188,13 @@
           <a:lstStyle/>
           <a:p>
             <a:pPr algn="ctr" indent="0" marL="0">
-              <a:buNone/>
-            </a:pPr>
-            <a:r>
-              <a:rPr lang="en-US" sz="1400" b="1" dirty="0">
+              <a:spcAft>
+                <a:spcPts val="400"/>
+              </a:spcAft>
+              <a:buNone/>
+            </a:pPr>
+            <a:r>
+              <a:rPr lang="en-US" sz="2000" b="1" dirty="0">
                 <a:solidFill>
                   <a:srgbClr val="16261F"/>
                 </a:solidFill>
@@ -9598,94 +9202,64 @@
                 <a:ea typeface="Calibri" pitchFamily="34" charset="-122"/>
                 <a:cs typeface="Calibri" pitchFamily="34" charset="-120"/>
               </a:rPr>
-              <a:t>VFD verdict</a:t>
-            </a:r>
-            <a:endParaRPr lang="en-US" sz="1400" dirty="0"/>
+              <a:t>[Name]</a:t>
+            </a:r>
+            <a:endParaRPr lang="en-US" sz="2000" dirty="0"/>
           </a:p>
           <a:p>
             <a:pPr algn="ctr" indent="0" marL="0">
-              <a:buNone/>
-            </a:pPr>
-            <a:r>
-              <a:rPr lang="en-US" sz="1400" b="1" dirty="0">
-                <a:solidFill>
-                  <a:srgbClr val="16261F"/>
-                </a:solidFill>
-                <a:latin typeface="Calibri" pitchFamily="34" charset="0"/>
-                <a:ea typeface="Calibri" pitchFamily="34" charset="-122"/>
-                <a:cs typeface="Calibri" pitchFamily="34" charset="-120"/>
-              </a:rPr>
-              <a:t>GO or WAIT</a:t>
-            </a:r>
-            <a:endParaRPr lang="en-US" sz="1400" dirty="0"/>
-          </a:p>
-        </p:txBody>
-      </p:sp>
-      <p:sp>
-        <p:nvSpPr>
-          <p:cNvPr id="23" name="Shape 17"/>
+              <a:spcAft>
+                <a:spcPts val="800"/>
+              </a:spcAft>
+              <a:buNone/>
+            </a:pPr>
+            <a:r>
+              <a:rPr lang="en-US" sz="1500" b="1" dirty="0">
+                <a:solidFill>
+                  <a:srgbClr val="0E5A32"/>
+                </a:solidFill>
+                <a:latin typeface="Calibri" pitchFamily="34" charset="0"/>
+                <a:ea typeface="Calibri" pitchFamily="34" charset="-122"/>
+                <a:cs typeface="Calibri" pitchFamily="34" charset="-120"/>
+              </a:rPr>
+              <a:t>[Role]</a:t>
+            </a:r>
+            <a:endParaRPr lang="en-US" sz="2000" dirty="0"/>
+          </a:p>
+          <a:p>
+            <a:pPr algn="ctr" indent="0" marL="0">
+              <a:buNone/>
+            </a:pPr>
+            <a:r>
+              <a:rPr lang="en-US" sz="1300" dirty="0">
+                <a:solidFill>
+                  <a:srgbClr val="55655D"/>
+                </a:solidFill>
+                <a:latin typeface="Calibri" pitchFamily="34" charset="0"/>
+                <a:ea typeface="Calibri" pitchFamily="34" charset="-122"/>
+                <a:cs typeface="Calibri" pitchFamily="34" charset="-120"/>
+              </a:rPr>
+              <a:t>[Skill: one line relevant to pumps, sensors, data or energy]</a:t>
+            </a:r>
+            <a:endParaRPr lang="en-US" sz="2000" dirty="0"/>
+          </a:p>
+        </p:txBody>
+      </p:sp>
+      <p:sp>
+        <p:nvSpPr>
+          <p:cNvPr id="20" name="Shape 14"/>
           <p:cNvSpPr/>
           <p:nvPr/>
         </p:nvSpPr>
         <p:spPr>
           <a:xfrm>
-            <a:off x="9326880" y="2103120"/>
-            <a:ext cx="201168" cy="256032"/>
-          </a:xfrm>
-          <a:prstGeom prst="rightArrow">
-            <a:avLst/>
-          </a:prstGeom>
-          <a:solidFill>
-            <a:srgbClr val="3DCD58"/>
-          </a:solidFill>
-          <a:ln w="12700">
-            <a:solidFill>
-              <a:srgbClr val="3DCD58"/>
-            </a:solidFill>
-            <a:prstDash val="solid"/>
-          </a:ln>
-        </p:spPr>
-      </p:sp>
-      <p:sp>
-        <p:nvSpPr>
-          <p:cNvPr id="24" name="Shape 18"/>
-          <p:cNvSpPr/>
-          <p:nvPr/>
-        </p:nvSpPr>
-        <p:spPr>
-          <a:xfrm>
-            <a:off x="9546336" y="1371600"/>
-            <a:ext cx="2011680" cy="1554480"/>
+            <a:off x="548640" y="5349240"/>
+            <a:ext cx="11109960" cy="731520"/>
           </a:xfrm>
           <a:prstGeom prst="roundRect">
             <a:avLst>
-              <a:gd name="adj" fmla="val 4706"/>
+              <a:gd name="adj" fmla="val 12500"/>
             </a:avLst>
-          </a:prstGeom>
-          <a:solidFill>
-            <a:srgbClr val="FFFFFF"/>
-          </a:solidFill>
-          <a:ln w="12700">
-            <a:solidFill>
-              <a:srgbClr val="D3DFD7"/>
-            </a:solidFill>
-            <a:prstDash val="solid"/>
-          </a:ln>
-        </p:spPr>
-      </p:sp>
-      <p:sp>
-        <p:nvSpPr>
-          <p:cNvPr id="25" name="Shape 19"/>
-          <p:cNvSpPr/>
-          <p:nvPr/>
-        </p:nvSpPr>
-        <p:spPr>
-          <a:xfrm>
-            <a:off x="10277856" y="1463040"/>
-            <a:ext cx="548640" cy="548640"/>
-          </a:xfrm>
-          <a:prstGeom prst="ellipse">
-            <a:avLst/>
           </a:prstGeom>
           <a:solidFill>
             <a:srgbClr val="0E5A32"/>
@@ -9698,40 +9272,55 @@
           </a:ln>
         </p:spPr>
       </p:sp>
-      <p:pic>
-        <p:nvPicPr>
-          <p:cNvPr id="26" name="Image 4" descr="preencoded.png">    </p:cNvPr>
-          <p:cNvPicPr>
-            <a:picLocks noChangeAspect="1"/>
-          </p:cNvPicPr>
-          <p:nvPr/>
-        </p:nvPicPr>
-        <p:blipFill>
-          <a:blip r:embed="rId5"/>
-          <a:stretch>
-            <a:fillRect/>
-          </a:stretch>
-        </p:blipFill>
-        <p:spPr>
-          <a:xfrm>
-            <a:off x="10409530" y="1594714"/>
-            <a:ext cx="285293" cy="285293"/>
-          </a:xfrm>
-          <a:prstGeom prst="rect">
-            <a:avLst/>
-          </a:prstGeom>
-        </p:spPr>
-      </p:pic>
-      <p:sp>
-        <p:nvSpPr>
-          <p:cNvPr id="27" name="Text 20"/>
-          <p:cNvSpPr txBox="1"/>
-          <p:nvPr/>
-        </p:nvSpPr>
-        <p:spPr>
-          <a:xfrm>
-            <a:off x="9637776" y="2103120"/>
-            <a:ext cx="1828800" cy="777240"/>
+      <p:sp>
+        <p:nvSpPr>
+          <p:cNvPr id="21" name="Text 15"/>
+          <p:cNvSpPr txBox="1"/>
+          <p:nvPr/>
+        </p:nvSpPr>
+        <p:spPr>
+          <a:xfrm>
+            <a:off x="548640" y="5349240"/>
+            <a:ext cx="11109960" cy="731520"/>
+          </a:xfrm>
+          <a:prstGeom prst="rect">
+            <a:avLst/>
+          </a:prstGeom>
+          <a:noFill/>
+          <a:ln/>
+        </p:spPr>
+        <p:txBody>
+          <a:bodyPr wrap="square" lIns="0" tIns="0" rIns="0" bIns="0" rtlCol="0" anchor="ctr"/>
+          <a:lstStyle/>
+          <a:p>
+            <a:pPr algn="ctr" indent="0" marL="0">
+              <a:buNone/>
+            </a:pPr>
+            <a:r>
+              <a:rPr lang="en-US" sz="2400" b="1" dirty="0">
+                <a:solidFill>
+                  <a:srgbClr val="FFFFFF"/>
+                </a:solidFill>
+                <a:latin typeface="Calibri" pitchFamily="34" charset="0"/>
+                <a:ea typeface="Calibri" pitchFamily="34" charset="-122"/>
+                <a:cs typeface="Calibri" pitchFamily="34" charset="-120"/>
+              </a:rPr>
+              <a:t>Cheap kit. Clever inference. Answers in rupees. Honest about limits.</a:t>
+            </a:r>
+            <a:endParaRPr lang="en-US" sz="2400" dirty="0"/>
+          </a:p>
+        </p:txBody>
+      </p:sp>
+      <p:sp>
+        <p:nvSpPr>
+          <p:cNvPr id="22" name="Text 16"/>
+          <p:cNvSpPr txBox="1"/>
+          <p:nvPr/>
+        </p:nvSpPr>
+        <p:spPr>
+          <a:xfrm>
+            <a:off x="548640" y="6172200"/>
+            <a:ext cx="10972800" cy="274320"/>
           </a:xfrm>
           <a:prstGeom prst="rect">
             <a:avLst/>
@@ -9743,377 +9332,6 @@
           <a:bodyPr wrap="square" lIns="0" tIns="0" rIns="0" bIns="0" rtlCol="0" anchor="t"/>
           <a:lstStyle/>
           <a:p>
-            <a:pPr algn="ctr" indent="0" marL="0">
-              <a:buNone/>
-            </a:pPr>
-            <a:r>
-              <a:rPr lang="en-US" sz="1400" b="1" dirty="0">
-                <a:solidFill>
-                  <a:srgbClr val="16261F"/>
-                </a:solidFill>
-                <a:latin typeface="Calibri" pitchFamily="34" charset="0"/>
-                <a:ea typeface="Calibri" pitchFamily="34" charset="-122"/>
-                <a:cs typeface="Calibri" pitchFamily="34" charset="-120"/>
-              </a:rPr>
-              <a:t>Verified before/after saving</a:t>
-            </a:r>
-            <a:endParaRPr lang="en-US" sz="1400" dirty="0"/>
-          </a:p>
-        </p:txBody>
-      </p:sp>
-      <p:sp>
-        <p:nvSpPr>
-          <p:cNvPr id="28" name="Shape 21"/>
-          <p:cNvSpPr/>
-          <p:nvPr/>
-        </p:nvSpPr>
-        <p:spPr>
-          <a:xfrm>
-            <a:off x="548640" y="3108960"/>
-            <a:ext cx="2651760" cy="1188720"/>
-          </a:xfrm>
-          <a:prstGeom prst="roundRect">
-            <a:avLst>
-              <a:gd name="adj" fmla="val 6154"/>
-            </a:avLst>
-          </a:prstGeom>
-          <a:solidFill>
-            <a:srgbClr val="E3F6E8"/>
-          </a:solidFill>
-          <a:ln w="19050">
-            <a:solidFill>
-              <a:srgbClr val="3DCD58"/>
-            </a:solidFill>
-            <a:prstDash val="solid"/>
-          </a:ln>
-        </p:spPr>
-      </p:sp>
-      <p:sp>
-        <p:nvSpPr>
-          <p:cNvPr id="29" name="Text 22"/>
-          <p:cNvSpPr txBox="1"/>
-          <p:nvPr/>
-        </p:nvSpPr>
-        <p:spPr>
-          <a:xfrm>
-            <a:off x="658368" y="3127248"/>
-            <a:ext cx="2432304" cy="1152144"/>
-          </a:xfrm>
-          <a:prstGeom prst="rect">
-            <a:avLst/>
-          </a:prstGeom>
-          <a:noFill/>
-          <a:ln/>
-        </p:spPr>
-        <p:txBody>
-          <a:bodyPr wrap="square" lIns="0" tIns="0" rIns="0" bIns="0" rtlCol="0" anchor="ctr"/>
-          <a:lstStyle/>
-          <a:p>
-            <a:pPr algn="ctr" indent="0" marL="0">
-              <a:buNone/>
-            </a:pPr>
-            <a:r>
-              <a:rPr lang="en-US" sz="2400" b="1" dirty="0">
-                <a:solidFill>
-                  <a:srgbClr val="0E5A32"/>
-                </a:solidFill>
-                <a:latin typeface="Calibri" pitchFamily="34" charset="0"/>
-                <a:ea typeface="Calibri" pitchFamily="34" charset="-122"/>
-                <a:cs typeface="Calibri" pitchFamily="34" charset="-120"/>
-              </a:rPr>
-              <a:t>19.3–35.5%</a:t>
-            </a:r>
-            <a:endParaRPr lang="en-US" sz="2400" dirty="0"/>
-          </a:p>
-          <a:p>
-            <a:pPr algn="ctr" indent="0" marL="0">
-              <a:buNone/>
-            </a:pPr>
-            <a:r>
-              <a:rPr lang="en-US" sz="1200" dirty="0">
-                <a:solidFill>
-                  <a:srgbClr val="16261F"/>
-                </a:solidFill>
-                <a:latin typeface="Calibri" pitchFamily="34" charset="0"/>
-                <a:ea typeface="Calibri" pitchFamily="34" charset="-122"/>
-                <a:cs typeface="Calibri" pitchFamily="34" charset="-120"/>
-              </a:rPr>
-              <a:t>VFD saving, base case</a:t>
-            </a:r>
-            <a:endParaRPr lang="en-US" sz="2400" dirty="0"/>
-          </a:p>
-        </p:txBody>
-      </p:sp>
-      <p:sp>
-        <p:nvSpPr>
-          <p:cNvPr id="30" name="Shape 23"/>
-          <p:cNvSpPr/>
-          <p:nvPr/>
-        </p:nvSpPr>
-        <p:spPr>
-          <a:xfrm>
-            <a:off x="3362249" y="3108960"/>
-            <a:ext cx="2651760" cy="1188720"/>
-          </a:xfrm>
-          <a:prstGeom prst="roundRect">
-            <a:avLst>
-              <a:gd name="adj" fmla="val 6154"/>
-            </a:avLst>
-          </a:prstGeom>
-          <a:solidFill>
-            <a:srgbClr val="E3F6E8"/>
-          </a:solidFill>
-          <a:ln w="19050">
-            <a:solidFill>
-              <a:srgbClr val="3DCD58"/>
-            </a:solidFill>
-            <a:prstDash val="solid"/>
-          </a:ln>
-        </p:spPr>
-      </p:sp>
-      <p:sp>
-        <p:nvSpPr>
-          <p:cNvPr id="31" name="Text 24"/>
-          <p:cNvSpPr txBox="1"/>
-          <p:nvPr/>
-        </p:nvSpPr>
-        <p:spPr>
-          <a:xfrm>
-            <a:off x="3471977" y="3127248"/>
-            <a:ext cx="2432304" cy="1152144"/>
-          </a:xfrm>
-          <a:prstGeom prst="rect">
-            <a:avLst/>
-          </a:prstGeom>
-          <a:noFill/>
-          <a:ln/>
-        </p:spPr>
-        <p:txBody>
-          <a:bodyPr wrap="square" lIns="0" tIns="0" rIns="0" bIns="0" rtlCol="0" anchor="ctr"/>
-          <a:lstStyle/>
-          <a:p>
-            <a:pPr algn="ctr" indent="0" marL="0">
-              <a:buNone/>
-            </a:pPr>
-            <a:r>
-              <a:rPr lang="en-US" sz="1900" b="1" dirty="0">
-                <a:solidFill>
-                  <a:srgbClr val="0E5A32"/>
-                </a:solidFill>
-                <a:latin typeface="Calibri" pitchFamily="34" charset="0"/>
-                <a:ea typeface="Calibri" pitchFamily="34" charset="-122"/>
-                <a:cs typeface="Calibri" pitchFamily="34" charset="-120"/>
-              </a:rPr>
-              <a:t>₹69,292–1,27,178</a:t>
-            </a:r>
-            <a:endParaRPr lang="en-US" sz="1900" dirty="0"/>
-          </a:p>
-          <a:p>
-            <a:pPr algn="ctr" indent="0" marL="0">
-              <a:buNone/>
-            </a:pPr>
-            <a:r>
-              <a:rPr lang="en-US" sz="1200" dirty="0">
-                <a:solidFill>
-                  <a:srgbClr val="16261F"/>
-                </a:solidFill>
-                <a:latin typeface="Calibri" pitchFamily="34" charset="0"/>
-                <a:ea typeface="Calibri" pitchFamily="34" charset="-122"/>
-                <a:cs typeface="Calibri" pitchFamily="34" charset="-120"/>
-              </a:rPr>
-              <a:t>per year, per 11 kW pump</a:t>
-            </a:r>
-            <a:endParaRPr lang="en-US" sz="1900" dirty="0"/>
-          </a:p>
-        </p:txBody>
-      </p:sp>
-      <p:sp>
-        <p:nvSpPr>
-          <p:cNvPr id="32" name="Shape 25"/>
-          <p:cNvSpPr/>
-          <p:nvPr/>
-        </p:nvSpPr>
-        <p:spPr>
-          <a:xfrm>
-            <a:off x="6175858" y="3108960"/>
-            <a:ext cx="2651760" cy="1188720"/>
-          </a:xfrm>
-          <a:prstGeom prst="roundRect">
-            <a:avLst>
-              <a:gd name="adj" fmla="val 6154"/>
-            </a:avLst>
-          </a:prstGeom>
-          <a:solidFill>
-            <a:srgbClr val="E3F6E8"/>
-          </a:solidFill>
-          <a:ln w="19050">
-            <a:solidFill>
-              <a:srgbClr val="3DCD58"/>
-            </a:solidFill>
-            <a:prstDash val="solid"/>
-          </a:ln>
-        </p:spPr>
-      </p:sp>
-      <p:sp>
-        <p:nvSpPr>
-          <p:cNvPr id="33" name="Text 26"/>
-          <p:cNvSpPr txBox="1"/>
-          <p:nvPr/>
-        </p:nvSpPr>
-        <p:spPr>
-          <a:xfrm>
-            <a:off x="6285586" y="3127248"/>
-            <a:ext cx="2432304" cy="1152144"/>
-          </a:xfrm>
-          <a:prstGeom prst="rect">
-            <a:avLst/>
-          </a:prstGeom>
-          <a:noFill/>
-          <a:ln/>
-        </p:spPr>
-        <p:txBody>
-          <a:bodyPr wrap="square" lIns="0" tIns="0" rIns="0" bIns="0" rtlCol="0" anchor="ctr"/>
-          <a:lstStyle/>
-          <a:p>
-            <a:pPr algn="ctr" indent="0" marL="0">
-              <a:buNone/>
-            </a:pPr>
-            <a:r>
-              <a:rPr lang="en-US" sz="1700" b="1" dirty="0">
-                <a:solidFill>
-                  <a:srgbClr val="0E5A32"/>
-                </a:solidFill>
-                <a:latin typeface="Calibri" pitchFamily="34" charset="0"/>
-                <a:ea typeface="Calibri" pitchFamily="34" charset="-122"/>
-                <a:cs typeface="Calibri" pitchFamily="34" charset="-120"/>
-              </a:rPr>
-              <a:t>4–19 mo vs 2–4+ yr</a:t>
-            </a:r>
-            <a:endParaRPr lang="en-US" sz="1700" dirty="0"/>
-          </a:p>
-          <a:p>
-            <a:pPr algn="ctr" indent="0" marL="0">
-              <a:buNone/>
-            </a:pPr>
-            <a:r>
-              <a:rPr lang="en-US" sz="1200" dirty="0">
-                <a:solidFill>
-                  <a:srgbClr val="16261F"/>
-                </a:solidFill>
-                <a:latin typeface="Calibri" pitchFamily="34" charset="0"/>
-                <a:ea typeface="Calibri" pitchFamily="34" charset="-122"/>
-                <a:cs typeface="Calibri" pitchFamily="34" charset="-120"/>
-              </a:rPr>
-              <a:t>payback: oversized vs right-sized</a:t>
-            </a:r>
-            <a:endParaRPr lang="en-US" sz="1700" dirty="0"/>
-          </a:p>
-        </p:txBody>
-      </p:sp>
-      <p:sp>
-        <p:nvSpPr>
-          <p:cNvPr id="34" name="Shape 27"/>
-          <p:cNvSpPr/>
-          <p:nvPr/>
-        </p:nvSpPr>
-        <p:spPr>
-          <a:xfrm>
-            <a:off x="8989466" y="3108960"/>
-            <a:ext cx="2651760" cy="1188720"/>
-          </a:xfrm>
-          <a:prstGeom prst="roundRect">
-            <a:avLst>
-              <a:gd name="adj" fmla="val 6154"/>
-            </a:avLst>
-          </a:prstGeom>
-          <a:solidFill>
-            <a:srgbClr val="E3F6E8"/>
-          </a:solidFill>
-          <a:ln w="19050">
-            <a:solidFill>
-              <a:srgbClr val="3DCD58"/>
-            </a:solidFill>
-            <a:prstDash val="solid"/>
-          </a:ln>
-        </p:spPr>
-      </p:sp>
-      <p:sp>
-        <p:nvSpPr>
-          <p:cNvPr id="35" name="Text 28"/>
-          <p:cNvSpPr txBox="1"/>
-          <p:nvPr/>
-        </p:nvSpPr>
-        <p:spPr>
-          <a:xfrm>
-            <a:off x="9099194" y="3127248"/>
-            <a:ext cx="2432304" cy="1152144"/>
-          </a:xfrm>
-          <a:prstGeom prst="rect">
-            <a:avLst/>
-          </a:prstGeom>
-          <a:noFill/>
-          <a:ln/>
-        </p:spPr>
-        <p:txBody>
-          <a:bodyPr wrap="square" lIns="0" tIns="0" rIns="0" bIns="0" rtlCol="0" anchor="ctr"/>
-          <a:lstStyle/>
-          <a:p>
-            <a:pPr algn="ctr" indent="0" marL="0">
-              <a:buNone/>
-            </a:pPr>
-            <a:r>
-              <a:rPr lang="en-US" sz="1700" b="1" dirty="0">
-                <a:solidFill>
-                  <a:srgbClr val="0E5A32"/>
-                </a:solidFill>
-                <a:latin typeface="Calibri" pitchFamily="34" charset="0"/>
-                <a:ea typeface="Calibri" pitchFamily="34" charset="-122"/>
-                <a:cs typeface="Calibri" pitchFamily="34" charset="-120"/>
-              </a:rPr>
-              <a:t>≈ ±3 points</a:t>
-            </a:r>
-            <a:endParaRPr lang="en-US" sz="1700" dirty="0"/>
-          </a:p>
-          <a:p>
-            <a:pPr algn="ctr" indent="0" marL="0">
-              <a:buNone/>
-            </a:pPr>
-            <a:r>
-              <a:rPr lang="en-US" sz="1200" dirty="0">
-                <a:solidFill>
-                  <a:srgbClr val="16261F"/>
-                </a:solidFill>
-                <a:latin typeface="Calibri" pitchFamily="34" charset="0"/>
-                <a:ea typeface="Calibri" pitchFamily="34" charset="-122"/>
-                <a:cs typeface="Calibri" pitchFamily="34" charset="-120"/>
-              </a:rPr>
-              <a:t>only with a measured system curve; else ≈ ±10</a:t>
-            </a:r>
-            <a:endParaRPr lang="en-US" sz="1700" dirty="0"/>
-          </a:p>
-        </p:txBody>
-      </p:sp>
-      <p:sp>
-        <p:nvSpPr>
-          <p:cNvPr id="36" name="Text 29"/>
-          <p:cNvSpPr txBox="1"/>
-          <p:nvPr/>
-        </p:nvSpPr>
-        <p:spPr>
-          <a:xfrm>
-            <a:off x="548640" y="4343400"/>
-            <a:ext cx="10972800" cy="274320"/>
-          </a:xfrm>
-          <a:prstGeom prst="rect">
-            <a:avLst/>
-          </a:prstGeom>
-          <a:noFill/>
-          <a:ln/>
-        </p:spPr>
-        <p:txBody>
-          <a:bodyPr wrap="square" lIns="0" tIns="0" rIns="0" bIns="0" rtlCol="0" anchor="t"/>
-          <a:lstStyle/>
-          <a:p>
             <a:pPr indent="0" marL="0">
               <a:buNone/>
             </a:pPr>
@@ -10126,179 +9344,7 @@
                 <a:ea typeface="Calibri" pitchFamily="34" charset="-122"/>
                 <a:cs typeface="Calibri" pitchFamily="34" charset="-120"/>
               </a:rPr>
-              <a:t>All SIMULATED (Grundfos NB 65-160/157, 11 kW; 10 m lift, 5% margin, 16 h/day, 300 days, ₹8/kWh).</a:t>
-            </a:r>
-            <a:endParaRPr lang="en-US" sz="1200" dirty="0"/>
-          </a:p>
-        </p:txBody>
-      </p:sp>
-      <p:sp>
-        <p:nvSpPr>
-          <p:cNvPr id="37" name="Shape 30"/>
-          <p:cNvSpPr/>
-          <p:nvPr/>
-        </p:nvSpPr>
-        <p:spPr>
-          <a:xfrm>
-            <a:off x="548640" y="4709160"/>
-            <a:ext cx="11109960" cy="1691640"/>
-          </a:xfrm>
-          <a:prstGeom prst="roundRect">
-            <a:avLst>
-              <a:gd name="adj" fmla="val 4324"/>
-            </a:avLst>
-          </a:prstGeom>
-          <a:solidFill>
-            <a:srgbClr val="FFF4E5"/>
-          </a:solidFill>
-          <a:ln w="25400">
-            <a:solidFill>
-              <a:srgbClr val="E07B00"/>
-            </a:solidFill>
-            <a:prstDash val="solid"/>
-          </a:ln>
-        </p:spPr>
-      </p:sp>
-      <p:sp>
-        <p:nvSpPr>
-          <p:cNvPr id="38" name="Text 31"/>
-          <p:cNvSpPr txBox="1"/>
-          <p:nvPr/>
-        </p:nvSpPr>
-        <p:spPr>
-          <a:xfrm>
-            <a:off x="731520" y="4754880"/>
-            <a:ext cx="5486400" cy="274320"/>
-          </a:xfrm>
-          <a:prstGeom prst="rect">
-            <a:avLst/>
-          </a:prstGeom>
-          <a:noFill/>
-          <a:ln/>
-        </p:spPr>
-        <p:txBody>
-          <a:bodyPr wrap="square" lIns="0" tIns="0" rIns="0" bIns="0" rtlCol="0" anchor="t"/>
-          <a:lstStyle/>
-          <a:p>
-            <a:pPr indent="0" marL="0">
-              <a:buNone/>
-            </a:pPr>
-            <a:r>
-              <a:rPr lang="en-US" sz="1400" b="1" dirty="0">
-                <a:solidFill>
-                  <a:srgbClr val="E07B00"/>
-                </a:solidFill>
-                <a:latin typeface="Calibri" pitchFamily="34" charset="0"/>
-                <a:ea typeface="Calibri" pitchFamily="34" charset="-122"/>
-                <a:cs typeface="Calibri" pitchFamily="34" charset="-120"/>
-              </a:rPr>
-              <a:t>Honest limits: what we validate next</a:t>
-            </a:r>
-            <a:endParaRPr lang="en-US" sz="1400" dirty="0"/>
-          </a:p>
-        </p:txBody>
-      </p:sp>
-      <p:sp>
-        <p:nvSpPr>
-          <p:cNvPr id="39" name="Text 32"/>
-          <p:cNvSpPr txBox="1"/>
-          <p:nvPr/>
-        </p:nvSpPr>
-        <p:spPr>
-          <a:xfrm>
-            <a:off x="777240" y="5074920"/>
-            <a:ext cx="10698480" cy="1280160"/>
-          </a:xfrm>
-          <a:prstGeom prst="rect">
-            <a:avLst/>
-          </a:prstGeom>
-          <a:noFill/>
-          <a:ln/>
-        </p:spPr>
-        <p:txBody>
-          <a:bodyPr wrap="square" lIns="0" tIns="0" rIns="0" bIns="0" rtlCol="0" anchor="t"/>
-          <a:lstStyle/>
-          <a:p>
-            <a:pPr marL="342900" indent="-342900">
-              <a:spcAft>
-                <a:spcPts val="400"/>
-              </a:spcAft>
-              <a:buSzPct val="100000"/>
-              <a:buChar char="•"/>
-            </a:pPr>
-            <a:r>
-              <a:rPr lang="en-US" sz="1200" dirty="0">
-                <a:solidFill>
-                  <a:srgbClr val="16261F"/>
-                </a:solidFill>
-                <a:latin typeface="Calibri" pitchFamily="34" charset="0"/>
-                <a:ea typeface="Calibri" pitchFamily="34" charset="-122"/>
-                <a:cs typeface="Calibri" pitchFamily="34" charset="-120"/>
-              </a:rPr>
-              <a:t>Simulation only: no lab/field data, no real quotes</a:t>
-            </a:r>
-            <a:endParaRPr lang="en-US" sz="1200" dirty="0"/>
-          </a:p>
-          <a:p>
-            <a:pPr marL="342900" indent="-342900">
-              <a:spcAft>
-                <a:spcPts val="400"/>
-              </a:spcAft>
-              <a:buSzPct val="100000"/>
-              <a:buChar char="•"/>
-            </a:pPr>
-            <a:r>
-              <a:rPr lang="en-US" sz="1200" dirty="0">
-                <a:solidFill>
-                  <a:srgbClr val="16261F"/>
-                </a:solidFill>
-                <a:latin typeface="Calibri" pitchFamily="34" charset="0"/>
-                <a:ea typeface="Calibri" pitchFamily="34" charset="-122"/>
-                <a:cs typeface="Calibri" pitchFamily="34" charset="-120"/>
-              </a:rPr>
-              <a:t>System-curve fit uses the simulated plant's own form, so it is optimistic</a:t>
-            </a:r>
-            <a:endParaRPr lang="en-US" sz="1200" dirty="0"/>
-          </a:p>
-          <a:p>
-            <a:pPr marL="342900" indent="-342900">
-              <a:spcAft>
-                <a:spcPts val="400"/>
-              </a:spcAft>
-              <a:buSzPct val="100000"/>
-              <a:buChar char="•"/>
-            </a:pPr>
-            <a:r>
-              <a:rPr lang="en-US" sz="1200" dirty="0">
-                <a:solidFill>
-                  <a:srgbClr val="16261F"/>
-                </a:solidFill>
-                <a:latin typeface="Calibri" pitchFamily="34" charset="0"/>
-                <a:ea typeface="Calibri" pitchFamily="34" charset="-122"/>
-                <a:cs typeface="Calibri" pitchFamily="34" charset="-120"/>
-              </a:rPr>
-              <a:t>Single pump, steady state. Out of scope: parallel pumps, closed loops, pumps already on drives, minimum-flow/NPSH, control dynamics</a:t>
-            </a:r>
-            <a:endParaRPr lang="en-US" sz="1200" dirty="0"/>
-          </a:p>
-          <a:p>
-            <a:pPr marL="342900" indent="-342900">
-              <a:spcAft>
-                <a:spcPts val="400"/>
-              </a:spcAft>
-              <a:buSzPct val="100000"/>
-              <a:buChar char="•"/>
-            </a:pPr>
-            <a:r>
-              <a:rPr lang="en-US" sz="1200" dirty="0">
-                <a:solidFill>
-                  <a:srgbClr val="16261F"/>
-                </a:solidFill>
-                <a:latin typeface="Calibri" pitchFamily="34" charset="0"/>
-                <a:ea typeface="Calibri" pitchFamily="34" charset="-122"/>
-                <a:cs typeface="Calibri" pitchFamily="34" charset="-120"/>
-              </a:rPr>
-              <a:t>Part of the valve share is by construction; 54–60% is an upper bound</a:t>
+              <a:t>Replace the photo circles and [placeholders]; delete unused cards (1–4 members).</a:t>
             </a:r>
             <a:endParaRPr lang="en-US" sz="1200" dirty="0"/>
           </a:p>
@@ -13403,7 +12449,7 @@
         </p:nvSpPr>
         <p:spPr>
           <a:xfrm>
-            <a:off x="900684" y="5004054"/>
+            <a:off x="900684" y="4912614"/>
             <a:ext cx="5733288" cy="260604"/>
           </a:xfrm>
           <a:prstGeom prst="rect">
@@ -13428,7 +12474,7 @@
         </p:nvSpPr>
         <p:spPr>
           <a:xfrm>
-            <a:off x="1161288" y="3657600"/>
+            <a:off x="1161288" y="3566160"/>
             <a:ext cx="2084832" cy="1346454"/>
           </a:xfrm>
           <a:prstGeom prst="roundRect">
@@ -13455,7 +12501,7 @@
         </p:nvSpPr>
         <p:spPr>
           <a:xfrm>
-            <a:off x="1378458" y="3744468"/>
+            <a:off x="1378458" y="3653028"/>
             <a:ext cx="104242" cy="1172718"/>
           </a:xfrm>
           <a:prstGeom prst="rect">
@@ -13480,7 +12526,7 @@
         </p:nvSpPr>
         <p:spPr>
           <a:xfrm>
-            <a:off x="1665122" y="3744468"/>
+            <a:off x="1665122" y="3653028"/>
             <a:ext cx="104242" cy="1172718"/>
           </a:xfrm>
           <a:prstGeom prst="rect">
@@ -13505,7 +12551,7 @@
         </p:nvSpPr>
         <p:spPr>
           <a:xfrm>
-            <a:off x="1951787" y="3744468"/>
+            <a:off x="1951787" y="3653028"/>
             <a:ext cx="104242" cy="1172718"/>
           </a:xfrm>
           <a:prstGeom prst="rect">
@@ -13530,7 +12576,7 @@
         </p:nvSpPr>
         <p:spPr>
           <a:xfrm>
-            <a:off x="2238451" y="3744468"/>
+            <a:off x="2238451" y="3653028"/>
             <a:ext cx="104242" cy="1172718"/>
           </a:xfrm>
           <a:prstGeom prst="rect">
@@ -13555,7 +12601,7 @@
         </p:nvSpPr>
         <p:spPr>
           <a:xfrm>
-            <a:off x="2525116" y="3744468"/>
+            <a:off x="2525116" y="3653028"/>
             <a:ext cx="104242" cy="1172718"/>
           </a:xfrm>
           <a:prstGeom prst="rect">
@@ -13580,7 +12626,7 @@
         </p:nvSpPr>
         <p:spPr>
           <a:xfrm>
-            <a:off x="2811780" y="3744468"/>
+            <a:off x="2811780" y="3653028"/>
             <a:ext cx="104242" cy="1172718"/>
           </a:xfrm>
           <a:prstGeom prst="rect">
@@ -13605,7 +12651,7 @@
         </p:nvSpPr>
         <p:spPr>
           <a:xfrm>
-            <a:off x="3246120" y="4178808"/>
+            <a:off x="3246120" y="4087368"/>
             <a:ext cx="390906" cy="347472"/>
           </a:xfrm>
           <a:prstGeom prst="rect">
@@ -13630,7 +12676,7 @@
         </p:nvSpPr>
         <p:spPr>
           <a:xfrm>
-            <a:off x="3593592" y="3570732"/>
+            <a:off x="3593592" y="3479292"/>
             <a:ext cx="1389888" cy="1389888"/>
           </a:xfrm>
           <a:prstGeom prst="ellipse">
@@ -13655,7 +12701,7 @@
         </p:nvSpPr>
         <p:spPr>
           <a:xfrm>
-            <a:off x="4158234" y="2354580"/>
+            <a:off x="4158234" y="2263140"/>
             <a:ext cx="260604" cy="1303020"/>
           </a:xfrm>
           <a:prstGeom prst="rect">
@@ -13680,7 +12726,7 @@
         </p:nvSpPr>
         <p:spPr>
           <a:xfrm>
-            <a:off x="4158234" y="2354580"/>
+            <a:off x="4158234" y="2263140"/>
             <a:ext cx="2475738" cy="260604"/>
           </a:xfrm>
           <a:prstGeom prst="rect">
@@ -13705,7 +12751,7 @@
         </p:nvSpPr>
         <p:spPr>
           <a:xfrm>
-            <a:off x="4809744" y="4309110"/>
+            <a:off x="4809744" y="4217670"/>
             <a:ext cx="1824228" cy="260604"/>
           </a:xfrm>
           <a:prstGeom prst="rect">
@@ -13730,7 +12776,7 @@
         </p:nvSpPr>
         <p:spPr>
           <a:xfrm>
-            <a:off x="5591556" y="4178808"/>
+            <a:off x="5591556" y="4087368"/>
             <a:ext cx="434340" cy="521208"/>
           </a:xfrm>
           <a:prstGeom prst="rect">
@@ -13755,7 +12801,7 @@
         </p:nvSpPr>
         <p:spPr>
           <a:xfrm>
-            <a:off x="5287518" y="2224278"/>
+            <a:off x="5287518" y="2132838"/>
             <a:ext cx="521208" cy="521208"/>
           </a:xfrm>
           <a:prstGeom prst="diamond">
@@ -13780,7 +12826,7 @@
         </p:nvSpPr>
         <p:spPr>
           <a:xfrm>
-            <a:off x="5522062" y="2024482"/>
+            <a:off x="5522062" y="1933042"/>
             <a:ext cx="52121" cy="217170"/>
           </a:xfrm>
           <a:prstGeom prst="rect">
@@ -13805,7 +12851,7 @@
         </p:nvSpPr>
         <p:spPr>
           <a:xfrm>
-            <a:off x="5417820" y="1972361"/>
+            <a:off x="5417820" y="1880921"/>
             <a:ext cx="260604" cy="69494"/>
           </a:xfrm>
           <a:prstGeom prst="rect">
@@ -13830,7 +12876,7 @@
         </p:nvSpPr>
         <p:spPr>
           <a:xfrm>
-            <a:off x="4696816" y="2180844"/>
+            <a:off x="4696816" y="2089404"/>
             <a:ext cx="86868" cy="191110"/>
           </a:xfrm>
           <a:prstGeom prst="rect">
@@ -13855,7 +12901,7 @@
         </p:nvSpPr>
         <p:spPr>
           <a:xfrm>
-            <a:off x="4592574" y="1920240"/>
+            <a:off x="4592574" y="1828800"/>
             <a:ext cx="304038" cy="260604"/>
           </a:xfrm>
           <a:prstGeom prst="roundRect">
@@ -13882,7 +12928,7 @@
         </p:nvSpPr>
         <p:spPr>
           <a:xfrm>
-            <a:off x="5661050" y="3918204"/>
+            <a:off x="5661050" y="3826764"/>
             <a:ext cx="260604" cy="260604"/>
           </a:xfrm>
           <a:prstGeom prst="roundRect">
@@ -13909,7 +12955,7 @@
         </p:nvSpPr>
         <p:spPr>
           <a:xfrm>
-            <a:off x="2698852" y="2615184"/>
+            <a:off x="2698852" y="2523744"/>
             <a:ext cx="52121" cy="1042416"/>
           </a:xfrm>
           <a:prstGeom prst="rect">
@@ -13934,7 +12980,7 @@
         </p:nvSpPr>
         <p:spPr>
           <a:xfrm>
-            <a:off x="2377440" y="1920240"/>
+            <a:off x="2377440" y="1828800"/>
             <a:ext cx="1389888" cy="694944"/>
           </a:xfrm>
           <a:prstGeom prst="roundRect">
@@ -13961,7 +13007,7 @@
         </p:nvSpPr>
         <p:spPr>
           <a:xfrm>
-            <a:off x="3610966" y="1989734"/>
+            <a:off x="3610966" y="1898294"/>
             <a:ext cx="86868" cy="86868"/>
           </a:xfrm>
           <a:prstGeom prst="ellipse">
@@ -13986,7 +13032,7 @@
         </p:nvSpPr>
         <p:spPr>
           <a:xfrm>
-            <a:off x="2551176" y="2962656"/>
+            <a:off x="2551176" y="2871216"/>
             <a:ext cx="347472" cy="347472"/>
           </a:xfrm>
           <a:prstGeom prst="donut">
@@ -14011,7 +13057,7 @@
         </p:nvSpPr>
         <p:spPr>
           <a:xfrm>
-            <a:off x="3767328" y="2050542"/>
+            <a:off x="3767328" y="1959102"/>
             <a:ext cx="825246" cy="0"/>
           </a:xfrm>
           <a:prstGeom prst="line">
@@ -14034,7 +13080,7 @@
         </p:nvSpPr>
         <p:spPr>
           <a:xfrm>
-            <a:off x="2377440" y="1989734"/>
+            <a:off x="2377440" y="1898294"/>
             <a:ext cx="1216152" cy="260604"/>
           </a:xfrm>
           <a:prstGeom prst="rect">
@@ -14073,7 +13119,7 @@
         </p:nvSpPr>
         <p:spPr>
           <a:xfrm>
-            <a:off x="2377440" y="2267712"/>
+            <a:off x="2377440" y="2176272"/>
             <a:ext cx="1216152" cy="260604"/>
           </a:xfrm>
           <a:prstGeom prst="rect">
@@ -14112,7 +13158,7 @@
         </p:nvSpPr>
         <p:spPr>
           <a:xfrm>
-            <a:off x="1161288" y="4135374"/>
+            <a:off x="1161288" y="4043934"/>
             <a:ext cx="2084832" cy="347472"/>
           </a:xfrm>
           <a:prstGeom prst="rect">
@@ -14151,7 +13197,7 @@
         </p:nvSpPr>
         <p:spPr>
           <a:xfrm>
-            <a:off x="3593592" y="4091940"/>
+            <a:off x="3593592" y="4000500"/>
             <a:ext cx="1389888" cy="347472"/>
           </a:xfrm>
           <a:prstGeom prst="rect">
@@ -14190,7 +13236,7 @@
         </p:nvSpPr>
         <p:spPr>
           <a:xfrm>
-            <a:off x="379476" y="2788920"/>
+            <a:off x="379476" y="2697480"/>
             <a:ext cx="2041398" cy="434340"/>
           </a:xfrm>
           <a:prstGeom prst="rect">
@@ -14229,7 +13275,7 @@
         </p:nvSpPr>
         <p:spPr>
           <a:xfrm>
-            <a:off x="4375404" y="1590142"/>
+            <a:off x="4375404" y="1498702"/>
             <a:ext cx="1911096" cy="260604"/>
           </a:xfrm>
           <a:prstGeom prst="rect">
@@ -14268,7 +13314,7 @@
         </p:nvSpPr>
         <p:spPr>
           <a:xfrm>
-            <a:off x="5070348" y="2788920"/>
+            <a:off x="5070348" y="2697480"/>
             <a:ext cx="1476756" cy="260604"/>
           </a:xfrm>
           <a:prstGeom prst="rect">
@@ -14307,7 +13353,7 @@
         </p:nvSpPr>
         <p:spPr>
           <a:xfrm>
-            <a:off x="4896612" y="4743450"/>
+            <a:off x="4896612" y="4652010"/>
             <a:ext cx="1824228" cy="434340"/>
           </a:xfrm>
           <a:prstGeom prst="rect">
@@ -14357,18 +13403,57 @@
       </p:sp>
       <p:sp>
         <p:nvSpPr>
-          <p:cNvPr id="37" name="Shape 35"/>
+          <p:cNvPr id="37" name="Text 35"/>
+          <p:cNvSpPr txBox="1"/>
+          <p:nvPr/>
+        </p:nvSpPr>
+        <p:spPr>
+          <a:xfrm>
+            <a:off x="640080" y="5257800"/>
+            <a:ext cx="5943600" cy="274320"/>
+          </a:xfrm>
+          <a:prstGeom prst="rect">
+            <a:avLst/>
+          </a:prstGeom>
+          <a:noFill/>
+          <a:ln/>
+        </p:spPr>
+        <p:txBody>
+          <a:bodyPr wrap="square" lIns="0" tIns="0" rIns="0" bIns="0" rtlCol="0" anchor="t"/>
+          <a:lstStyle/>
+          <a:p>
+            <a:pPr indent="0" marL="0">
+              <a:buNone/>
+            </a:pPr>
+            <a:r>
+              <a:rPr lang="en-US" sz="1200" i="1" dirty="0">
+                <a:solidFill>
+                  <a:srgbClr val="55655D"/>
+                </a:solidFill>
+                <a:latin typeface="Calibri" pitchFamily="34" charset="0"/>
+                <a:ea typeface="Calibri" pitchFamily="34" charset="-122"/>
+                <a:cs typeface="Calibri" pitchFamily="34" charset="-120"/>
+              </a:rPr>
+              <a:t>VFD = control speed instead of strangling the pipe.</a:t>
+            </a:r>
+            <a:endParaRPr lang="en-US" sz="1200" dirty="0"/>
+          </a:p>
+        </p:txBody>
+      </p:sp>
+      <p:sp>
+        <p:nvSpPr>
+          <p:cNvPr id="38" name="Shape 36"/>
           <p:cNvSpPr/>
           <p:nvPr/>
         </p:nvSpPr>
         <p:spPr>
           <a:xfrm>
-            <a:off x="7223760" y="1417320"/>
-            <a:ext cx="4434840" cy="850392"/>
+            <a:off x="7223760" y="1371600"/>
+            <a:ext cx="4434840" cy="749808"/>
           </a:xfrm>
           <a:prstGeom prst="roundRect">
             <a:avLst>
-              <a:gd name="adj" fmla="val 8602"/>
+              <a:gd name="adj" fmla="val 9756"/>
             </a:avLst>
           </a:prstGeom>
           <a:solidFill>
@@ -14384,13 +13469,13 @@
       </p:sp>
       <p:sp>
         <p:nvSpPr>
-          <p:cNvPr id="38" name="Shape 36"/>
+          <p:cNvPr id="39" name="Shape 37"/>
           <p:cNvSpPr/>
           <p:nvPr/>
         </p:nvSpPr>
         <p:spPr>
           <a:xfrm>
-            <a:off x="7360920" y="1554480"/>
+            <a:off x="7360920" y="1472184"/>
             <a:ext cx="548640" cy="548640"/>
           </a:xfrm>
           <a:prstGeom prst="ellipse">
@@ -14409,7 +13494,7 @@
       </p:sp>
       <p:pic>
         <p:nvPicPr>
-          <p:cNvPr id="39" name="Image 0" descr="preencoded.png">    </p:cNvPr>
+          <p:cNvPr id="40" name="Image 0" descr="preencoded.png">    </p:cNvPr>
           <p:cNvPicPr>
             <a:picLocks noChangeAspect="1"/>
           </p:cNvPicPr>
@@ -14423,7 +13508,7 @@
         </p:blipFill>
         <p:spPr>
           <a:xfrm>
-            <a:off x="7492594" y="1686154"/>
+            <a:off x="7492594" y="1603858"/>
             <a:ext cx="285293" cy="285293"/>
           </a:xfrm>
           <a:prstGeom prst="rect">
@@ -14433,14 +13518,14 @@
       </p:pic>
       <p:sp>
         <p:nvSpPr>
-          <p:cNvPr id="40" name="Text 37"/>
-          <p:cNvSpPr txBox="1"/>
-          <p:nvPr/>
-        </p:nvSpPr>
-        <p:spPr>
-          <a:xfrm>
-            <a:off x="8092440" y="1508760"/>
-            <a:ext cx="3474720" cy="685800"/>
+          <p:cNvPr id="41" name="Text 38"/>
+          <p:cNvSpPr txBox="1"/>
+          <p:nvPr/>
+        </p:nvSpPr>
+        <p:spPr>
+          <a:xfrm>
+            <a:off x="8092440" y="1435608"/>
+            <a:ext cx="3474720" cy="640080"/>
           </a:xfrm>
           <a:prstGeom prst="rect">
             <a:avLst/>
@@ -14489,18 +13574,18 @@
       </p:sp>
       <p:sp>
         <p:nvSpPr>
-          <p:cNvPr id="41" name="Shape 38"/>
+          <p:cNvPr id="42" name="Shape 39"/>
           <p:cNvSpPr/>
           <p:nvPr/>
         </p:nvSpPr>
         <p:spPr>
           <a:xfrm>
-            <a:off x="7223760" y="2404872"/>
-            <a:ext cx="4434840" cy="850392"/>
+            <a:off x="7223760" y="2240280"/>
+            <a:ext cx="4434840" cy="749808"/>
           </a:xfrm>
           <a:prstGeom prst="roundRect">
             <a:avLst>
-              <a:gd name="adj" fmla="val 8602"/>
+              <a:gd name="adj" fmla="val 9756"/>
             </a:avLst>
           </a:prstGeom>
           <a:solidFill>
@@ -14516,13 +13601,13 @@
       </p:sp>
       <p:sp>
         <p:nvSpPr>
-          <p:cNvPr id="42" name="Shape 39"/>
+          <p:cNvPr id="43" name="Shape 40"/>
           <p:cNvSpPr/>
           <p:nvPr/>
         </p:nvSpPr>
         <p:spPr>
           <a:xfrm>
-            <a:off x="7360920" y="2542032"/>
+            <a:off x="7360920" y="2340864"/>
             <a:ext cx="548640" cy="548640"/>
           </a:xfrm>
           <a:prstGeom prst="ellipse">
@@ -14541,7 +13626,7 @@
       </p:sp>
       <p:pic>
         <p:nvPicPr>
-          <p:cNvPr id="43" name="Image 1" descr="preencoded.png">    </p:cNvPr>
+          <p:cNvPr id="44" name="Image 1" descr="preencoded.png">    </p:cNvPr>
           <p:cNvPicPr>
             <a:picLocks noChangeAspect="1"/>
           </p:cNvPicPr>
@@ -14555,7 +13640,7 @@
         </p:blipFill>
         <p:spPr>
           <a:xfrm>
-            <a:off x="7492594" y="2673706"/>
+            <a:off x="7492594" y="2472538"/>
             <a:ext cx="285293" cy="285293"/>
           </a:xfrm>
           <a:prstGeom prst="rect">
@@ -14565,14 +13650,14 @@
       </p:pic>
       <p:sp>
         <p:nvSpPr>
-          <p:cNvPr id="44" name="Text 40"/>
-          <p:cNvSpPr txBox="1"/>
-          <p:nvPr/>
-        </p:nvSpPr>
-        <p:spPr>
-          <a:xfrm>
-            <a:off x="8092440" y="2496312"/>
-            <a:ext cx="3474720" cy="685800"/>
+          <p:cNvPr id="45" name="Text 41"/>
+          <p:cNvSpPr txBox="1"/>
+          <p:nvPr/>
+        </p:nvSpPr>
+        <p:spPr>
+          <a:xfrm>
+            <a:off x="8092440" y="2304288"/>
+            <a:ext cx="3474720" cy="640080"/>
           </a:xfrm>
           <a:prstGeom prst="rect">
             <a:avLst/>
@@ -14621,18 +13706,18 @@
       </p:sp>
       <p:sp>
         <p:nvSpPr>
-          <p:cNvPr id="45" name="Shape 41"/>
+          <p:cNvPr id="46" name="Shape 42"/>
           <p:cNvSpPr/>
           <p:nvPr/>
         </p:nvSpPr>
         <p:spPr>
           <a:xfrm>
-            <a:off x="7223760" y="3392424"/>
-            <a:ext cx="4434840" cy="850392"/>
+            <a:off x="7223760" y="3108960"/>
+            <a:ext cx="4434840" cy="749808"/>
           </a:xfrm>
           <a:prstGeom prst="roundRect">
             <a:avLst>
-              <a:gd name="adj" fmla="val 8602"/>
+              <a:gd name="adj" fmla="val 9756"/>
             </a:avLst>
           </a:prstGeom>
           <a:solidFill>
@@ -14648,13 +13733,13 @@
       </p:sp>
       <p:sp>
         <p:nvSpPr>
-          <p:cNvPr id="46" name="Shape 42"/>
+          <p:cNvPr id="47" name="Shape 43"/>
           <p:cNvSpPr/>
           <p:nvPr/>
         </p:nvSpPr>
         <p:spPr>
           <a:xfrm>
-            <a:off x="7360920" y="3529584"/>
+            <a:off x="7360920" y="3209544"/>
             <a:ext cx="548640" cy="548640"/>
           </a:xfrm>
           <a:prstGeom prst="ellipse">
@@ -14673,7 +13758,7 @@
       </p:sp>
       <p:pic>
         <p:nvPicPr>
-          <p:cNvPr id="47" name="Image 2" descr="preencoded.png">    </p:cNvPr>
+          <p:cNvPr id="48" name="Image 2" descr="preencoded.png">    </p:cNvPr>
           <p:cNvPicPr>
             <a:picLocks noChangeAspect="1"/>
           </p:cNvPicPr>
@@ -14687,7 +13772,7 @@
         </p:blipFill>
         <p:spPr>
           <a:xfrm>
-            <a:off x="7492594" y="3661258"/>
+            <a:off x="7492594" y="3341218"/>
             <a:ext cx="285293" cy="285293"/>
           </a:xfrm>
           <a:prstGeom prst="rect">
@@ -14697,14 +13782,14 @@
       </p:pic>
       <p:sp>
         <p:nvSpPr>
-          <p:cNvPr id="48" name="Text 43"/>
-          <p:cNvSpPr txBox="1"/>
-          <p:nvPr/>
-        </p:nvSpPr>
-        <p:spPr>
-          <a:xfrm>
-            <a:off x="8092440" y="3483864"/>
-            <a:ext cx="3474720" cy="685800"/>
+          <p:cNvPr id="49" name="Text 44"/>
+          <p:cNvSpPr txBox="1"/>
+          <p:nvPr/>
+        </p:nvSpPr>
+        <p:spPr>
+          <a:xfrm>
+            <a:off x="8092440" y="3172968"/>
+            <a:ext cx="3474720" cy="640080"/>
           </a:xfrm>
           <a:prstGeom prst="rect">
             <a:avLst/>
@@ -14753,18 +13838,18 @@
       </p:sp>
       <p:sp>
         <p:nvSpPr>
-          <p:cNvPr id="49" name="Shape 44"/>
+          <p:cNvPr id="50" name="Shape 45"/>
           <p:cNvSpPr/>
           <p:nvPr/>
         </p:nvSpPr>
         <p:spPr>
           <a:xfrm>
-            <a:off x="7223760" y="4379976"/>
-            <a:ext cx="4434840" cy="850392"/>
+            <a:off x="7223760" y="3977640"/>
+            <a:ext cx="4434840" cy="749808"/>
           </a:xfrm>
           <a:prstGeom prst="roundRect">
             <a:avLst>
-              <a:gd name="adj" fmla="val 8602"/>
+              <a:gd name="adj" fmla="val 9756"/>
             </a:avLst>
           </a:prstGeom>
           <a:solidFill>
@@ -14780,13 +13865,13 @@
       </p:sp>
       <p:sp>
         <p:nvSpPr>
-          <p:cNvPr id="50" name="Shape 45"/>
+          <p:cNvPr id="51" name="Shape 46"/>
           <p:cNvSpPr/>
           <p:nvPr/>
         </p:nvSpPr>
         <p:spPr>
           <a:xfrm>
-            <a:off x="7360920" y="4517136"/>
+            <a:off x="7360920" y="4078224"/>
             <a:ext cx="548640" cy="548640"/>
           </a:xfrm>
           <a:prstGeom prst="ellipse">
@@ -14805,7 +13890,7 @@
       </p:sp>
       <p:pic>
         <p:nvPicPr>
-          <p:cNvPr id="51" name="Image 3" descr="preencoded.png">    </p:cNvPr>
+          <p:cNvPr id="52" name="Image 3" descr="preencoded.png">    </p:cNvPr>
           <p:cNvPicPr>
             <a:picLocks noChangeAspect="1"/>
           </p:cNvPicPr>
@@ -14819,7 +13904,7 @@
         </p:blipFill>
         <p:spPr>
           <a:xfrm>
-            <a:off x="7492594" y="4648810"/>
+            <a:off x="7492594" y="4209898"/>
             <a:ext cx="285293" cy="285293"/>
           </a:xfrm>
           <a:prstGeom prst="rect">
@@ -14829,14 +13914,14 @@
       </p:pic>
       <p:sp>
         <p:nvSpPr>
-          <p:cNvPr id="52" name="Text 46"/>
-          <p:cNvSpPr txBox="1"/>
-          <p:nvPr/>
-        </p:nvSpPr>
-        <p:spPr>
-          <a:xfrm>
-            <a:off x="8092440" y="4471416"/>
-            <a:ext cx="3474720" cy="685800"/>
+          <p:cNvPr id="53" name="Text 47"/>
+          <p:cNvSpPr txBox="1"/>
+          <p:nvPr/>
+        </p:nvSpPr>
+        <p:spPr>
+          <a:xfrm>
+            <a:off x="8092440" y="4041648"/>
+            <a:ext cx="3474720" cy="640080"/>
           </a:xfrm>
           <a:prstGeom prst="rect">
             <a:avLst/>
@@ -14880,45 +13965,6 @@
               <a:t>For THIS pump, before capex</a:t>
             </a:r>
             <a:endParaRPr lang="en-US" sz="1700" dirty="0"/>
-          </a:p>
-        </p:txBody>
-      </p:sp>
-      <p:sp>
-        <p:nvSpPr>
-          <p:cNvPr id="53" name="Text 47"/>
-          <p:cNvSpPr txBox="1"/>
-          <p:nvPr/>
-        </p:nvSpPr>
-        <p:spPr>
-          <a:xfrm>
-            <a:off x="7223760" y="5394960"/>
-            <a:ext cx="4434840" cy="274320"/>
-          </a:xfrm>
-          <a:prstGeom prst="rect">
-            <a:avLst/>
-          </a:prstGeom>
-          <a:noFill/>
-          <a:ln/>
-        </p:spPr>
-        <p:txBody>
-          <a:bodyPr wrap="square" lIns="0" tIns="0" rIns="0" bIns="0" rtlCol="0" anchor="t"/>
-          <a:lstStyle/>
-          <a:p>
-            <a:pPr indent="0" marL="0">
-              <a:buNone/>
-            </a:pPr>
-            <a:r>
-              <a:rPr lang="en-US" sz="1200" i="1" dirty="0">
-                <a:solidFill>
-                  <a:srgbClr val="55655D"/>
-                </a:solidFill>
-                <a:latin typeface="Calibri" pitchFamily="34" charset="0"/>
-                <a:ea typeface="Calibri" pitchFamily="34" charset="-122"/>
-                <a:cs typeface="Calibri" pitchFamily="34" charset="-120"/>
-              </a:rPr>
-              <a:t>VFD = control speed instead of strangling the pipe.</a:t>
-            </a:r>
-            <a:endParaRPr lang="en-US" sz="1200" dirty="0"/>
           </a:p>
         </p:txBody>
       </p:sp>
@@ -14930,7 +13976,90 @@
         </p:nvSpPr>
         <p:spPr>
           <a:xfrm>
-            <a:off x="548640" y="5715000"/>
+            <a:off x="7223760" y="4846320"/>
+            <a:ext cx="4434840" cy="804672"/>
+          </a:xfrm>
+          <a:prstGeom prst="roundRect">
+            <a:avLst>
+              <a:gd name="adj" fmla="val 9091"/>
+            </a:avLst>
+          </a:prstGeom>
+          <a:solidFill>
+            <a:srgbClr val="E3F6E8"/>
+          </a:solidFill>
+          <a:ln w="19050">
+            <a:solidFill>
+              <a:srgbClr val="3DCD58"/>
+            </a:solidFill>
+            <a:prstDash val="solid"/>
+          </a:ln>
+        </p:spPr>
+      </p:sp>
+      <p:sp>
+        <p:nvSpPr>
+          <p:cNvPr id="55" name="Text 49"/>
+          <p:cNvSpPr txBox="1"/>
+          <p:nvPr/>
+        </p:nvSpPr>
+        <p:spPr>
+          <a:xfrm>
+            <a:off x="7315200" y="4873752"/>
+            <a:ext cx="4297680" cy="749808"/>
+          </a:xfrm>
+          <a:prstGeom prst="rect">
+            <a:avLst/>
+          </a:prstGeom>
+          <a:noFill/>
+          <a:ln/>
+        </p:spPr>
+        <p:txBody>
+          <a:bodyPr wrap="square" lIns="0" tIns="0" rIns="0" bIns="0" rtlCol="0" anchor="ctr"/>
+          <a:lstStyle/>
+          <a:p>
+            <a:pPr indent="0" marL="0">
+              <a:buNone/>
+            </a:pPr>
+            <a:r>
+              <a:rPr lang="en-US" sz="1200" b="1" dirty="0">
+                <a:solidFill>
+                  <a:srgbClr val="16261F"/>
+                </a:solidFill>
+                <a:latin typeface="Calibri" pitchFamily="34" charset="0"/>
+                <a:ea typeface="Calibri" pitchFamily="34" charset="-122"/>
+                <a:cs typeface="Calibri" pitchFamily="34" charset="-120"/>
+              </a:rPr>
+              <a:t>No flow meter · no pipe cutting · no shutdown</a:t>
+            </a:r>
+            <a:endParaRPr lang="en-US" sz="1200" dirty="0"/>
+          </a:p>
+          <a:p>
+            <a:pPr indent="0" marL="0">
+              <a:buNone/>
+            </a:pPr>
+            <a:r>
+              <a:rPr lang="en-US" sz="1200" dirty="0">
+                <a:solidFill>
+                  <a:srgbClr val="16261F"/>
+                </a:solidFill>
+                <a:latin typeface="Calibri" pitchFamily="34" charset="0"/>
+                <a:ea typeface="Calibri" pitchFamily="34" charset="-122"/>
+                <a:cs typeface="Calibri" pitchFamily="34" charset="-120"/>
+              </a:rPr>
+              <a:t>Sensors on existing gauge ports; owner keeps the data.</a:t>
+            </a:r>
+            <a:endParaRPr lang="en-US" sz="1200" dirty="0"/>
+          </a:p>
+        </p:txBody>
+      </p:sp>
+      <p:sp>
+        <p:nvSpPr>
+          <p:cNvPr id="56" name="Shape 50"/>
+          <p:cNvSpPr/>
+          <p:nvPr/>
+        </p:nvSpPr>
+        <p:spPr>
+          <a:xfrm>
+            <a:off x="548640" y="5760720"/>
             <a:ext cx="11109960" cy="594360"/>
           </a:xfrm>
           <a:prstGeom prst="roundRect">
@@ -14951,13 +14080,13 @@
       </p:sp>
       <p:sp>
         <p:nvSpPr>
-          <p:cNvPr id="55" name="Text 49"/>
-          <p:cNvSpPr txBox="1"/>
-          <p:nvPr/>
-        </p:nvSpPr>
-        <p:spPr>
-          <a:xfrm>
-            <a:off x="548640" y="5715000"/>
+          <p:cNvPr id="57" name="Text 51"/>
+          <p:cNvSpPr txBox="1"/>
+          <p:nvPr/>
+        </p:nvSpPr>
+        <p:spPr>
+          <a:xfrm>
+            <a:off x="548640" y="5760720"/>
             <a:ext cx="11109960" cy="594360"/>
           </a:xfrm>
           <a:prstGeom prst="rect">
@@ -15133,7 +14262,7 @@
                 <a:ea typeface="Calibri" pitchFamily="34" charset="-122"/>
                 <a:cs typeface="Calibri" pitchFamily="34" charset="-120"/>
               </a:rPr>
-              <a:t>Clamp on, log for a week or two, and let the maths find the waste.</a:t>
+              <a:t>Clamp on, log for a week or two, and let the maths find the waste. Curves below are the real pump.</a:t>
             </a:r>
             <a:endParaRPr lang="en-US" sz="1600" dirty="0"/>
           </a:p>
@@ -15987,7 +15116,7 @@
                 <a:ea typeface="Calibri" pitchFamily="34" charset="-122"/>
                 <a:cs typeface="Calibri" pitchFamily="34" charset="-120"/>
               </a:rPr>
-              <a:t>Throttled point vs VFD point (schematic)</a:t>
+              <a:t>Grundfos NB 65-160/157: head vs flow</a:t>
             </a:r>
             <a:endParaRPr lang="en-US" sz="1500" dirty="0"/>
           </a:p>
@@ -16001,7 +15130,7 @@
         </p:nvGraphicFramePr>
         <p:xfrm>
           <a:off x="6812280" y="1783080"/>
-          <a:ext cx="4754880" cy="3108960"/>
+          <a:ext cx="4754880" cy="3017520"/>
         </p:xfrm>
         <a:graphic xmlns:a="http://schemas.openxmlformats.org/drawingml/2006/main">
           <a:graphicData uri="http://schemas.openxmlformats.org/drawingml/2006/chart">
@@ -16017,8 +15146,8 @@
         </p:nvSpPr>
         <p:spPr>
           <a:xfrm>
-            <a:off x="6858000" y="4937760"/>
-            <a:ext cx="4663440" cy="1143000"/>
+            <a:off x="6858000" y="4846320"/>
+            <a:ext cx="4663440" cy="1234440"/>
           </a:xfrm>
           <a:prstGeom prst="rect">
             <a:avLst/>
@@ -16042,7 +15171,7 @@
                 <a:ea typeface="Calibri" pitchFamily="34" charset="-122"/>
                 <a:cs typeface="Calibri" pitchFamily="34" charset="-120"/>
               </a:rPr>
-              <a:t>Same flow, two ways to get it.</a:t>
+              <a:t>Off-peak hour (60% of peak demand, 61.6 m³/h)</a:t>
             </a:r>
             <a:endParaRPr lang="en-US" sz="1300" dirty="0"/>
           </a:p>
@@ -16059,7 +15188,7 @@
                 <a:ea typeface="Calibri" pitchFamily="34" charset="-122"/>
                 <a:cs typeface="Calibri" pitchFamily="34" charset="-120"/>
               </a:rPr>
-              <a:t>Throttled: pump pushes at full head, the valve burns the gap. VFD: the pump slows to just what the pipe needs. The gap is the wasted head, and it is priced in ₹.</a:t>
+              <a:t>Throttled: the pump delivers 31.7 m, the pipe needs 15.4 m (incl. 5% margin). The valve burns the gap. VFD: slow to 72% speed. That gap is what PumpRupee prices in ₹.</a:t>
             </a:r>
             <a:endParaRPr lang="en-US" sz="1300" dirty="0"/>
           </a:p>
@@ -20762,7 +19891,7 @@
                 <a:ea typeface="Calibri" pitchFamily="34" charset="-122"/>
                 <a:cs typeface="Calibri" pitchFamily="34" charset="-120"/>
               </a:rPr>
-              <a:t>Ecosystem Fit: Audit → Drive → Verify</a:t>
+              <a:t>Innovation: What's New, and What Isn't</a:t>
             </a:r>
             <a:endParaRPr lang="en-US" sz="3000" dirty="0"/>
           </a:p>
@@ -20801,7 +19930,7 @@
                 <a:ea typeface="Calibri" pitchFamily="34" charset="-122"/>
                 <a:cs typeface="Calibri" pitchFamily="34" charset="-120"/>
               </a:rPr>
-              <a:t>PumpRupee is the low-cost front door to VFD and energy-management adoption.</a:t>
+              <a:t>We build on proven tools. The new part is the integration for MSMEs.</a:t>
             </a:r>
             <a:endParaRPr lang="en-US" sz="1600" dirty="0"/>
           </a:p>
@@ -20816,11 +19945,11 @@
         <p:spPr>
           <a:xfrm>
             <a:off x="548640" y="1371600"/>
-            <a:ext cx="3611880" cy="1828800"/>
+            <a:ext cx="5120640" cy="3611880"/>
           </a:xfrm>
           <a:prstGeom prst="roundRect">
             <a:avLst>
-              <a:gd name="adj" fmla="val 4000"/>
+              <a:gd name="adj" fmla="val 2025"/>
             </a:avLst>
           </a:prstGeom>
           <a:solidFill>
@@ -20836,32 +19965,605 @@
       </p:sp>
       <p:sp>
         <p:nvSpPr>
-          <p:cNvPr id="5" name="Shape 3"/>
+          <p:cNvPr id="5" name="Text 3"/>
+          <p:cNvSpPr txBox="1"/>
+          <p:nvPr/>
+        </p:nvSpPr>
+        <p:spPr>
+          <a:xfrm>
+            <a:off x="731520" y="1444752"/>
+            <a:ext cx="4754880" cy="365760"/>
+          </a:xfrm>
+          <a:prstGeom prst="rect">
+            <a:avLst/>
+          </a:prstGeom>
+          <a:noFill/>
+          <a:ln/>
+        </p:spPr>
+        <p:txBody>
+          <a:bodyPr wrap="square" lIns="0" tIns="0" rIns="0" bIns="0" rtlCol="0" anchor="t"/>
+          <a:lstStyle/>
+          <a:p>
+            <a:pPr indent="0" marL="0">
+              <a:buNone/>
+            </a:pPr>
+            <a:r>
+              <a:rPr lang="en-US" sz="1700" b="1" dirty="0">
+                <a:solidFill>
+                  <a:srgbClr val="55655D"/>
+                </a:solidFill>
+                <a:latin typeface="Calibri" pitchFamily="34" charset="0"/>
+                <a:ea typeface="Calibri" pitchFamily="34" charset="-122"/>
+                <a:cs typeface="Calibri" pitchFamily="34" charset="-120"/>
+              </a:rPr>
+              <a:t>Already exists (we build on it)</a:t>
+            </a:r>
+            <a:endParaRPr lang="en-US" sz="1700" dirty="0"/>
+          </a:p>
+        </p:txBody>
+      </p:sp>
+      <p:sp>
+        <p:nvSpPr>
+          <p:cNvPr id="6" name="Shape 4"/>
           <p:cNvSpPr/>
           <p:nvPr/>
         </p:nvSpPr>
         <p:spPr>
           <a:xfrm>
-            <a:off x="685800" y="1481328"/>
-            <a:ext cx="502920" cy="502920"/>
+            <a:off x="749808" y="1993392"/>
+            <a:ext cx="164592" cy="164592"/>
           </a:xfrm>
           <a:prstGeom prst="ellipse">
             <a:avLst/>
           </a:prstGeom>
           <a:solidFill>
-            <a:srgbClr val="0E5A32"/>
+            <a:srgbClr val="9AA5A0"/>
           </a:solidFill>
           <a:ln w="12700">
             <a:solidFill>
-              <a:srgbClr val="0E5A32"/>
+              <a:srgbClr val="9AA5A0"/>
             </a:solidFill>
             <a:prstDash val="solid"/>
           </a:ln>
         </p:spPr>
       </p:sp>
+      <p:sp>
+        <p:nvSpPr>
+          <p:cNvPr id="7" name="Text 5"/>
+          <p:cNvSpPr txBox="1"/>
+          <p:nvPr/>
+        </p:nvSpPr>
+        <p:spPr>
+          <a:xfrm>
+            <a:off x="1051560" y="1874520"/>
+            <a:ext cx="4526280" cy="457200"/>
+          </a:xfrm>
+          <a:prstGeom prst="rect">
+            <a:avLst/>
+          </a:prstGeom>
+          <a:noFill/>
+          <a:ln/>
+        </p:spPr>
+        <p:txBody>
+          <a:bodyPr wrap="square" lIns="0" tIns="0" rIns="0" bIns="0" rtlCol="0" anchor="ctr"/>
+          <a:lstStyle/>
+          <a:p>
+            <a:pPr indent="0" marL="0">
+              <a:buNone/>
+            </a:pPr>
+            <a:r>
+              <a:rPr lang="en-US" sz="1300" b="1" dirty="0">
+                <a:solidFill>
+                  <a:srgbClr val="16261F"/>
+                </a:solidFill>
+                <a:latin typeface="Calibri" pitchFamily="34" charset="0"/>
+                <a:ea typeface="Calibri" pitchFamily="34" charset="-122"/>
+                <a:cs typeface="Calibri" pitchFamily="34" charset="-120"/>
+              </a:rPr>
+              <a:t>KSB PumpMeter</a:t>
+            </a:r>
+            <a:pPr indent="0" marL="0">
+              <a:buNone/>
+            </a:pPr>
+            <a:r>
+              <a:rPr lang="en-US" sz="1200" dirty="0">
+                <a:solidFill>
+                  <a:srgbClr val="55655D"/>
+                </a:solidFill>
+                <a:latin typeface="Calibri" pitchFamily="34" charset="0"/>
+                <a:ea typeface="Calibri" pitchFamily="34" charset="-122"/>
+                <a:cs typeface="Calibri" pitchFamily="34" charset="-120"/>
+              </a:rPr>
+              <a:t>  pump monitoring</a:t>
+            </a:r>
+            <a:endParaRPr lang="en-US" sz="1300" dirty="0"/>
+          </a:p>
+        </p:txBody>
+      </p:sp>
+      <p:sp>
+        <p:nvSpPr>
+          <p:cNvPr id="8" name="Shape 6"/>
+          <p:cNvSpPr/>
+          <p:nvPr/>
+        </p:nvSpPr>
+        <p:spPr>
+          <a:xfrm>
+            <a:off x="749808" y="2496312"/>
+            <a:ext cx="164592" cy="164592"/>
+          </a:xfrm>
+          <a:prstGeom prst="ellipse">
+            <a:avLst/>
+          </a:prstGeom>
+          <a:solidFill>
+            <a:srgbClr val="9AA5A0"/>
+          </a:solidFill>
+          <a:ln w="12700">
+            <a:solidFill>
+              <a:srgbClr val="9AA5A0"/>
+            </a:solidFill>
+            <a:prstDash val="solid"/>
+          </a:ln>
+        </p:spPr>
+      </p:sp>
+      <p:sp>
+        <p:nvSpPr>
+          <p:cNvPr id="9" name="Text 7"/>
+          <p:cNvSpPr txBox="1"/>
+          <p:nvPr/>
+        </p:nvSpPr>
+        <p:spPr>
+          <a:xfrm>
+            <a:off x="1051560" y="2377440"/>
+            <a:ext cx="4526280" cy="457200"/>
+          </a:xfrm>
+          <a:prstGeom prst="rect">
+            <a:avLst/>
+          </a:prstGeom>
+          <a:noFill/>
+          <a:ln/>
+        </p:spPr>
+        <p:txBody>
+          <a:bodyPr wrap="square" lIns="0" tIns="0" rIns="0" bIns="0" rtlCol="0" anchor="ctr"/>
+          <a:lstStyle/>
+          <a:p>
+            <a:pPr indent="0" marL="0">
+              <a:buNone/>
+            </a:pPr>
+            <a:r>
+              <a:rPr lang="en-US" sz="1300" b="1" dirty="0">
+                <a:solidFill>
+                  <a:srgbClr val="16261F"/>
+                </a:solidFill>
+                <a:latin typeface="Calibri" pitchFamily="34" charset="0"/>
+                <a:ea typeface="Calibri" pitchFamily="34" charset="-122"/>
+                <a:cs typeface="Calibri" pitchFamily="34" charset="-120"/>
+              </a:rPr>
+              <a:t>US DOE PSAT</a:t>
+            </a:r>
+            <a:pPr indent="0" marL="0">
+              <a:buNone/>
+            </a:pPr>
+            <a:r>
+              <a:rPr lang="en-US" sz="1200" dirty="0">
+                <a:solidFill>
+                  <a:srgbClr val="55655D"/>
+                </a:solidFill>
+                <a:latin typeface="Calibri" pitchFamily="34" charset="0"/>
+                <a:ea typeface="Calibri" pitchFamily="34" charset="-122"/>
+                <a:cs typeface="Calibri" pitchFamily="34" charset="-120"/>
+              </a:rPr>
+              <a:t>  pump-system assessment tool</a:t>
+            </a:r>
+            <a:endParaRPr lang="en-US" sz="1300" dirty="0"/>
+          </a:p>
+        </p:txBody>
+      </p:sp>
+      <p:sp>
+        <p:nvSpPr>
+          <p:cNvPr id="10" name="Shape 8"/>
+          <p:cNvSpPr/>
+          <p:nvPr/>
+        </p:nvSpPr>
+        <p:spPr>
+          <a:xfrm>
+            <a:off x="749808" y="2999232"/>
+            <a:ext cx="164592" cy="164592"/>
+          </a:xfrm>
+          <a:prstGeom prst="ellipse">
+            <a:avLst/>
+          </a:prstGeom>
+          <a:solidFill>
+            <a:srgbClr val="9AA5A0"/>
+          </a:solidFill>
+          <a:ln w="12700">
+            <a:solidFill>
+              <a:srgbClr val="9AA5A0"/>
+            </a:solidFill>
+            <a:prstDash val="solid"/>
+          </a:ln>
+        </p:spPr>
+      </p:sp>
+      <p:sp>
+        <p:nvSpPr>
+          <p:cNvPr id="11" name="Text 9"/>
+          <p:cNvSpPr txBox="1"/>
+          <p:nvPr/>
+        </p:nvSpPr>
+        <p:spPr>
+          <a:xfrm>
+            <a:off x="1051560" y="2880360"/>
+            <a:ext cx="4526280" cy="457200"/>
+          </a:xfrm>
+          <a:prstGeom prst="rect">
+            <a:avLst/>
+          </a:prstGeom>
+          <a:noFill/>
+          <a:ln/>
+        </p:spPr>
+        <p:txBody>
+          <a:bodyPr wrap="square" lIns="0" tIns="0" rIns="0" bIns="0" rtlCol="0" anchor="ctr"/>
+          <a:lstStyle/>
+          <a:p>
+            <a:pPr indent="0" marL="0">
+              <a:buNone/>
+            </a:pPr>
+            <a:r>
+              <a:rPr lang="en-US" sz="1300" b="1" dirty="0">
+                <a:solidFill>
+                  <a:srgbClr val="16261F"/>
+                </a:solidFill>
+                <a:latin typeface="Calibri" pitchFamily="34" charset="0"/>
+                <a:ea typeface="Calibri" pitchFamily="34" charset="-122"/>
+                <a:cs typeface="Calibri" pitchFamily="34" charset="-120"/>
+              </a:rPr>
+              <a:t>Samotics</a:t>
+            </a:r>
+            <a:pPr indent="0" marL="0">
+              <a:buNone/>
+            </a:pPr>
+            <a:r>
+              <a:rPr lang="en-US" sz="1200" dirty="0">
+                <a:solidFill>
+                  <a:srgbClr val="55655D"/>
+                </a:solidFill>
+                <a:latin typeface="Calibri" pitchFamily="34" charset="0"/>
+                <a:ea typeface="Calibri" pitchFamily="34" charset="-122"/>
+                <a:cs typeface="Calibri" pitchFamily="34" charset="-120"/>
+              </a:rPr>
+              <a:t>  motor-current pump efficiency</a:t>
+            </a:r>
+            <a:endParaRPr lang="en-US" sz="1300" dirty="0"/>
+          </a:p>
+        </p:txBody>
+      </p:sp>
+      <p:sp>
+        <p:nvSpPr>
+          <p:cNvPr id="12" name="Shape 10"/>
+          <p:cNvSpPr/>
+          <p:nvPr/>
+        </p:nvSpPr>
+        <p:spPr>
+          <a:xfrm>
+            <a:off x="749808" y="3502152"/>
+            <a:ext cx="164592" cy="164592"/>
+          </a:xfrm>
+          <a:prstGeom prst="ellipse">
+            <a:avLst/>
+          </a:prstGeom>
+          <a:solidFill>
+            <a:srgbClr val="9AA5A0"/>
+          </a:solidFill>
+          <a:ln w="12700">
+            <a:solidFill>
+              <a:srgbClr val="9AA5A0"/>
+            </a:solidFill>
+            <a:prstDash val="solid"/>
+          </a:ln>
+        </p:spPr>
+      </p:sp>
+      <p:sp>
+        <p:nvSpPr>
+          <p:cNvPr id="13" name="Text 11"/>
+          <p:cNvSpPr txBox="1"/>
+          <p:nvPr/>
+        </p:nvSpPr>
+        <p:spPr>
+          <a:xfrm>
+            <a:off x="1051560" y="3383280"/>
+            <a:ext cx="4526280" cy="457200"/>
+          </a:xfrm>
+          <a:prstGeom prst="rect">
+            <a:avLst/>
+          </a:prstGeom>
+          <a:noFill/>
+          <a:ln/>
+        </p:spPr>
+        <p:txBody>
+          <a:bodyPr wrap="square" lIns="0" tIns="0" rIns="0" bIns="0" rtlCol="0" anchor="ctr"/>
+          <a:lstStyle/>
+          <a:p>
+            <a:pPr indent="0" marL="0">
+              <a:buNone/>
+            </a:pPr>
+            <a:r>
+              <a:rPr lang="en-US" sz="1300" b="1" dirty="0">
+                <a:solidFill>
+                  <a:srgbClr val="16261F"/>
+                </a:solidFill>
+                <a:latin typeface="Calibri" pitchFamily="34" charset="0"/>
+                <a:ea typeface="Calibri" pitchFamily="34" charset="-122"/>
+                <a:cs typeface="Calibri" pitchFamily="34" charset="-120"/>
+              </a:rPr>
+              <a:t>Schneider Altivar Process</a:t>
+            </a:r>
+            <a:pPr indent="0" marL="0">
+              <a:buNone/>
+            </a:pPr>
+            <a:r>
+              <a:rPr lang="en-US" sz="1200" dirty="0">
+                <a:solidFill>
+                  <a:srgbClr val="55655D"/>
+                </a:solidFill>
+                <a:latin typeface="Calibri" pitchFamily="34" charset="0"/>
+                <a:ea typeface="Calibri" pitchFamily="34" charset="-122"/>
+                <a:cs typeface="Calibri" pitchFamily="34" charset="-120"/>
+              </a:rPr>
+              <a:t>  sensorless flow in the drive</a:t>
+            </a:r>
+            <a:endParaRPr lang="en-US" sz="1300" dirty="0"/>
+          </a:p>
+        </p:txBody>
+      </p:sp>
+      <p:sp>
+        <p:nvSpPr>
+          <p:cNvPr id="14" name="Shape 12"/>
+          <p:cNvSpPr/>
+          <p:nvPr/>
+        </p:nvSpPr>
+        <p:spPr>
+          <a:xfrm>
+            <a:off x="749808" y="4005072"/>
+            <a:ext cx="164592" cy="164592"/>
+          </a:xfrm>
+          <a:prstGeom prst="ellipse">
+            <a:avLst/>
+          </a:prstGeom>
+          <a:solidFill>
+            <a:srgbClr val="9AA5A0"/>
+          </a:solidFill>
+          <a:ln w="12700">
+            <a:solidFill>
+              <a:srgbClr val="9AA5A0"/>
+            </a:solidFill>
+            <a:prstDash val="solid"/>
+          </a:ln>
+        </p:spPr>
+      </p:sp>
+      <p:sp>
+        <p:nvSpPr>
+          <p:cNvPr id="15" name="Text 13"/>
+          <p:cNvSpPr txBox="1"/>
+          <p:nvPr/>
+        </p:nvSpPr>
+        <p:spPr>
+          <a:xfrm>
+            <a:off x="1051560" y="3886200"/>
+            <a:ext cx="4526280" cy="457200"/>
+          </a:xfrm>
+          <a:prstGeom prst="rect">
+            <a:avLst/>
+          </a:prstGeom>
+          <a:noFill/>
+          <a:ln/>
+        </p:spPr>
+        <p:txBody>
+          <a:bodyPr wrap="square" lIns="0" tIns="0" rIns="0" bIns="0" rtlCol="0" anchor="ctr"/>
+          <a:lstStyle/>
+          <a:p>
+            <a:pPr indent="0" marL="0">
+              <a:buNone/>
+            </a:pPr>
+            <a:r>
+              <a:rPr lang="en-US" sz="1300" b="1" dirty="0">
+                <a:solidFill>
+                  <a:srgbClr val="16261F"/>
+                </a:solidFill>
+                <a:latin typeface="Calibri" pitchFamily="34" charset="0"/>
+                <a:ea typeface="Calibri" pitchFamily="34" charset="-122"/>
+                <a:cs typeface="Calibri" pitchFamily="34" charset="-120"/>
+              </a:rPr>
+              <a:t>EcoStruxure, Indian IoT vendors, ESCOs</a:t>
+            </a:r>
+            <a:pPr indent="0" marL="0">
+              <a:buNone/>
+            </a:pPr>
+            <a:r>
+              <a:rPr lang="en-US" sz="1200" dirty="0">
+                <a:solidFill>
+                  <a:srgbClr val="55655D"/>
+                </a:solidFill>
+                <a:latin typeface="Calibri" pitchFamily="34" charset="0"/>
+                <a:ea typeface="Calibri" pitchFamily="34" charset="-122"/>
+                <a:cs typeface="Calibri" pitchFamily="34" charset="-120"/>
+              </a:rPr>
+              <a:t>  energy monitoring and audits</a:t>
+            </a:r>
+            <a:endParaRPr lang="en-US" sz="1300" dirty="0"/>
+          </a:p>
+        </p:txBody>
+      </p:sp>
+      <p:sp>
+        <p:nvSpPr>
+          <p:cNvPr id="16" name="Shape 14"/>
+          <p:cNvSpPr/>
+          <p:nvPr/>
+        </p:nvSpPr>
+        <p:spPr>
+          <a:xfrm>
+            <a:off x="749808" y="4507992"/>
+            <a:ext cx="164592" cy="164592"/>
+          </a:xfrm>
+          <a:prstGeom prst="ellipse">
+            <a:avLst/>
+          </a:prstGeom>
+          <a:solidFill>
+            <a:srgbClr val="9AA5A0"/>
+          </a:solidFill>
+          <a:ln w="12700">
+            <a:solidFill>
+              <a:srgbClr val="9AA5A0"/>
+            </a:solidFill>
+            <a:prstDash val="solid"/>
+          </a:ln>
+        </p:spPr>
+      </p:sp>
+      <p:sp>
+        <p:nvSpPr>
+          <p:cNvPr id="17" name="Text 15"/>
+          <p:cNvSpPr txBox="1"/>
+          <p:nvPr/>
+        </p:nvSpPr>
+        <p:spPr>
+          <a:xfrm>
+            <a:off x="1051560" y="4389120"/>
+            <a:ext cx="4526280" cy="457200"/>
+          </a:xfrm>
+          <a:prstGeom prst="rect">
+            <a:avLst/>
+          </a:prstGeom>
+          <a:noFill/>
+          <a:ln/>
+        </p:spPr>
+        <p:txBody>
+          <a:bodyPr wrap="square" lIns="0" tIns="0" rIns="0" bIns="0" rtlCol="0" anchor="ctr"/>
+          <a:lstStyle/>
+          <a:p>
+            <a:pPr indent="0" marL="0">
+              <a:buNone/>
+            </a:pPr>
+            <a:r>
+              <a:rPr lang="en-US" sz="1300" b="1" dirty="0">
+                <a:solidFill>
+                  <a:srgbClr val="16261F"/>
+                </a:solidFill>
+                <a:latin typeface="Calibri" pitchFamily="34" charset="0"/>
+                <a:ea typeface="Calibri" pitchFamily="34" charset="-122"/>
+                <a:cs typeface="Calibri" pitchFamily="34" charset="-120"/>
+              </a:rPr>
+              <a:t>Shapley split, CUSUM, calibration</a:t>
+            </a:r>
+            <a:pPr indent="0" marL="0">
+              <a:buNone/>
+            </a:pPr>
+            <a:r>
+              <a:rPr lang="en-US" sz="1200" dirty="0">
+                <a:solidFill>
+                  <a:srgbClr val="55655D"/>
+                </a:solidFill>
+                <a:latin typeface="Calibri" pitchFamily="34" charset="0"/>
+                <a:ea typeface="Calibri" pitchFamily="34" charset="-122"/>
+                <a:cs typeface="Calibri" pitchFamily="34" charset="-120"/>
+              </a:rPr>
+              <a:t>  known methods, applied here</a:t>
+            </a:r>
+            <a:endParaRPr lang="en-US" sz="1300" dirty="0"/>
+          </a:p>
+        </p:txBody>
+      </p:sp>
+      <p:sp>
+        <p:nvSpPr>
+          <p:cNvPr id="18" name="Shape 16"/>
+          <p:cNvSpPr/>
+          <p:nvPr/>
+        </p:nvSpPr>
+        <p:spPr>
+          <a:xfrm>
+            <a:off x="5788152" y="2971800"/>
+            <a:ext cx="457200" cy="457200"/>
+          </a:xfrm>
+          <a:prstGeom prst="mathPlus">
+            <a:avLst/>
+          </a:prstGeom>
+          <a:solidFill>
+            <a:srgbClr val="3DCD58"/>
+          </a:solidFill>
+          <a:ln w="12700">
+            <a:solidFill>
+              <a:srgbClr val="3DCD58"/>
+            </a:solidFill>
+            <a:prstDash val="solid"/>
+          </a:ln>
+        </p:spPr>
+      </p:sp>
+      <p:sp>
+        <p:nvSpPr>
+          <p:cNvPr id="19" name="Shape 17"/>
+          <p:cNvSpPr/>
+          <p:nvPr/>
+        </p:nvSpPr>
+        <p:spPr>
+          <a:xfrm>
+            <a:off x="6355080" y="1371600"/>
+            <a:ext cx="5303520" cy="3611880"/>
+          </a:xfrm>
+          <a:prstGeom prst="roundRect">
+            <a:avLst>
+              <a:gd name="adj" fmla="val 2025"/>
+            </a:avLst>
+          </a:prstGeom>
+          <a:solidFill>
+            <a:srgbClr val="E3F6E8"/>
+          </a:solidFill>
+          <a:ln w="31750">
+            <a:solidFill>
+              <a:srgbClr val="3DCD58"/>
+            </a:solidFill>
+            <a:prstDash val="solid"/>
+          </a:ln>
+        </p:spPr>
+      </p:sp>
+      <p:sp>
+        <p:nvSpPr>
+          <p:cNvPr id="20" name="Text 18"/>
+          <p:cNvSpPr txBox="1"/>
+          <p:nvPr/>
+        </p:nvSpPr>
+        <p:spPr>
+          <a:xfrm>
+            <a:off x="6537960" y="1444752"/>
+            <a:ext cx="4937760" cy="365760"/>
+          </a:xfrm>
+          <a:prstGeom prst="rect">
+            <a:avLst/>
+          </a:prstGeom>
+          <a:noFill/>
+          <a:ln/>
+        </p:spPr>
+        <p:txBody>
+          <a:bodyPr wrap="square" lIns="0" tIns="0" rIns="0" bIns="0" rtlCol="0" anchor="t"/>
+          <a:lstStyle/>
+          <a:p>
+            <a:pPr indent="0" marL="0">
+              <a:buNone/>
+            </a:pPr>
+            <a:r>
+              <a:rPr lang="en-US" sz="1700" b="1" dirty="0">
+                <a:solidFill>
+                  <a:srgbClr val="0E5A32"/>
+                </a:solidFill>
+                <a:latin typeface="Calibri" pitchFamily="34" charset="0"/>
+                <a:ea typeface="Calibri" pitchFamily="34" charset="-122"/>
+                <a:cs typeface="Calibri" pitchFamily="34" charset="-120"/>
+              </a:rPr>
+              <a:t>What PumpRupee adds: five answers</a:t>
+            </a:r>
+            <a:endParaRPr lang="en-US" sz="1700" dirty="0"/>
+          </a:p>
+        </p:txBody>
+      </p:sp>
       <p:pic>
         <p:nvPicPr>
-          <p:cNvPr id="6" name="Image 0" descr="preencoded.png">    </p:cNvPr>
+          <p:cNvPr id="21" name="Image 0" descr="preencoded.png">    </p:cNvPr>
           <p:cNvPicPr>
             <a:picLocks noChangeAspect="1"/>
           </p:cNvPicPr>
@@ -20875,8 +20577,8 @@
         </p:blipFill>
         <p:spPr>
           <a:xfrm>
-            <a:off x="806501" y="1602029"/>
-            <a:ext cx="261518" cy="261518"/>
+            <a:off x="6537960" y="1965960"/>
+            <a:ext cx="274320" cy="274320"/>
           </a:xfrm>
           <a:prstGeom prst="rect">
             <a:avLst/>
@@ -20885,137 +20587,63 @@
       </p:pic>
       <p:sp>
         <p:nvSpPr>
-          <p:cNvPr id="7" name="Text 4"/>
-          <p:cNvSpPr txBox="1"/>
-          <p:nvPr/>
-        </p:nvSpPr>
-        <p:spPr>
-          <a:xfrm>
-            <a:off x="1325880" y="1481328"/>
-            <a:ext cx="2651760" cy="502920"/>
-          </a:xfrm>
-          <a:prstGeom prst="rect">
-            <a:avLst/>
-          </a:prstGeom>
-          <a:noFill/>
-          <a:ln/>
-        </p:spPr>
-        <p:txBody>
-          <a:bodyPr wrap="square" lIns="0" tIns="0" rIns="0" bIns="0" rtlCol="0" anchor="ctr"/>
+          <p:cNvPr id="22" name="Text 19"/>
+          <p:cNvSpPr txBox="1"/>
+          <p:nvPr/>
+        </p:nvSpPr>
+        <p:spPr>
+          <a:xfrm>
+            <a:off x="6949440" y="1874520"/>
+            <a:ext cx="4617720" cy="530352"/>
+          </a:xfrm>
+          <a:prstGeom prst="rect">
+            <a:avLst/>
+          </a:prstGeom>
+          <a:noFill/>
+          <a:ln/>
+        </p:spPr>
+        <p:txBody>
+          <a:bodyPr wrap="square" lIns="0" tIns="0" rIns="0" bIns="0" rtlCol="0" anchor="t"/>
           <a:lstStyle/>
           <a:p>
             <a:pPr indent="0" marL="0">
               <a:buNone/>
             </a:pPr>
             <a:r>
-              <a:rPr lang="en-US" sz="2000" b="1" dirty="0">
-                <a:solidFill>
-                  <a:srgbClr val="0E5A32"/>
-                </a:solidFill>
-                <a:latin typeface="Calibri" pitchFamily="34" charset="0"/>
-                <a:ea typeface="Calibri" pitchFamily="34" charset="-122"/>
-                <a:cs typeface="Calibri" pitchFamily="34" charset="-120"/>
-              </a:rPr>
-              <a:t>Electrify</a:t>
-            </a:r>
-            <a:endParaRPr lang="en-US" sz="2000" dirty="0"/>
-          </a:p>
-        </p:txBody>
-      </p:sp>
-      <p:sp>
-        <p:nvSpPr>
-          <p:cNvPr id="8" name="Text 5"/>
-          <p:cNvSpPr txBox="1"/>
-          <p:nvPr/>
-        </p:nvSpPr>
-        <p:spPr>
-          <a:xfrm>
-            <a:off x="685800" y="2103120"/>
-            <a:ext cx="3337560" cy="1051560"/>
-          </a:xfrm>
-          <a:prstGeom prst="rect">
-            <a:avLst/>
-          </a:prstGeom>
-          <a:noFill/>
-          <a:ln/>
-        </p:spPr>
-        <p:txBody>
-          <a:bodyPr wrap="square" lIns="0" tIns="0" rIns="0" bIns="0" rtlCol="0" anchor="t"/>
-          <a:lstStyle/>
+              <a:rPr lang="en-US" sz="1300" b="1" dirty="0">
+                <a:solidFill>
+                  <a:srgbClr val="16261F"/>
+                </a:solidFill>
+                <a:latin typeface="Calibri" pitchFamily="34" charset="0"/>
+                <a:ea typeface="Calibri" pitchFamily="34" charset="-122"/>
+                <a:cs typeface="Calibri" pitchFamily="34" charset="-120"/>
+              </a:rPr>
+              <a:t>How many ₹ is this pump wasting, and why?</a:t>
+            </a:r>
+            <a:endParaRPr lang="en-US" sz="1300" dirty="0"/>
+          </a:p>
           <a:p>
             <a:pPr indent="0" marL="0">
               <a:buNone/>
             </a:pPr>
             <a:r>
-              <a:rPr lang="en-US" sz="1300" dirty="0">
-                <a:solidFill>
-                  <a:srgbClr val="16261F"/>
-                </a:solidFill>
-                <a:latin typeface="Calibri" pitchFamily="34" charset="0"/>
-                <a:ea typeface="Calibri" pitchFamily="34" charset="-122"/>
-                <a:cs typeface="Calibri" pitchFamily="34" charset="-120"/>
-              </a:rPr>
-              <a:t>Makes motor electrical energy visible with a clamp-on power measurement and points owners to efficient drives.</a:t>
+              <a:rPr lang="en-US" sz="1200" dirty="0">
+                <a:solidFill>
+                  <a:srgbClr val="55655D"/>
+                </a:solidFill>
+                <a:latin typeface="Calibri" pitchFamily="34" charset="0"/>
+                <a:ea typeface="Calibri" pitchFamily="34" charset="-122"/>
+                <a:cs typeface="Calibri" pitchFamily="34" charset="-120"/>
+              </a:rPr>
+              <a:t>waste priced by cause</a:t>
             </a:r>
             <a:endParaRPr lang="en-US" sz="1300" dirty="0"/>
           </a:p>
         </p:txBody>
-      </p:sp>
-      <p:sp>
-        <p:nvSpPr>
-          <p:cNvPr id="9" name="Shape 6"/>
-          <p:cNvSpPr/>
-          <p:nvPr/>
-        </p:nvSpPr>
-        <p:spPr>
-          <a:xfrm>
-            <a:off x="4297680" y="1371600"/>
-            <a:ext cx="3611880" cy="1828800"/>
-          </a:xfrm>
-          <a:prstGeom prst="roundRect">
-            <a:avLst>
-              <a:gd name="adj" fmla="val 4000"/>
-            </a:avLst>
-          </a:prstGeom>
-          <a:solidFill>
-            <a:srgbClr val="FFFFFF"/>
-          </a:solidFill>
-          <a:ln w="12700">
-            <a:solidFill>
-              <a:srgbClr val="D3DFD7"/>
-            </a:solidFill>
-            <a:prstDash val="solid"/>
-          </a:ln>
-        </p:spPr>
-      </p:sp>
-      <p:sp>
-        <p:nvSpPr>
-          <p:cNvPr id="10" name="Shape 7"/>
-          <p:cNvSpPr/>
-          <p:nvPr/>
-        </p:nvSpPr>
-        <p:spPr>
-          <a:xfrm>
-            <a:off x="4434840" y="1481328"/>
-            <a:ext cx="502920" cy="502920"/>
-          </a:xfrm>
-          <a:prstGeom prst="ellipse">
-            <a:avLst/>
-          </a:prstGeom>
-          <a:solidFill>
-            <a:srgbClr val="0E5A32"/>
-          </a:solidFill>
-          <a:ln w="12700">
-            <a:solidFill>
-              <a:srgbClr val="0E5A32"/>
-            </a:solidFill>
-            <a:prstDash val="solid"/>
-          </a:ln>
-        </p:spPr>
       </p:sp>
       <p:pic>
         <p:nvPicPr>
-          <p:cNvPr id="11" name="Image 1" descr="preencoded.png">    </p:cNvPr>
+          <p:cNvPr id="23" name="Image 1" descr="preencoded.png">    </p:cNvPr>
           <p:cNvPicPr>
             <a:picLocks noChangeAspect="1"/>
           </p:cNvPicPr>
@@ -21029,8 +20657,8 @@
         </p:blipFill>
         <p:spPr>
           <a:xfrm>
-            <a:off x="4555541" y="1602029"/>
-            <a:ext cx="261518" cy="261518"/>
+            <a:off x="6537960" y="2569464"/>
+            <a:ext cx="274320" cy="274320"/>
           </a:xfrm>
           <a:prstGeom prst="rect">
             <a:avLst/>
@@ -21039,137 +20667,63 @@
       </p:pic>
       <p:sp>
         <p:nvSpPr>
-          <p:cNvPr id="12" name="Text 8"/>
-          <p:cNvSpPr txBox="1"/>
-          <p:nvPr/>
-        </p:nvSpPr>
-        <p:spPr>
-          <a:xfrm>
-            <a:off x="5074920" y="1481328"/>
-            <a:ext cx="2651760" cy="502920"/>
-          </a:xfrm>
-          <a:prstGeom prst="rect">
-            <a:avLst/>
-          </a:prstGeom>
-          <a:noFill/>
-          <a:ln/>
-        </p:spPr>
-        <p:txBody>
-          <a:bodyPr wrap="square" lIns="0" tIns="0" rIns="0" bIns="0" rtlCol="0" anchor="ctr"/>
+          <p:cNvPr id="24" name="Text 20"/>
+          <p:cNvSpPr txBox="1"/>
+          <p:nvPr/>
+        </p:nvSpPr>
+        <p:spPr>
+          <a:xfrm>
+            <a:off x="6949440" y="2478024"/>
+            <a:ext cx="4617720" cy="530352"/>
+          </a:xfrm>
+          <a:prstGeom prst="rect">
+            <a:avLst/>
+          </a:prstGeom>
+          <a:noFill/>
+          <a:ln/>
+        </p:spPr>
+        <p:txBody>
+          <a:bodyPr wrap="square" lIns="0" tIns="0" rIns="0" bIns="0" rtlCol="0" anchor="t"/>
           <a:lstStyle/>
           <a:p>
             <a:pPr indent="0" marL="0">
               <a:buNone/>
             </a:pPr>
             <a:r>
-              <a:rPr lang="en-US" sz="2000" b="1" dirty="0">
-                <a:solidFill>
-                  <a:srgbClr val="0E5A32"/>
-                </a:solidFill>
-                <a:latin typeface="Calibri" pitchFamily="34" charset="0"/>
-                <a:ea typeface="Calibri" pitchFamily="34" charset="-122"/>
-                <a:cs typeface="Calibri" pitchFamily="34" charset="-120"/>
-              </a:rPr>
-              <a:t>Automate</a:t>
-            </a:r>
-            <a:endParaRPr lang="en-US" sz="2000" dirty="0"/>
-          </a:p>
-        </p:txBody>
-      </p:sp>
-      <p:sp>
-        <p:nvSpPr>
-          <p:cNvPr id="13" name="Text 9"/>
-          <p:cNvSpPr txBox="1"/>
-          <p:nvPr/>
-        </p:nvSpPr>
-        <p:spPr>
-          <a:xfrm>
-            <a:off x="4434840" y="2103120"/>
-            <a:ext cx="3337560" cy="1051560"/>
-          </a:xfrm>
-          <a:prstGeom prst="rect">
-            <a:avLst/>
-          </a:prstGeom>
-          <a:noFill/>
-          <a:ln/>
-        </p:spPr>
-        <p:txBody>
-          <a:bodyPr wrap="square" lIns="0" tIns="0" rIns="0" bIns="0" rtlCol="0" anchor="t"/>
-          <a:lstStyle/>
+              <a:rPr lang="en-US" sz="1300" b="1" dirty="0">
+                <a:solidFill>
+                  <a:srgbClr val="16261F"/>
+                </a:solidFill>
+                <a:latin typeface="Calibri" pitchFamily="34" charset="0"/>
+                <a:ea typeface="Calibri" pitchFamily="34" charset="-122"/>
+                <a:cs typeface="Calibri" pitchFamily="34" charset="-120"/>
+              </a:rPr>
+              <a:t>Is an extra sensor worth buying?</a:t>
+            </a:r>
+            <a:endParaRPr lang="en-US" sz="1300" dirty="0"/>
+          </a:p>
           <a:p>
             <a:pPr indent="0" marL="0">
               <a:buNone/>
             </a:pPr>
             <a:r>
-              <a:rPr lang="en-US" sz="1300" dirty="0">
-                <a:solidFill>
-                  <a:srgbClr val="16261F"/>
-                </a:solidFill>
-                <a:latin typeface="Calibri" pitchFamily="34" charset="0"/>
-                <a:ea typeface="Calibri" pitchFamily="34" charset="-122"/>
-                <a:cs typeface="Calibri" pitchFamily="34" charset="-120"/>
-              </a:rPr>
-              <a:t>Shows which pumps justify a drive and the lowest safe setpoint. The drive does the controlling; PumpRupee never does.</a:t>
+              <a:rPr lang="en-US" sz="1200" dirty="0">
+                <a:solidFill>
+                  <a:srgbClr val="55655D"/>
+                </a:solidFill>
+                <a:latin typeface="Calibri" pitchFamily="34" charset="0"/>
+                <a:ea typeface="Calibri" pitchFamily="34" charset="-122"/>
+                <a:cs typeface="Calibri" pitchFamily="34" charset="-120"/>
+              </a:rPr>
+              <a:t>sensor value priced in ₹</a:t>
             </a:r>
             <a:endParaRPr lang="en-US" sz="1300" dirty="0"/>
           </a:p>
         </p:txBody>
-      </p:sp>
-      <p:sp>
-        <p:nvSpPr>
-          <p:cNvPr id="14" name="Shape 10"/>
-          <p:cNvSpPr/>
-          <p:nvPr/>
-        </p:nvSpPr>
-        <p:spPr>
-          <a:xfrm>
-            <a:off x="8046720" y="1371600"/>
-            <a:ext cx="3611880" cy="1828800"/>
-          </a:xfrm>
-          <a:prstGeom prst="roundRect">
-            <a:avLst>
-              <a:gd name="adj" fmla="val 4000"/>
-            </a:avLst>
-          </a:prstGeom>
-          <a:solidFill>
-            <a:srgbClr val="FFFFFF"/>
-          </a:solidFill>
-          <a:ln w="12700">
-            <a:solidFill>
-              <a:srgbClr val="D3DFD7"/>
-            </a:solidFill>
-            <a:prstDash val="solid"/>
-          </a:ln>
-        </p:spPr>
-      </p:sp>
-      <p:sp>
-        <p:nvSpPr>
-          <p:cNvPr id="15" name="Shape 11"/>
-          <p:cNvSpPr/>
-          <p:nvPr/>
-        </p:nvSpPr>
-        <p:spPr>
-          <a:xfrm>
-            <a:off x="8183880" y="1481328"/>
-            <a:ext cx="502920" cy="502920"/>
-          </a:xfrm>
-          <a:prstGeom prst="ellipse">
-            <a:avLst/>
-          </a:prstGeom>
-          <a:solidFill>
-            <a:srgbClr val="0E5A32"/>
-          </a:solidFill>
-          <a:ln w="12700">
-            <a:solidFill>
-              <a:srgbClr val="0E5A32"/>
-            </a:solidFill>
-            <a:prstDash val="solid"/>
-          </a:ln>
-        </p:spPr>
       </p:sp>
       <p:pic>
         <p:nvPicPr>
-          <p:cNvPr id="16" name="Image 2" descr="preencoded.png">    </p:cNvPr>
+          <p:cNvPr id="25" name="Image 2" descr="preencoded.png">    </p:cNvPr>
           <p:cNvPicPr>
             <a:picLocks noChangeAspect="1"/>
           </p:cNvPicPr>
@@ -21183,8 +20737,8 @@
         </p:blipFill>
         <p:spPr>
           <a:xfrm>
-            <a:off x="8304581" y="1602029"/>
-            <a:ext cx="261518" cy="261518"/>
+            <a:off x="6537960" y="3172968"/>
+            <a:ext cx="274320" cy="274320"/>
           </a:xfrm>
           <a:prstGeom prst="rect">
             <a:avLst/>
@@ -21193,53 +20747,94 @@
       </p:pic>
       <p:sp>
         <p:nvSpPr>
-          <p:cNvPr id="17" name="Text 12"/>
-          <p:cNvSpPr txBox="1"/>
-          <p:nvPr/>
-        </p:nvSpPr>
-        <p:spPr>
-          <a:xfrm>
-            <a:off x="8823960" y="1481328"/>
-            <a:ext cx="2651760" cy="502920"/>
-          </a:xfrm>
-          <a:prstGeom prst="rect">
-            <a:avLst/>
-          </a:prstGeom>
-          <a:noFill/>
-          <a:ln/>
-        </p:spPr>
-        <p:txBody>
-          <a:bodyPr wrap="square" lIns="0" tIns="0" rIns="0" bIns="0" rtlCol="0" anchor="ctr"/>
+          <p:cNvPr id="26" name="Text 21"/>
+          <p:cNvSpPr txBox="1"/>
+          <p:nvPr/>
+        </p:nvSpPr>
+        <p:spPr>
+          <a:xfrm>
+            <a:off x="6949440" y="3081528"/>
+            <a:ext cx="4617720" cy="530352"/>
+          </a:xfrm>
+          <a:prstGeom prst="rect">
+            <a:avLst/>
+          </a:prstGeom>
+          <a:noFill/>
+          <a:ln/>
+        </p:spPr>
+        <p:txBody>
+          <a:bodyPr wrap="square" lIns="0" tIns="0" rIns="0" bIns="0" rtlCol="0" anchor="t"/>
           <a:lstStyle/>
           <a:p>
             <a:pPr indent="0" marL="0">
               <a:buNone/>
             </a:pPr>
             <a:r>
-              <a:rPr lang="en-US" sz="2000" b="1" dirty="0">
-                <a:solidFill>
-                  <a:srgbClr val="0E5A32"/>
-                </a:solidFill>
-                <a:latin typeface="Calibri" pitchFamily="34" charset="0"/>
-                <a:ea typeface="Calibri" pitchFamily="34" charset="-122"/>
-                <a:cs typeface="Calibri" pitchFamily="34" charset="-120"/>
-              </a:rPr>
-              <a:t>Digitalise</a:t>
-            </a:r>
-            <a:endParaRPr lang="en-US" sz="2000" dirty="0"/>
-          </a:p>
-        </p:txBody>
-      </p:sp>
-      <p:sp>
-        <p:nvSpPr>
-          <p:cNvPr id="18" name="Text 13"/>
-          <p:cNvSpPr txBox="1"/>
-          <p:nvPr/>
-        </p:nvSpPr>
-        <p:spPr>
-          <a:xfrm>
-            <a:off x="8183880" y="2103120"/>
-            <a:ext cx="3337560" cy="1051560"/>
+              <a:rPr lang="en-US" sz="1300" b="1" dirty="0">
+                <a:solidFill>
+                  <a:srgbClr val="16261F"/>
+                </a:solidFill>
+                <a:latin typeface="Calibri" pitchFamily="34" charset="0"/>
+                <a:ea typeface="Calibri" pitchFamily="34" charset="-122"/>
+                <a:cs typeface="Calibri" pitchFamily="34" charset="-120"/>
+              </a:rPr>
+              <a:t>Will a VFD pay back for THIS pump?</a:t>
+            </a:r>
+            <a:endParaRPr lang="en-US" sz="1300" dirty="0"/>
+          </a:p>
+          <a:p>
+            <a:pPr indent="0" marL="0">
+              <a:buNone/>
+            </a:pPr>
+            <a:r>
+              <a:rPr lang="en-US" sz="1200" dirty="0">
+                <a:solidFill>
+                  <a:srgbClr val="55655D"/>
+                </a:solidFill>
+                <a:latin typeface="Calibri" pitchFamily="34" charset="0"/>
+                <a:ea typeface="Calibri" pitchFamily="34" charset="-122"/>
+                <a:cs typeface="Calibri" pitchFamily="34" charset="-120"/>
+              </a:rPr>
+              <a:t>verdict before capex</a:t>
+            </a:r>
+            <a:endParaRPr lang="en-US" sz="1300" dirty="0"/>
+          </a:p>
+        </p:txBody>
+      </p:sp>
+      <p:pic>
+        <p:nvPicPr>
+          <p:cNvPr id="27" name="Image 3" descr="preencoded.png">    </p:cNvPr>
+          <p:cNvPicPr>
+            <a:picLocks noChangeAspect="1"/>
+          </p:cNvPicPr>
+          <p:nvPr/>
+        </p:nvPicPr>
+        <p:blipFill>
+          <a:blip r:embed="rId4"/>
+          <a:stretch>
+            <a:fillRect/>
+          </a:stretch>
+        </p:blipFill>
+        <p:spPr>
+          <a:xfrm>
+            <a:off x="6537960" y="3776472"/>
+            <a:ext cx="274320" cy="274320"/>
+          </a:xfrm>
+          <a:prstGeom prst="rect">
+            <a:avLst/>
+          </a:prstGeom>
+        </p:spPr>
+      </p:pic>
+      <p:sp>
+        <p:nvSpPr>
+          <p:cNvPr id="28" name="Text 22"/>
+          <p:cNvSpPr txBox="1"/>
+          <p:nvPr/>
+        </p:nvSpPr>
+        <p:spPr>
+          <a:xfrm>
+            <a:off x="6949440" y="3685032"/>
+            <a:ext cx="4617720" cy="530352"/>
           </a:xfrm>
           <a:prstGeom prst="rect">
             <a:avLst/>
@@ -21255,7 +20850,7 @@
               <a:buNone/>
             </a:pPr>
             <a:r>
-              <a:rPr lang="en-US" sz="1300" dirty="0">
+              <a:rPr lang="en-US" sz="1300" b="1" dirty="0">
                 <a:solidFill>
                   <a:srgbClr val="16261F"/>
                 </a:solidFill>
@@ -21263,52 +20858,124 @@
                 <a:ea typeface="Calibri" pitchFamily="34" charset="-122"/>
                 <a:cs typeface="Calibri" pitchFamily="34" charset="-120"/>
               </a:rPr>
-              <a:t>Logs become a ₹ business case and a before/after proof. The owner keeps the data and can use any drive.</a:t>
+              <a:t>Did the fix work?</a:t>
             </a:r>
             <a:endParaRPr lang="en-US" sz="1300" dirty="0"/>
           </a:p>
-        </p:txBody>
-      </p:sp>
-      <p:sp>
-        <p:nvSpPr>
-          <p:cNvPr id="19" name="Shape 14"/>
+          <a:p>
+            <a:pPr indent="0" marL="0">
+              <a:buNone/>
+            </a:pPr>
+            <a:r>
+              <a:rPr lang="en-US" sz="1200" dirty="0">
+                <a:solidFill>
+                  <a:srgbClr val="55655D"/>
+                </a:solidFill>
+                <a:latin typeface="Calibri" pitchFamily="34" charset="0"/>
+                <a:ea typeface="Calibri" pitchFamily="34" charset="-122"/>
+                <a:cs typeface="Calibri" pitchFamily="34" charset="-120"/>
+              </a:rPr>
+              <a:t>built-in before/after check</a:t>
+            </a:r>
+            <a:endParaRPr lang="en-US" sz="1300" dirty="0"/>
+          </a:p>
+        </p:txBody>
+      </p:sp>
+      <p:pic>
+        <p:nvPicPr>
+          <p:cNvPr id="29" name="Image 4" descr="preencoded.png">    </p:cNvPr>
+          <p:cNvPicPr>
+            <a:picLocks noChangeAspect="1"/>
+          </p:cNvPicPr>
+          <p:nvPr/>
+        </p:nvPicPr>
+        <p:blipFill>
+          <a:blip r:embed="rId5"/>
+          <a:stretch>
+            <a:fillRect/>
+          </a:stretch>
+        </p:blipFill>
+        <p:spPr>
+          <a:xfrm>
+            <a:off x="6537960" y="4379976"/>
+            <a:ext cx="274320" cy="274320"/>
+          </a:xfrm>
+          <a:prstGeom prst="rect">
+            <a:avLst/>
+          </a:prstGeom>
+        </p:spPr>
+      </p:pic>
+      <p:sp>
+        <p:nvSpPr>
+          <p:cNvPr id="30" name="Text 23"/>
+          <p:cNvSpPr txBox="1"/>
+          <p:nvPr/>
+        </p:nvSpPr>
+        <p:spPr>
+          <a:xfrm>
+            <a:off x="6949440" y="4288536"/>
+            <a:ext cx="4617720" cy="530352"/>
+          </a:xfrm>
+          <a:prstGeom prst="rect">
+            <a:avLst/>
+          </a:prstGeom>
+          <a:noFill/>
+          <a:ln/>
+        </p:spPr>
+        <p:txBody>
+          <a:bodyPr wrap="square" lIns="0" tIns="0" rIns="0" bIns="0" rtlCol="0" anchor="t"/>
+          <a:lstStyle/>
+          <a:p>
+            <a:pPr indent="0" marL="0">
+              <a:buNone/>
+            </a:pPr>
+            <a:r>
+              <a:rPr lang="en-US" sz="1300" b="1" dirty="0">
+                <a:solidFill>
+                  <a:srgbClr val="16261F"/>
+                </a:solidFill>
+                <a:latin typeface="Calibri" pitchFamily="34" charset="0"/>
+                <a:ea typeface="Calibri" pitchFamily="34" charset="-122"/>
+                <a:cs typeface="Calibri" pitchFamily="34" charset="-120"/>
+              </a:rPr>
+              <a:t>Can an MSME afford it?</a:t>
+            </a:r>
+            <a:endParaRPr lang="en-US" sz="1300" dirty="0"/>
+          </a:p>
+          <a:p>
+            <a:pPr indent="0" marL="0">
+              <a:buNone/>
+            </a:pPr>
+            <a:r>
+              <a:rPr lang="en-US" sz="1200" dirty="0">
+                <a:solidFill>
+                  <a:srgbClr val="55655D"/>
+                </a:solidFill>
+                <a:latin typeface="Calibri" pitchFamily="34" charset="0"/>
+                <a:ea typeface="Calibri" pitchFamily="34" charset="-122"/>
+                <a:cs typeface="Calibri" pitchFamily="34" charset="-120"/>
+              </a:rPr>
+              <a:t>₹6,100–13,300, no flow meter</a:t>
+            </a:r>
+            <a:endParaRPr lang="en-US" sz="1300" dirty="0"/>
+          </a:p>
+        </p:txBody>
+      </p:sp>
+      <p:sp>
+        <p:nvSpPr>
+          <p:cNvPr id="31" name="Shape 24"/>
           <p:cNvSpPr/>
           <p:nvPr/>
         </p:nvSpPr>
         <p:spPr>
           <a:xfrm>
-            <a:off x="548640" y="3520440"/>
-            <a:ext cx="2011680" cy="1325880"/>
+            <a:off x="548640" y="5120640"/>
+            <a:ext cx="11109960" cy="1188720"/>
           </a:xfrm>
           <a:prstGeom prst="roundRect">
             <a:avLst>
-              <a:gd name="adj" fmla="val 5517"/>
+              <a:gd name="adj" fmla="val 6154"/>
             </a:avLst>
-          </a:prstGeom>
-          <a:solidFill>
-            <a:srgbClr val="E3F6E8"/>
-          </a:solidFill>
-          <a:ln w="25400">
-            <a:solidFill>
-              <a:srgbClr val="3DCD58"/>
-            </a:solidFill>
-            <a:prstDash val="solid"/>
-          </a:ln>
-        </p:spPr>
-      </p:sp>
-      <p:sp>
-        <p:nvSpPr>
-          <p:cNvPr id="20" name="Shape 15"/>
-          <p:cNvSpPr/>
-          <p:nvPr/>
-        </p:nvSpPr>
-        <p:spPr>
-          <a:xfrm>
-            <a:off x="658368" y="3611880"/>
-            <a:ext cx="347472" cy="347472"/>
-          </a:xfrm>
-          <a:prstGeom prst="ellipse">
-            <a:avLst/>
           </a:prstGeom>
           <a:solidFill>
             <a:srgbClr val="0E5A32"/>
@@ -21323,14 +20990,14 @@
       </p:sp>
       <p:sp>
         <p:nvSpPr>
-          <p:cNvPr id="21" name="Text 16"/>
-          <p:cNvSpPr txBox="1"/>
-          <p:nvPr/>
-        </p:nvSpPr>
-        <p:spPr>
-          <a:xfrm>
-            <a:off x="658368" y="3611880"/>
-            <a:ext cx="347472" cy="347472"/>
+          <p:cNvPr id="32" name="Text 25"/>
+          <p:cNvSpPr txBox="1"/>
+          <p:nvPr/>
+        </p:nvSpPr>
+        <p:spPr>
+          <a:xfrm>
+            <a:off x="777240" y="5166360"/>
+            <a:ext cx="10652760" cy="1097280"/>
           </a:xfrm>
           <a:prstGeom prst="rect">
             <a:avLst/>
@@ -21342,11 +21009,14 @@
           <a:bodyPr wrap="square" lIns="0" tIns="0" rIns="0" bIns="0" rtlCol="0" anchor="ctr"/>
           <a:lstStyle/>
           <a:p>
-            <a:pPr algn="ctr" indent="0" marL="0">
-              <a:buNone/>
-            </a:pPr>
-            <a:r>
-              <a:rPr lang="en-US" sz="1400" b="1" dirty="0">
+            <a:pPr indent="0" marL="0">
+              <a:spcAft>
+                <a:spcPts val="600"/>
+              </a:spcAft>
+              <a:buNone/>
+            </a:pPr>
+            <a:r>
+              <a:rPr lang="en-US" sz="1700" b="1" dirty="0">
                 <a:solidFill>
                   <a:srgbClr val="FFFFFF"/>
                 </a:solidFill>
@@ -21354,936 +21024,26 @@
                 <a:ea typeface="Calibri" pitchFamily="34" charset="-122"/>
                 <a:cs typeface="Calibri" pitchFamily="34" charset="-120"/>
               </a:rPr>
-              <a:t>1</a:t>
-            </a:r>
-            <a:endParaRPr lang="en-US" sz="1400" dirty="0"/>
-          </a:p>
-        </p:txBody>
-      </p:sp>
-      <p:sp>
-        <p:nvSpPr>
-          <p:cNvPr id="22" name="Text 17"/>
-          <p:cNvSpPr txBox="1"/>
-          <p:nvPr/>
-        </p:nvSpPr>
-        <p:spPr>
-          <a:xfrm>
-            <a:off x="658368" y="4023360"/>
-            <a:ext cx="1810512" cy="777240"/>
-          </a:xfrm>
-          <a:prstGeom prst="rect">
-            <a:avLst/>
-          </a:prstGeom>
-          <a:noFill/>
-          <a:ln/>
-        </p:spPr>
-        <p:txBody>
-          <a:bodyPr wrap="square" lIns="0" tIns="0" rIns="0" bIns="0" rtlCol="0" anchor="t"/>
-          <a:lstStyle/>
+              <a:t>“What's new?”  Most tools tell you how a pump is running. PumpRupee tells an MSME owner what to buy, in rupees, before spending, and proves it afterwards.</a:t>
+            </a:r>
+            <a:endParaRPr lang="en-US" sz="1700" dirty="0"/>
+          </a:p>
           <a:p>
             <a:pPr indent="0" marL="0">
               <a:buNone/>
             </a:pPr>
             <a:r>
-              <a:rPr lang="en-US" sz="1400" b="1" dirty="0">
-                <a:solidFill>
-                  <a:srgbClr val="16261F"/>
-                </a:solidFill>
-                <a:latin typeface="Calibri" pitchFamily="34" charset="0"/>
-                <a:ea typeface="Calibri" pitchFamily="34" charset="-122"/>
-                <a:cs typeface="Calibri" pitchFamily="34" charset="-120"/>
-              </a:rPr>
-              <a:t>PumpRupee audit</a:t>
-            </a:r>
-            <a:endParaRPr lang="en-US" sz="1400" dirty="0"/>
-          </a:p>
-          <a:p>
-            <a:pPr indent="0" marL="0">
-              <a:buNone/>
-            </a:pPr>
-            <a:r>
-              <a:rPr lang="en-US" sz="1200" dirty="0">
-                <a:solidFill>
-                  <a:srgbClr val="55655D"/>
-                </a:solidFill>
-                <a:latin typeface="Calibri" pitchFamily="34" charset="0"/>
-                <a:ea typeface="Calibri" pitchFamily="34" charset="-122"/>
-                <a:cs typeface="Calibri" pitchFamily="34" charset="-120"/>
-              </a:rPr>
-              <a:t>Clamp-on, 7–14 days</a:t>
-            </a:r>
-            <a:endParaRPr lang="en-US" sz="1400" dirty="0"/>
-          </a:p>
-        </p:txBody>
-      </p:sp>
-      <p:sp>
-        <p:nvSpPr>
-          <p:cNvPr id="23" name="Shape 18"/>
-          <p:cNvSpPr/>
-          <p:nvPr/>
-        </p:nvSpPr>
-        <p:spPr>
-          <a:xfrm>
-            <a:off x="2578608" y="4023360"/>
-            <a:ext cx="201168" cy="256032"/>
-          </a:xfrm>
-          <a:prstGeom prst="rightArrow">
-            <a:avLst/>
-          </a:prstGeom>
-          <a:solidFill>
-            <a:srgbClr val="3DCD58"/>
-          </a:solidFill>
-          <a:ln w="12700">
-            <a:solidFill>
-              <a:srgbClr val="3DCD58"/>
-            </a:solidFill>
-            <a:prstDash val="solid"/>
-          </a:ln>
-        </p:spPr>
-      </p:sp>
-      <p:sp>
-        <p:nvSpPr>
-          <p:cNvPr id="24" name="Shape 19"/>
-          <p:cNvSpPr/>
-          <p:nvPr/>
-        </p:nvSpPr>
-        <p:spPr>
-          <a:xfrm>
-            <a:off x="2798064" y="3520440"/>
-            <a:ext cx="2011680" cy="1325880"/>
-          </a:xfrm>
-          <a:prstGeom prst="roundRect">
-            <a:avLst>
-              <a:gd name="adj" fmla="val 5517"/>
-            </a:avLst>
-          </a:prstGeom>
-          <a:solidFill>
-            <a:srgbClr val="FFFFFF"/>
-          </a:solidFill>
-          <a:ln w="12700">
-            <a:solidFill>
-              <a:srgbClr val="D3DFD7"/>
-            </a:solidFill>
-            <a:prstDash val="solid"/>
-          </a:ln>
-        </p:spPr>
-      </p:sp>
-      <p:sp>
-        <p:nvSpPr>
-          <p:cNvPr id="25" name="Shape 20"/>
-          <p:cNvSpPr/>
-          <p:nvPr/>
-        </p:nvSpPr>
-        <p:spPr>
-          <a:xfrm>
-            <a:off x="2907792" y="3611880"/>
-            <a:ext cx="347472" cy="347472"/>
-          </a:xfrm>
-          <a:prstGeom prst="ellipse">
-            <a:avLst/>
-          </a:prstGeom>
-          <a:solidFill>
-            <a:srgbClr val="9AA5A0"/>
-          </a:solidFill>
-          <a:ln w="12700">
-            <a:solidFill>
-              <a:srgbClr val="9AA5A0"/>
-            </a:solidFill>
-            <a:prstDash val="solid"/>
-          </a:ln>
-        </p:spPr>
-      </p:sp>
-      <p:sp>
-        <p:nvSpPr>
-          <p:cNvPr id="26" name="Text 21"/>
-          <p:cNvSpPr txBox="1"/>
-          <p:nvPr/>
-        </p:nvSpPr>
-        <p:spPr>
-          <a:xfrm>
-            <a:off x="2907792" y="3611880"/>
-            <a:ext cx="347472" cy="347472"/>
-          </a:xfrm>
-          <a:prstGeom prst="rect">
-            <a:avLst/>
-          </a:prstGeom>
-          <a:noFill/>
-          <a:ln/>
-        </p:spPr>
-        <p:txBody>
-          <a:bodyPr wrap="square" lIns="0" tIns="0" rIns="0" bIns="0" rtlCol="0" anchor="ctr"/>
-          <a:lstStyle/>
-          <a:p>
-            <a:pPr algn="ctr" indent="0" marL="0">
-              <a:buNone/>
-            </a:pPr>
-            <a:r>
-              <a:rPr lang="en-US" sz="1400" b="1" dirty="0">
-                <a:solidFill>
-                  <a:srgbClr val="FFFFFF"/>
-                </a:solidFill>
-                <a:latin typeface="Calibri" pitchFamily="34" charset="0"/>
-                <a:ea typeface="Calibri" pitchFamily="34" charset="-122"/>
-                <a:cs typeface="Calibri" pitchFamily="34" charset="-120"/>
-              </a:rPr>
-              <a:t>2</a:t>
-            </a:r>
-            <a:endParaRPr lang="en-US" sz="1400" dirty="0"/>
-          </a:p>
-        </p:txBody>
-      </p:sp>
-      <p:sp>
-        <p:nvSpPr>
-          <p:cNvPr id="27" name="Text 22"/>
-          <p:cNvSpPr txBox="1"/>
-          <p:nvPr/>
-        </p:nvSpPr>
-        <p:spPr>
-          <a:xfrm>
-            <a:off x="2907792" y="4023360"/>
-            <a:ext cx="1810512" cy="777240"/>
-          </a:xfrm>
-          <a:prstGeom prst="rect">
-            <a:avLst/>
-          </a:prstGeom>
-          <a:noFill/>
-          <a:ln/>
-        </p:spPr>
-        <p:txBody>
-          <a:bodyPr wrap="square" lIns="0" tIns="0" rIns="0" bIns="0" rtlCol="0" anchor="t"/>
-          <a:lstStyle/>
-          <a:p>
-            <a:pPr indent="0" marL="0">
-              <a:buNone/>
-            </a:pPr>
-            <a:r>
-              <a:rPr lang="en-US" sz="1400" b="1" dirty="0">
-                <a:solidFill>
-                  <a:srgbClr val="16261F"/>
-                </a:solidFill>
-                <a:latin typeface="Calibri" pitchFamily="34" charset="0"/>
-                <a:ea typeface="Calibri" pitchFamily="34" charset="-122"/>
-                <a:cs typeface="Calibri" pitchFamily="34" charset="-120"/>
-              </a:rPr>
-              <a:t>₹ business case</a:t>
-            </a:r>
-            <a:endParaRPr lang="en-US" sz="1400" dirty="0"/>
-          </a:p>
-          <a:p>
-            <a:pPr indent="0" marL="0">
-              <a:buNone/>
-            </a:pPr>
-            <a:r>
-              <a:rPr lang="en-US" sz="1200" dirty="0">
-                <a:solidFill>
-                  <a:srgbClr val="55655D"/>
-                </a:solidFill>
-                <a:latin typeface="Calibri" pitchFamily="34" charset="0"/>
-                <a:ea typeface="Calibri" pitchFamily="34" charset="-122"/>
-                <a:cs typeface="Calibri" pitchFamily="34" charset="-120"/>
-              </a:rPr>
-              <a:t>Waste by cause + VFD verdict</a:t>
-            </a:r>
-            <a:endParaRPr lang="en-US" sz="1400" dirty="0"/>
-          </a:p>
-        </p:txBody>
-      </p:sp>
-      <p:sp>
-        <p:nvSpPr>
-          <p:cNvPr id="28" name="Shape 23"/>
-          <p:cNvSpPr/>
-          <p:nvPr/>
-        </p:nvSpPr>
-        <p:spPr>
-          <a:xfrm>
-            <a:off x="4828032" y="4023360"/>
-            <a:ext cx="201168" cy="256032"/>
-          </a:xfrm>
-          <a:prstGeom prst="rightArrow">
-            <a:avLst/>
-          </a:prstGeom>
-          <a:solidFill>
-            <a:srgbClr val="3DCD58"/>
-          </a:solidFill>
-          <a:ln w="12700">
-            <a:solidFill>
-              <a:srgbClr val="3DCD58"/>
-            </a:solidFill>
-            <a:prstDash val="solid"/>
-          </a:ln>
-        </p:spPr>
-      </p:sp>
-      <p:sp>
-        <p:nvSpPr>
-          <p:cNvPr id="29" name="Shape 24"/>
-          <p:cNvSpPr/>
-          <p:nvPr/>
-        </p:nvSpPr>
-        <p:spPr>
-          <a:xfrm>
-            <a:off x="5047488" y="3520440"/>
-            <a:ext cx="2011680" cy="1325880"/>
-          </a:xfrm>
-          <a:prstGeom prst="roundRect">
-            <a:avLst>
-              <a:gd name="adj" fmla="val 5517"/>
-            </a:avLst>
-          </a:prstGeom>
-          <a:solidFill>
-            <a:srgbClr val="FFFFFF"/>
-          </a:solidFill>
-          <a:ln w="12700">
-            <a:solidFill>
-              <a:srgbClr val="D3DFD7"/>
-            </a:solidFill>
-            <a:prstDash val="solid"/>
-          </a:ln>
-        </p:spPr>
-      </p:sp>
-      <p:sp>
-        <p:nvSpPr>
-          <p:cNvPr id="30" name="Shape 25"/>
-          <p:cNvSpPr/>
-          <p:nvPr/>
-        </p:nvSpPr>
-        <p:spPr>
-          <a:xfrm>
-            <a:off x="5157216" y="3611880"/>
-            <a:ext cx="347472" cy="347472"/>
-          </a:xfrm>
-          <a:prstGeom prst="ellipse">
-            <a:avLst/>
-          </a:prstGeom>
-          <a:solidFill>
-            <a:srgbClr val="9AA5A0"/>
-          </a:solidFill>
-          <a:ln w="12700">
-            <a:solidFill>
-              <a:srgbClr val="9AA5A0"/>
-            </a:solidFill>
-            <a:prstDash val="solid"/>
-          </a:ln>
-        </p:spPr>
-      </p:sp>
-      <p:sp>
-        <p:nvSpPr>
-          <p:cNvPr id="31" name="Text 26"/>
-          <p:cNvSpPr txBox="1"/>
-          <p:nvPr/>
-        </p:nvSpPr>
-        <p:spPr>
-          <a:xfrm>
-            <a:off x="5157216" y="3611880"/>
-            <a:ext cx="347472" cy="347472"/>
-          </a:xfrm>
-          <a:prstGeom prst="rect">
-            <a:avLst/>
-          </a:prstGeom>
-          <a:noFill/>
-          <a:ln/>
-        </p:spPr>
-        <p:txBody>
-          <a:bodyPr wrap="square" lIns="0" tIns="0" rIns="0" bIns="0" rtlCol="0" anchor="ctr"/>
-          <a:lstStyle/>
-          <a:p>
-            <a:pPr algn="ctr" indent="0" marL="0">
-              <a:buNone/>
-            </a:pPr>
-            <a:r>
-              <a:rPr lang="en-US" sz="1400" b="1" dirty="0">
-                <a:solidFill>
-                  <a:srgbClr val="FFFFFF"/>
-                </a:solidFill>
-                <a:latin typeface="Calibri" pitchFamily="34" charset="0"/>
-                <a:ea typeface="Calibri" pitchFamily="34" charset="-122"/>
-                <a:cs typeface="Calibri" pitchFamily="34" charset="-120"/>
-              </a:rPr>
-              <a:t>3</a:t>
-            </a:r>
-            <a:endParaRPr lang="en-US" sz="1400" dirty="0"/>
-          </a:p>
-        </p:txBody>
-      </p:sp>
-      <p:sp>
-        <p:nvSpPr>
-          <p:cNvPr id="32" name="Text 27"/>
-          <p:cNvSpPr txBox="1"/>
-          <p:nvPr/>
-        </p:nvSpPr>
-        <p:spPr>
-          <a:xfrm>
-            <a:off x="5157216" y="4023360"/>
-            <a:ext cx="1810512" cy="777240"/>
-          </a:xfrm>
-          <a:prstGeom prst="rect">
-            <a:avLst/>
-          </a:prstGeom>
-          <a:noFill/>
-          <a:ln/>
-        </p:spPr>
-        <p:txBody>
-          <a:bodyPr wrap="square" lIns="0" tIns="0" rIns="0" bIns="0" rtlCol="0" anchor="t"/>
-          <a:lstStyle/>
-          <a:p>
-            <a:pPr indent="0" marL="0">
-              <a:buNone/>
-            </a:pPr>
-            <a:r>
-              <a:rPr lang="en-US" sz="1400" b="1" dirty="0">
-                <a:solidFill>
-                  <a:srgbClr val="16261F"/>
-                </a:solidFill>
-                <a:latin typeface="Calibri" pitchFamily="34" charset="0"/>
-                <a:ea typeface="Calibri" pitchFamily="34" charset="-122"/>
-                <a:cs typeface="Calibri" pitchFamily="34" charset="-120"/>
-              </a:rPr>
-              <a:t>VFD installed</a:t>
-            </a:r>
-            <a:endParaRPr lang="en-US" sz="1400" dirty="0"/>
-          </a:p>
-          <a:p>
-            <a:pPr indent="0" marL="0">
-              <a:buNone/>
-            </a:pPr>
-            <a:r>
-              <a:rPr lang="en-US" sz="1200" dirty="0">
-                <a:solidFill>
-                  <a:srgbClr val="55655D"/>
-                </a:solidFill>
-                <a:latin typeface="Calibri" pitchFamily="34" charset="0"/>
-                <a:ea typeface="Calibri" pitchFamily="34" charset="-122"/>
-                <a:cs typeface="Calibri" pitchFamily="34" charset="-120"/>
-              </a:rPr>
-              <a:t>e.g. Altivar Process</a:t>
-            </a:r>
-            <a:endParaRPr lang="en-US" sz="1400" dirty="0"/>
-          </a:p>
-        </p:txBody>
-      </p:sp>
-      <p:sp>
-        <p:nvSpPr>
-          <p:cNvPr id="33" name="Shape 28"/>
-          <p:cNvSpPr/>
-          <p:nvPr/>
-        </p:nvSpPr>
-        <p:spPr>
-          <a:xfrm>
-            <a:off x="7077456" y="4023360"/>
-            <a:ext cx="201168" cy="256032"/>
-          </a:xfrm>
-          <a:prstGeom prst="rightArrow">
-            <a:avLst/>
-          </a:prstGeom>
-          <a:solidFill>
-            <a:srgbClr val="3DCD58"/>
-          </a:solidFill>
-          <a:ln w="12700">
-            <a:solidFill>
-              <a:srgbClr val="3DCD58"/>
-            </a:solidFill>
-            <a:prstDash val="solid"/>
-          </a:ln>
-        </p:spPr>
-      </p:sp>
-      <p:sp>
-        <p:nvSpPr>
-          <p:cNvPr id="34" name="Shape 29"/>
-          <p:cNvSpPr/>
-          <p:nvPr/>
-        </p:nvSpPr>
-        <p:spPr>
-          <a:xfrm>
-            <a:off x="7296912" y="3520440"/>
-            <a:ext cx="2011680" cy="1325880"/>
-          </a:xfrm>
-          <a:prstGeom prst="roundRect">
-            <a:avLst>
-              <a:gd name="adj" fmla="val 5517"/>
-            </a:avLst>
-          </a:prstGeom>
-          <a:solidFill>
-            <a:srgbClr val="E3F6E8"/>
-          </a:solidFill>
-          <a:ln w="25400">
-            <a:solidFill>
-              <a:srgbClr val="3DCD58"/>
-            </a:solidFill>
-            <a:prstDash val="solid"/>
-          </a:ln>
-        </p:spPr>
-      </p:sp>
-      <p:sp>
-        <p:nvSpPr>
-          <p:cNvPr id="35" name="Shape 30"/>
-          <p:cNvSpPr/>
-          <p:nvPr/>
-        </p:nvSpPr>
-        <p:spPr>
-          <a:xfrm>
-            <a:off x="7406640" y="3611880"/>
-            <a:ext cx="347472" cy="347472"/>
-          </a:xfrm>
-          <a:prstGeom prst="ellipse">
-            <a:avLst/>
-          </a:prstGeom>
-          <a:solidFill>
-            <a:srgbClr val="0E5A32"/>
-          </a:solidFill>
-          <a:ln w="12700">
-            <a:solidFill>
-              <a:srgbClr val="0E5A32"/>
-            </a:solidFill>
-            <a:prstDash val="solid"/>
-          </a:ln>
-        </p:spPr>
-      </p:sp>
-      <p:sp>
-        <p:nvSpPr>
-          <p:cNvPr id="36" name="Text 31"/>
-          <p:cNvSpPr txBox="1"/>
-          <p:nvPr/>
-        </p:nvSpPr>
-        <p:spPr>
-          <a:xfrm>
-            <a:off x="7406640" y="3611880"/>
-            <a:ext cx="347472" cy="347472"/>
-          </a:xfrm>
-          <a:prstGeom prst="rect">
-            <a:avLst/>
-          </a:prstGeom>
-          <a:noFill/>
-          <a:ln/>
-        </p:spPr>
-        <p:txBody>
-          <a:bodyPr wrap="square" lIns="0" tIns="0" rIns="0" bIns="0" rtlCol="0" anchor="ctr"/>
-          <a:lstStyle/>
-          <a:p>
-            <a:pPr algn="ctr" indent="0" marL="0">
-              <a:buNone/>
-            </a:pPr>
-            <a:r>
-              <a:rPr lang="en-US" sz="1400" b="1" dirty="0">
-                <a:solidFill>
-                  <a:srgbClr val="FFFFFF"/>
-                </a:solidFill>
-                <a:latin typeface="Calibri" pitchFamily="34" charset="0"/>
-                <a:ea typeface="Calibri" pitchFamily="34" charset="-122"/>
-                <a:cs typeface="Calibri" pitchFamily="34" charset="-120"/>
-              </a:rPr>
-              <a:t>4</a:t>
-            </a:r>
-            <a:endParaRPr lang="en-US" sz="1400" dirty="0"/>
-          </a:p>
-        </p:txBody>
-      </p:sp>
-      <p:sp>
-        <p:nvSpPr>
-          <p:cNvPr id="37" name="Text 32"/>
-          <p:cNvSpPr txBox="1"/>
-          <p:nvPr/>
-        </p:nvSpPr>
-        <p:spPr>
-          <a:xfrm>
-            <a:off x="7406640" y="4023360"/>
-            <a:ext cx="1810512" cy="777240"/>
-          </a:xfrm>
-          <a:prstGeom prst="rect">
-            <a:avLst/>
-          </a:prstGeom>
-          <a:noFill/>
-          <a:ln/>
-        </p:spPr>
-        <p:txBody>
-          <a:bodyPr wrap="square" lIns="0" tIns="0" rIns="0" bIns="0" rtlCol="0" anchor="t"/>
-          <a:lstStyle/>
-          <a:p>
-            <a:pPr indent="0" marL="0">
-              <a:buNone/>
-            </a:pPr>
-            <a:r>
-              <a:rPr lang="en-US" sz="1400" b="1" dirty="0">
-                <a:solidFill>
-                  <a:srgbClr val="16261F"/>
-                </a:solidFill>
-                <a:latin typeface="Calibri" pitchFamily="34" charset="0"/>
-                <a:ea typeface="Calibri" pitchFamily="34" charset="-122"/>
-                <a:cs typeface="Calibri" pitchFamily="34" charset="-120"/>
-              </a:rPr>
-              <a:t>PumpRupee re-measures</a:t>
-            </a:r>
-            <a:endParaRPr lang="en-US" sz="1400" dirty="0"/>
-          </a:p>
-          <a:p>
-            <a:pPr indent="0" marL="0">
-              <a:buNone/>
-            </a:pPr>
-            <a:r>
-              <a:rPr lang="en-US" sz="1200" dirty="0">
-                <a:solidFill>
-                  <a:srgbClr val="55655D"/>
-                </a:solidFill>
-                <a:latin typeface="Calibri" pitchFamily="34" charset="0"/>
-                <a:ea typeface="Calibri" pitchFamily="34" charset="-122"/>
-                <a:cs typeface="Calibri" pitchFamily="34" charset="-120"/>
-              </a:rPr>
-              <a:t>Same kit, after the fix</a:t>
-            </a:r>
-            <a:endParaRPr lang="en-US" sz="1400" dirty="0"/>
-          </a:p>
-        </p:txBody>
-      </p:sp>
-      <p:sp>
-        <p:nvSpPr>
-          <p:cNvPr id="38" name="Shape 33"/>
-          <p:cNvSpPr/>
-          <p:nvPr/>
-        </p:nvSpPr>
-        <p:spPr>
-          <a:xfrm>
-            <a:off x="9326880" y="4023360"/>
-            <a:ext cx="201168" cy="256032"/>
-          </a:xfrm>
-          <a:prstGeom prst="rightArrow">
-            <a:avLst/>
-          </a:prstGeom>
-          <a:solidFill>
-            <a:srgbClr val="3DCD58"/>
-          </a:solidFill>
-          <a:ln w="12700">
-            <a:solidFill>
-              <a:srgbClr val="3DCD58"/>
-            </a:solidFill>
-            <a:prstDash val="solid"/>
-          </a:ln>
-        </p:spPr>
-      </p:sp>
-      <p:sp>
-        <p:nvSpPr>
-          <p:cNvPr id="39" name="Shape 34"/>
-          <p:cNvSpPr/>
-          <p:nvPr/>
-        </p:nvSpPr>
-        <p:spPr>
-          <a:xfrm>
-            <a:off x="9546336" y="3520440"/>
-            <a:ext cx="2011680" cy="1325880"/>
-          </a:xfrm>
-          <a:prstGeom prst="roundRect">
-            <a:avLst>
-              <a:gd name="adj" fmla="val 5517"/>
-            </a:avLst>
-          </a:prstGeom>
-          <a:solidFill>
-            <a:srgbClr val="FFFFFF"/>
-          </a:solidFill>
-          <a:ln w="12700">
-            <a:solidFill>
-              <a:srgbClr val="D3DFD7"/>
-            </a:solidFill>
-            <a:prstDash val="solid"/>
-          </a:ln>
-        </p:spPr>
-      </p:sp>
-      <p:sp>
-        <p:nvSpPr>
-          <p:cNvPr id="40" name="Shape 35"/>
-          <p:cNvSpPr/>
-          <p:nvPr/>
-        </p:nvSpPr>
-        <p:spPr>
-          <a:xfrm>
-            <a:off x="9656064" y="3611880"/>
-            <a:ext cx="347472" cy="347472"/>
-          </a:xfrm>
-          <a:prstGeom prst="ellipse">
-            <a:avLst/>
-          </a:prstGeom>
-          <a:solidFill>
-            <a:srgbClr val="9AA5A0"/>
-          </a:solidFill>
-          <a:ln w="12700">
-            <a:solidFill>
-              <a:srgbClr val="9AA5A0"/>
-            </a:solidFill>
-            <a:prstDash val="solid"/>
-          </a:ln>
-        </p:spPr>
-      </p:sp>
-      <p:sp>
-        <p:nvSpPr>
-          <p:cNvPr id="41" name="Text 36"/>
-          <p:cNvSpPr txBox="1"/>
-          <p:nvPr/>
-        </p:nvSpPr>
-        <p:spPr>
-          <a:xfrm>
-            <a:off x="9656064" y="3611880"/>
-            <a:ext cx="347472" cy="347472"/>
-          </a:xfrm>
-          <a:prstGeom prst="rect">
-            <a:avLst/>
-          </a:prstGeom>
-          <a:noFill/>
-          <a:ln/>
-        </p:spPr>
-        <p:txBody>
-          <a:bodyPr wrap="square" lIns="0" tIns="0" rIns="0" bIns="0" rtlCol="0" anchor="ctr"/>
-          <a:lstStyle/>
-          <a:p>
-            <a:pPr algn="ctr" indent="0" marL="0">
-              <a:buNone/>
-            </a:pPr>
-            <a:r>
-              <a:rPr lang="en-US" sz="1400" b="1" dirty="0">
-                <a:solidFill>
-                  <a:srgbClr val="FFFFFF"/>
-                </a:solidFill>
-                <a:latin typeface="Calibri" pitchFamily="34" charset="0"/>
-                <a:ea typeface="Calibri" pitchFamily="34" charset="-122"/>
-                <a:cs typeface="Calibri" pitchFamily="34" charset="-120"/>
-              </a:rPr>
-              <a:t>5</a:t>
-            </a:r>
-            <a:endParaRPr lang="en-US" sz="1400" dirty="0"/>
-          </a:p>
-        </p:txBody>
-      </p:sp>
-      <p:sp>
-        <p:nvSpPr>
-          <p:cNvPr id="42" name="Text 37"/>
-          <p:cNvSpPr txBox="1"/>
-          <p:nvPr/>
-        </p:nvSpPr>
-        <p:spPr>
-          <a:xfrm>
-            <a:off x="9656064" y="4023360"/>
-            <a:ext cx="1810512" cy="777240"/>
-          </a:xfrm>
-          <a:prstGeom prst="rect">
-            <a:avLst/>
-          </a:prstGeom>
-          <a:noFill/>
-          <a:ln/>
-        </p:spPr>
-        <p:txBody>
-          <a:bodyPr wrap="square" lIns="0" tIns="0" rIns="0" bIns="0" rtlCol="0" anchor="t"/>
-          <a:lstStyle/>
-          <a:p>
-            <a:pPr indent="0" marL="0">
-              <a:buNone/>
-            </a:pPr>
-            <a:r>
-              <a:rPr lang="en-US" sz="1400" b="1" dirty="0">
-                <a:solidFill>
-                  <a:srgbClr val="16261F"/>
-                </a:solidFill>
-                <a:latin typeface="Calibri" pitchFamily="34" charset="0"/>
-                <a:ea typeface="Calibri" pitchFamily="34" charset="-122"/>
-                <a:cs typeface="Calibri" pitchFamily="34" charset="-120"/>
-              </a:rPr>
-              <a:t>Verified saving</a:t>
-            </a:r>
-            <a:endParaRPr lang="en-US" sz="1400" dirty="0"/>
-          </a:p>
-          <a:p>
-            <a:pPr indent="0" marL="0">
-              <a:buNone/>
-            </a:pPr>
-            <a:r>
-              <a:rPr lang="en-US" sz="1200" dirty="0">
-                <a:solidFill>
-                  <a:srgbClr val="55655D"/>
-                </a:solidFill>
-                <a:latin typeface="Calibri" pitchFamily="34" charset="0"/>
-                <a:ea typeface="Calibri" pitchFamily="34" charset="-122"/>
-                <a:cs typeface="Calibri" pitchFamily="34" charset="-120"/>
-              </a:rPr>
-              <a:t>Feeds energy management, e.g. EcoStruxure</a:t>
-            </a:r>
-            <a:endParaRPr lang="en-US" sz="1400" dirty="0"/>
-          </a:p>
-        </p:txBody>
-      </p:sp>
-      <p:sp>
-        <p:nvSpPr>
-          <p:cNvPr id="43" name="Shape 38"/>
-          <p:cNvSpPr/>
-          <p:nvPr/>
-        </p:nvSpPr>
-        <p:spPr>
-          <a:xfrm>
-            <a:off x="548640" y="5029200"/>
-            <a:ext cx="6766560" cy="1280160"/>
-          </a:xfrm>
-          <a:prstGeom prst="roundRect">
-            <a:avLst>
-              <a:gd name="adj" fmla="val 5714"/>
-            </a:avLst>
-          </a:prstGeom>
-          <a:solidFill>
-            <a:srgbClr val="E3F6E8"/>
-          </a:solidFill>
-          <a:ln w="19050">
-            <a:solidFill>
-              <a:srgbClr val="3DCD58"/>
-            </a:solidFill>
-            <a:prstDash val="solid"/>
-          </a:ln>
-        </p:spPr>
-      </p:sp>
-      <p:sp>
-        <p:nvSpPr>
-          <p:cNvPr id="44" name="Text 39"/>
-          <p:cNvSpPr txBox="1"/>
-          <p:nvPr/>
-        </p:nvSpPr>
-        <p:spPr>
-          <a:xfrm>
-            <a:off x="731520" y="5074920"/>
-            <a:ext cx="6400800" cy="1188720"/>
-          </a:xfrm>
-          <a:prstGeom prst="rect">
-            <a:avLst/>
-          </a:prstGeom>
-          <a:noFill/>
-          <a:ln/>
-        </p:spPr>
-        <p:txBody>
-          <a:bodyPr wrap="square" lIns="0" tIns="0" rIns="0" bIns="0" rtlCol="0" anchor="ctr"/>
-          <a:lstStyle/>
-          <a:p>
-            <a:pPr indent="0" marL="0">
-              <a:buNone/>
-            </a:pPr>
-            <a:r>
-              <a:rPr lang="en-US" sz="1500" b="1" dirty="0">
-                <a:solidFill>
-                  <a:srgbClr val="0E5A32"/>
-                </a:solidFill>
-                <a:latin typeface="Calibri" pitchFamily="34" charset="0"/>
-                <a:ea typeface="Calibri" pitchFamily="34" charset="-122"/>
-                <a:cs typeface="Calibri" pitchFamily="34" charset="-120"/>
-              </a:rPr>
-              <a:t>Why this helps drive and EMS adoption</a:t>
-            </a:r>
-            <a:endParaRPr lang="en-US" sz="1500" dirty="0"/>
-          </a:p>
-          <a:p>
-            <a:pPr indent="0" marL="0">
-              <a:buNone/>
-            </a:pPr>
-            <a:r>
               <a:rPr lang="en-US" sz="1300" dirty="0">
                 <a:solidFill>
-                  <a:srgbClr val="16261F"/>
-                </a:solidFill>
-                <a:latin typeface="Calibri" pitchFamily="34" charset="0"/>
-                <a:ea typeface="Calibri" pitchFamily="34" charset="-122"/>
-                <a:cs typeface="Calibri" pitchFamily="34" charset="-120"/>
-              </a:rPr>
-              <a:t>MSMEs that skip audits today get a ₹ case they understand, a pump-specific verdict before capex, and proof after.</a:t>
-            </a:r>
-            <a:endParaRPr lang="en-US" sz="1500" dirty="0"/>
-          </a:p>
-        </p:txBody>
-      </p:sp>
-      <p:sp>
-        <p:nvSpPr>
-          <p:cNvPr id="45" name="Shape 40"/>
-          <p:cNvSpPr/>
-          <p:nvPr/>
-        </p:nvSpPr>
-        <p:spPr>
-          <a:xfrm>
-            <a:off x="7498080" y="5029200"/>
-            <a:ext cx="4160520" cy="1280160"/>
-          </a:xfrm>
-          <a:prstGeom prst="roundRect">
-            <a:avLst>
-              <a:gd name="adj" fmla="val 5714"/>
-            </a:avLst>
-          </a:prstGeom>
-          <a:solidFill>
-            <a:srgbClr val="FFFFFF"/>
-          </a:solidFill>
-          <a:ln w="12700">
-            <a:solidFill>
-              <a:srgbClr val="D3DFD7"/>
-            </a:solidFill>
-            <a:prstDash val="solid"/>
-          </a:ln>
-        </p:spPr>
-      </p:sp>
-      <p:sp>
-        <p:nvSpPr>
-          <p:cNvPr id="46" name="Text 41"/>
-          <p:cNvSpPr txBox="1"/>
-          <p:nvPr/>
-        </p:nvSpPr>
-        <p:spPr>
-          <a:xfrm>
-            <a:off x="7635240" y="5074920"/>
-            <a:ext cx="3931920" cy="1188720"/>
-          </a:xfrm>
-          <a:prstGeom prst="rect">
-            <a:avLst/>
-          </a:prstGeom>
-          <a:noFill/>
-          <a:ln/>
-        </p:spPr>
-        <p:txBody>
-          <a:bodyPr wrap="square" lIns="0" tIns="0" rIns="0" bIns="0" rtlCol="0" anchor="ctr"/>
-          <a:lstStyle/>
-          <a:p>
-            <a:pPr indent="0" marL="0">
-              <a:buNone/>
-            </a:pPr>
-            <a:r>
-              <a:rPr lang="en-US" sz="1500" b="1" dirty="0">
-                <a:solidFill>
-                  <a:srgbClr val="0E5A32"/>
-                </a:solidFill>
-                <a:latin typeface="Calibri" pitchFamily="34" charset="0"/>
-                <a:ea typeface="Calibri" pitchFamily="34" charset="-122"/>
-                <a:cs typeface="Calibri" pitchFamily="34" charset="-120"/>
-              </a:rPr>
-              <a:t>Smart Manufacturing fit</a:t>
-            </a:r>
-            <a:endParaRPr lang="en-US" sz="1500" dirty="0"/>
-          </a:p>
-          <a:p>
-            <a:pPr indent="0" marL="0">
-              <a:buNone/>
-            </a:pPr>
-            <a:r>
-              <a:rPr lang="en-US" sz="1300" dirty="0">
-                <a:solidFill>
-                  <a:srgbClr val="16261F"/>
-                </a:solidFill>
-                <a:latin typeface="Calibri" pitchFamily="34" charset="0"/>
-                <a:ea typeface="Calibri" pitchFamily="34" charset="-122"/>
-                <a:cs typeface="Calibri" pitchFamily="34" charset="-120"/>
-              </a:rPr>
-              <a:t>Energy efficiency · productivity · digitalisation · sustainability</a:t>
-            </a:r>
-            <a:endParaRPr lang="en-US" sz="1500" dirty="0"/>
-          </a:p>
-          <a:p>
-            <a:pPr indent="0" marL="0">
-              <a:buNone/>
-            </a:pPr>
-            <a:r>
-              <a:rPr lang="en-US" sz="1100" i="1" dirty="0">
-                <a:solidFill>
-                  <a:srgbClr val="55655D"/>
-                </a:solidFill>
-                <a:latin typeface="Calibri" pitchFamily="34" charset="0"/>
-                <a:ea typeface="Calibri" pitchFamily="34" charset="-122"/>
-                <a:cs typeface="Calibri" pitchFamily="34" charset="-120"/>
-              </a:rPr>
-              <a:t>Concept only: no drive or platform integration built.</a:t>
-            </a:r>
-            <a:endParaRPr lang="en-US" sz="1500" dirty="0"/>
+                  <a:srgbClr val="CFE9D6"/>
+                </a:solidFill>
+                <a:latin typeface="Calibri" pitchFamily="34" charset="0"/>
+                <a:ea typeface="Calibri" pitchFamily="34" charset="-122"/>
+                <a:cs typeface="Calibri" pitchFamily="34" charset="-120"/>
+              </a:rPr>
+              <a:t>We found no low-cost shared kit that combines these. That is a search result, not proof that none exists.</a:t>
+            </a:r>
+            <a:endParaRPr lang="en-US" sz="1700" dirty="0"/>
           </a:p>
         </p:txBody>
       </p:sp>
